--- a/Intain-Verify-Pitch.pptx
+++ b/Intain-Verify-Pitch.pptx
@@ -4,6 +4,9 @@
   <p:sldMasterIdLst>
     <p:sldMasterId id="2147483648" r:id="rId1"/>
   </p:sldMasterIdLst>
+  <p:notesMasterIdLst>
+    <p:notesMasterId r:id="rId15"/>
+  </p:notesMasterIdLst>
   <p:sldIdLst>
     <p:sldId id="256" r:id="rId2"/>
     <p:sldId id="257" r:id="rId3"/>
@@ -19,9 +22,6 @@
     <p:sldId id="267" r:id="rId13"/>
     <p:sldId id="268" r:id="rId14"/>
   </p:sldIdLst>
-  <p:notesMasterIdLst>
-    <p:notesMasterId r:id="rId15"/>
-  </p:notesMasterIdLst>
   <p:sldSz cx="12192000" cy="6858000"/>
   <p:notesSz cx="6858000" cy="12192000"/>
   <p:defaultTextStyle>
@@ -116,6 +116,11 @@
       </a:defRPr>
     </a:lvl9pPr>
   </p:defaultTextStyle>
+  <p:extLst>
+    <p:ext uri="{EFAFB233-063F-42B5-8137-9DF3F51BA10A}">
+      <p15:sldGuideLst xmlns:p15="http://schemas.microsoft.com/office/powerpoint/2012/main"/>
+    </p:ext>
+  </p:extLst>
 </p:presentation>
 </file>
 
@@ -141,234 +146,10 @@
           <a:chExt cx="0" cy="0"/>
         </a:xfrm>
       </p:grpSpPr>
-      <p:sp>
-        <p:nvSpPr>
-          <p:cNvPr id="2" name="Header Placeholder 1"/>
-          <p:cNvSpPr>
-            <a:spLocks noGrp="1"/>
-          </p:cNvSpPr>
-          <p:nvPr>
-            <p:ph type="hdr" sz="quarter"/>
-          </p:nvPr>
-        </p:nvSpPr>
-        <p:spPr>
-          <a:xfrm>
-            <a:off x="0" y="0"/>
-            <a:ext cx="2971800" cy="458788"/>
-          </a:xfrm>
-          <a:prstGeom prst="rect">
-            <a:avLst/>
-          </a:prstGeom>
-        </p:spPr>
-        <p:txBody>
-          <a:bodyPr vert="horz" lIns="91440" tIns="45720" rIns="91440" bIns="45720" rtlCol="0"/>
-          <a:lstStyle>
-            <a:lvl1pPr algn="l">
-              <a:defRPr sz="1200"/>
-            </a:lvl1pPr>
-          </a:lstStyle>
-          <a:p>
-            <a:endParaRPr lang="en-US"/>
-          </a:p>
-        </p:txBody>
-      </p:sp>
-      <p:sp>
-        <p:nvSpPr>
-          <p:cNvPr id="3" name="Date Placeholder 2"/>
-          <p:cNvSpPr>
-            <a:spLocks noGrp="1"/>
-          </p:cNvSpPr>
-          <p:nvPr>
-            <p:ph type="dt" idx="1"/>
-          </p:nvPr>
-        </p:nvSpPr>
-        <p:spPr>
-          <a:xfrm>
-            <a:off x="3884613" y="0"/>
-            <a:ext cx="2971800" cy="458788"/>
-          </a:xfrm>
-          <a:prstGeom prst="rect">
-            <a:avLst/>
-          </a:prstGeom>
-        </p:spPr>
-        <p:txBody>
-          <a:bodyPr vert="horz" lIns="91440" tIns="45720" rIns="91440" bIns="45720" rtlCol="0"/>
-          <a:lstStyle>
-            <a:lvl1pPr algn="r">
-              <a:defRPr sz="1200"/>
-            </a:lvl1pPr>
-          </a:lstStyle>
-          <a:p>
-            <a:fld id="{5282F153-3F37-0F45-9E97-73ACFA13230C}" type="datetimeFigureOut">
-              <a:rPr lang="en-US"/>
-              <a:t>7/23/19</a:t>
-            </a:fld>
-            <a:endParaRPr lang="en-US"/>
-          </a:p>
-        </p:txBody>
-      </p:sp>
-      <p:sp>
-        <p:nvSpPr>
-          <p:cNvPr id="4" name="Slide Image Placeholder 3"/>
-          <p:cNvSpPr>
-            <a:spLocks noGrp="1" noRot="1" noChangeAspect="1"/>
-          </p:cNvSpPr>
-          <p:nvPr>
-            <p:ph type="sldImg" idx="2"/>
-          </p:nvPr>
-        </p:nvSpPr>
-        <p:spPr>
-          <a:xfrm>
-            <a:off x="685800" y="1143000"/>
-            <a:ext cx="5486400" cy="3086100"/>
-          </a:xfrm>
-          <a:prstGeom prst="rect">
-            <a:avLst/>
-          </a:prstGeom>
-          <a:noFill/>
-          <a:ln w="12700">
-            <a:solidFill>
-              <a:prstClr val="black"/>
-            </a:solidFill>
-          </a:ln>
-        </p:spPr>
-        <p:txBody>
-          <a:bodyPr vert="horz" lIns="91440" tIns="45720" rIns="91440" bIns="45720" rtlCol="0" anchor="ctr"/>
-          <a:lstStyle/>
-          <a:p>
-            <a:endParaRPr lang="en-US"/>
-          </a:p>
-        </p:txBody>
-      </p:sp>
-      <p:sp>
-        <p:nvSpPr>
-          <p:cNvPr id="5" name="Notes Placeholder 4"/>
-          <p:cNvSpPr>
-            <a:spLocks noGrp="1"/>
-          </p:cNvSpPr>
-          <p:nvPr>
-            <p:ph type="body" sz="quarter" idx="3"/>
-          </p:nvPr>
-        </p:nvSpPr>
-        <p:spPr>
-          <a:xfrm>
-            <a:off x="685800" y="4400550"/>
-            <a:ext cx="5486400" cy="3600450"/>
-          </a:xfrm>
-          <a:prstGeom prst="rect">
-            <a:avLst/>
-          </a:prstGeom>
-        </p:spPr>
-        <p:txBody>
-          <a:bodyPr vert="horz" lIns="91440" tIns="45720" rIns="91440" bIns="45720" rtlCol="0"/>
-          <a:lstStyle/>
-          <a:p>
-            <a:pPr lvl="0"/>
-            <a:r>
-              <a:rPr lang="en-US"/>
-              <a:t>Click to edit Master text styles</a:t>
-            </a:r>
-          </a:p>
-          <a:p>
-            <a:pPr lvl="1"/>
-            <a:r>
-              <a:rPr lang="en-US"/>
-              <a:t>Second level</a:t>
-            </a:r>
-          </a:p>
-          <a:p>
-            <a:pPr lvl="2"/>
-            <a:r>
-              <a:rPr lang="en-US"/>
-              <a:t>Third level</a:t>
-            </a:r>
-          </a:p>
-          <a:p>
-            <a:pPr lvl="3"/>
-            <a:r>
-              <a:rPr lang="en-US"/>
-              <a:t>Fourth level</a:t>
-            </a:r>
-          </a:p>
-          <a:p>
-            <a:pPr lvl="4"/>
-            <a:r>
-              <a:rPr lang="en-US"/>
-              <a:t>Fifth level</a:t>
-            </a:r>
-          </a:p>
-        </p:txBody>
-      </p:sp>
-      <p:sp>
-        <p:nvSpPr>
-          <p:cNvPr id="6" name="Footer Placeholder 5"/>
-          <p:cNvSpPr>
-            <a:spLocks noGrp="1"/>
-          </p:cNvSpPr>
-          <p:nvPr>
-            <p:ph type="ftr" sz="quarter" idx="4"/>
-          </p:nvPr>
-        </p:nvSpPr>
-        <p:spPr>
-          <a:xfrm>
-            <a:off x="0" y="8685213"/>
-            <a:ext cx="2971800" cy="458787"/>
-          </a:xfrm>
-          <a:prstGeom prst="rect">
-            <a:avLst/>
-          </a:prstGeom>
-        </p:spPr>
-        <p:txBody>
-          <a:bodyPr vert="horz" lIns="91440" tIns="45720" rIns="91440" bIns="45720" rtlCol="0" anchor="b"/>
-          <a:lstStyle>
-            <a:lvl1pPr algn="l">
-              <a:defRPr sz="1200"/>
-            </a:lvl1pPr>
-          </a:lstStyle>
-          <a:p>
-            <a:endParaRPr lang="en-US"/>
-          </a:p>
-        </p:txBody>
-      </p:sp>
-      <p:sp>
-        <p:nvSpPr>
-          <p:cNvPr id="7" name="Slide Number Placeholder 6"/>
-          <p:cNvSpPr>
-            <a:spLocks noGrp="1"/>
-          </p:cNvSpPr>
-          <p:nvPr>
-            <p:ph type="sldNum" sz="quarter" idx="5"/>
-          </p:nvPr>
-        </p:nvSpPr>
-        <p:spPr>
-          <a:xfrm>
-            <a:off x="3884613" y="8685213"/>
-            <a:ext cx="2971800" cy="458787"/>
-          </a:xfrm>
-          <a:prstGeom prst="rect">
-            <a:avLst/>
-          </a:prstGeom>
-        </p:spPr>
-        <p:txBody>
-          <a:bodyPr vert="horz" lIns="91440" tIns="45720" rIns="91440" bIns="45720" rtlCol="0" anchor="b"/>
-          <a:lstStyle>
-            <a:lvl1pPr algn="r">
-              <a:defRPr sz="1200"/>
-            </a:lvl1pPr>
-          </a:lstStyle>
-          <a:p>
-            <a:fld id="{CE5E9CC1-C706-0F49-92D6-E571CC5EEA8F}" type="slidenum">
-              <a:rPr lang="en-US"/>
-              <a:t>‹#›</a:t>
-            </a:fld>
-            <a:endParaRPr lang="en-US"/>
-          </a:p>
-        </p:txBody>
-      </p:sp>
     </p:spTree>
     <p:extLst>
       <p:ext uri="{BB962C8B-B14F-4D97-AF65-F5344CB8AC3E}">
-        <p14:creationId xmlns:p14="http://schemas.microsoft.com/office/powerpoint/2010/main" val="1024086991"/>
+        <p14:creationId xmlns:p14="http://schemas.microsoft.com/office/powerpoint/2010/main" val="1509978604"/>
       </p:ext>
     </p:extLst>
   </p:cSld>
@@ -512,10 +293,6 @@
           <a:bodyPr/>
           <a:lstStyle/>
           <a:p>
-            <a:r>
-              <a:rPr lang="en-US" dirty="0"/>
-              <a:t/>
-            </a:r>
             <a:endParaRPr lang="en-US" dirty="0"/>
           </a:p>
         </p:txBody>
@@ -600,10 +377,6 @@
           <a:bodyPr/>
           <a:lstStyle/>
           <a:p>
-            <a:r>
-              <a:rPr lang="en-US" dirty="0"/>
-              <a:t/>
-            </a:r>
             <a:endParaRPr lang="en-US" dirty="0"/>
           </a:p>
         </p:txBody>
@@ -688,10 +461,6 @@
           <a:bodyPr/>
           <a:lstStyle/>
           <a:p>
-            <a:r>
-              <a:rPr lang="en-US" dirty="0"/>
-              <a:t/>
-            </a:r>
             <a:endParaRPr lang="en-US" dirty="0"/>
           </a:p>
         </p:txBody>
@@ -776,10 +545,6 @@
           <a:bodyPr/>
           <a:lstStyle/>
           <a:p>
-            <a:r>
-              <a:rPr lang="en-US" dirty="0"/>
-              <a:t/>
-            </a:r>
             <a:endParaRPr lang="en-US" dirty="0"/>
           </a:p>
         </p:txBody>
@@ -864,10 +629,6 @@
           <a:bodyPr/>
           <a:lstStyle/>
           <a:p>
-            <a:r>
-              <a:rPr lang="en-US" dirty="0"/>
-              <a:t/>
-            </a:r>
             <a:endParaRPr lang="en-US" dirty="0"/>
           </a:p>
         </p:txBody>
@@ -952,10 +713,6 @@
           <a:bodyPr/>
           <a:lstStyle/>
           <a:p>
-            <a:r>
-              <a:rPr lang="en-US" dirty="0"/>
-              <a:t/>
-            </a:r>
             <a:endParaRPr lang="en-US" dirty="0"/>
           </a:p>
         </p:txBody>
@@ -1040,10 +797,6 @@
           <a:bodyPr/>
           <a:lstStyle/>
           <a:p>
-            <a:r>
-              <a:rPr lang="en-US" dirty="0"/>
-              <a:t/>
-            </a:r>
             <a:endParaRPr lang="en-US" dirty="0"/>
           </a:p>
         </p:txBody>
@@ -1128,10 +881,6 @@
           <a:bodyPr/>
           <a:lstStyle/>
           <a:p>
-            <a:r>
-              <a:rPr lang="en-US" dirty="0"/>
-              <a:t/>
-            </a:r>
             <a:endParaRPr lang="en-US" dirty="0"/>
           </a:p>
         </p:txBody>
@@ -1216,10 +965,6 @@
           <a:bodyPr/>
           <a:lstStyle/>
           <a:p>
-            <a:r>
-              <a:rPr lang="en-US" dirty="0"/>
-              <a:t/>
-            </a:r>
             <a:endParaRPr lang="en-US" dirty="0"/>
           </a:p>
         </p:txBody>
@@ -1304,10 +1049,6 @@
           <a:bodyPr/>
           <a:lstStyle/>
           <a:p>
-            <a:r>
-              <a:rPr lang="en-US" dirty="0"/>
-              <a:t/>
-            </a:r>
             <a:endParaRPr lang="en-US" dirty="0"/>
           </a:p>
         </p:txBody>
@@ -1392,10 +1133,6 @@
           <a:bodyPr/>
           <a:lstStyle/>
           <a:p>
-            <a:r>
-              <a:rPr lang="en-US" dirty="0"/>
-              <a:t/>
-            </a:r>
             <a:endParaRPr lang="en-US" dirty="0"/>
           </a:p>
         </p:txBody>
@@ -1480,10 +1217,6 @@
           <a:bodyPr/>
           <a:lstStyle/>
           <a:p>
-            <a:r>
-              <a:rPr lang="en-US" dirty="0"/>
-              <a:t/>
-            </a:r>
             <a:endParaRPr lang="en-US" dirty="0"/>
           </a:p>
         </p:txBody>
@@ -1568,10 +1301,6 @@
           <a:bodyPr/>
           <a:lstStyle/>
           <a:p>
-            <a:r>
-              <a:rPr lang="en-US" dirty="0"/>
-              <a:t/>
-            </a:r>
             <a:endParaRPr lang="en-US" dirty="0"/>
           </a:p>
         </p:txBody>
@@ -1645,6 +1374,11 @@
 <file path=ppt/slideMasters/slideMaster1.xml><?xml version="1.0" encoding="utf-8"?>
 <p:sldMaster xmlns:a="http://schemas.openxmlformats.org/drawingml/2006/main" xmlns:r="http://schemas.openxmlformats.org/officeDocument/2006/relationships" xmlns:p="http://schemas.openxmlformats.org/presentationml/2006/main">
   <p:cSld>
+    <p:bg>
+      <p:bgRef idx="1001">
+        <a:schemeClr val="bg1"/>
+      </p:bgRef>
+    </p:bg>
     <p:spTree>
       <p:nvGrpSpPr>
         <p:cNvPr id="1" name=""/>
@@ -1927,6 +1661,7 @@
         <a:solidFill>
           <a:srgbClr val="0B1220"/>
         </a:solidFill>
+        <a:effectLst/>
       </p:bgPr>
     </p:bg>
     <p:spTree>
@@ -1945,26 +1680,6 @@
       </p:grpSpPr>
       <p:sp>
         <p:nvSpPr>
-          <p:cNvPr id="2" name="Shape 0"/>
-          <p:cNvSpPr/>
-          <p:nvPr/>
-        </p:nvSpPr>
-        <p:spPr>
-          <a:xfrm>
-            <a:off x="0" y="6126480"/>
-            <a:ext cx="12188952" cy="731520"/>
-          </a:xfrm>
-          <a:prstGeom prst="rect">
-            <a:avLst/>
-          </a:prstGeom>
-          <a:solidFill>
-            <a:srgbClr val="111A2E"/>
-          </a:solidFill>
-          <a:ln/>
-        </p:spPr>
-      </p:sp>
-      <p:sp>
-        <p:nvSpPr>
           <p:cNvPr id="3" name="Shape 1"/>
           <p:cNvSpPr/>
           <p:nvPr/>
@@ -2004,11 +1719,11 @@
           <a:bodyPr wrap="square" rtlCol="0" anchor="ctr"/>
           <a:lstStyle/>
           <a:p>
-            <a:pPr indent="0" marL="0">
-              <a:buNone/>
-            </a:pPr>
-            <a:r>
-              <a:rPr lang="en-US" sz="5400" b="1" spc="400" kern="0" dirty="0">
+            <a:pPr marL="0" indent="0">
+              <a:buNone/>
+            </a:pPr>
+            <a:r>
+              <a:rPr lang="en-US" sz="5400" b="1" kern="0" spc="400" dirty="0">
                 <a:solidFill>
                   <a:srgbClr val="F3F4F6"/>
                 </a:solidFill>
@@ -2043,7 +1758,7 @@
           <a:bodyPr wrap="square" rtlCol="0" anchor="ctr"/>
           <a:lstStyle/>
           <a:p>
-            <a:pPr indent="0" marL="0">
+            <a:pPr marL="0" indent="0">
               <a:buNone/>
             </a:pPr>
             <a:r>
@@ -2082,7 +1797,7 @@
           <a:bodyPr wrap="square" rtlCol="0" anchor="ctr"/>
           <a:lstStyle/>
           <a:p>
-            <a:pPr indent="0" marL="0">
+            <a:pPr marL="0" indent="0">
               <a:buNone/>
             </a:pPr>
             <a:r>
@@ -2148,7 +1863,7 @@
           <a:bodyPr wrap="square" rtlCol="0" anchor="ctr"/>
           <a:lstStyle/>
           <a:p>
-            <a:pPr indent="0" marL="0">
+            <a:pPr marL="0" indent="0">
               <a:buNone/>
             </a:pPr>
             <a:r>
@@ -2187,11 +1902,11 @@
           <a:bodyPr wrap="square" rtlCol="0" anchor="ctr"/>
           <a:lstStyle/>
           <a:p>
-            <a:pPr indent="0" marL="0">
-              <a:buNone/>
-            </a:pPr>
-            <a:r>
-              <a:rPr lang="en-US" sz="1500" dirty="0">
+            <a:pPr marL="0" indent="0">
+              <a:buNone/>
+            </a:pPr>
+            <a:r>
+              <a:rPr lang="en-US" sz="1500" dirty="0" err="1" smtClean="0">
                 <a:solidFill>
                   <a:srgbClr val="F3F4F6"/>
                 </a:solidFill>
@@ -2199,77 +1914,10 @@
                 <a:ea typeface="Consolas" pitchFamily="34" charset="-122"/>
                 <a:cs typeface="Consolas" pitchFamily="34" charset="-120"/>
               </a:rPr>
-              <a:t>Ritika Bisht</a:t>
-            </a:r>
-            <a:endParaRPr lang="en-US" sz="1500" dirty="0"/>
-          </a:p>
-        </p:txBody>
-      </p:sp>
-      <p:sp>
-        <p:nvSpPr>
-          <p:cNvPr id="10" name="Text 8"/>
-          <p:cNvSpPr/>
-          <p:nvPr/>
-        </p:nvSpPr>
-        <p:spPr>
-          <a:xfrm>
-            <a:off x="914400" y="4251960"/>
-            <a:ext cx="2194560" cy="502920"/>
-          </a:xfrm>
-          <a:prstGeom prst="rect">
-            <a:avLst/>
-          </a:prstGeom>
-          <a:noFill/>
-          <a:ln/>
-        </p:spPr>
-        <p:txBody>
-          <a:bodyPr wrap="square" rtlCol="0" anchor="ctr"/>
-          <a:lstStyle/>
-          <a:p>
-            <a:pPr indent="0" marL="0">
-              <a:buNone/>
-            </a:pPr>
-            <a:r>
-              <a:rPr lang="en-US" sz="1400" b="1" dirty="0">
-                <a:solidFill>
-                  <a:srgbClr val="9CA3AF"/>
-                </a:solidFill>
-                <a:latin typeface="Segoe UI" pitchFamily="34" charset="0"/>
-                <a:ea typeface="Segoe UI" pitchFamily="34" charset="-122"/>
-                <a:cs typeface="Segoe UI" pitchFamily="34" charset="-120"/>
-              </a:rPr>
-              <a:t>Live URL</a:t>
-            </a:r>
-            <a:endParaRPr lang="en-US" sz="1400" dirty="0"/>
-          </a:p>
-        </p:txBody>
-      </p:sp>
-      <p:sp>
-        <p:nvSpPr>
-          <p:cNvPr id="11" name="Text 9"/>
-          <p:cNvSpPr/>
-          <p:nvPr/>
-        </p:nvSpPr>
-        <p:spPr>
-          <a:xfrm>
-            <a:off x="3200400" y="4251960"/>
-            <a:ext cx="8229600" cy="502920"/>
-          </a:xfrm>
-          <a:prstGeom prst="rect">
-            <a:avLst/>
-          </a:prstGeom>
-          <a:noFill/>
-          <a:ln/>
-        </p:spPr>
-        <p:txBody>
-          <a:bodyPr wrap="square" rtlCol="0" anchor="ctr"/>
-          <a:lstStyle/>
-          <a:p>
-            <a:pPr indent="0" marL="0">
-              <a:buNone/>
-            </a:pPr>
-            <a:r>
-              <a:rPr lang="en-US" sz="1500" dirty="0">
+              <a:t>Krits</a:t>
+            </a:r>
+            <a:r>
+              <a:rPr lang="en-US" sz="1500" dirty="0" smtClean="0">
                 <a:solidFill>
                   <a:srgbClr val="F3F4F6"/>
                 </a:solidFill>
@@ -2277,77 +1925,10 @@
                 <a:ea typeface="Consolas" pitchFamily="34" charset="-122"/>
                 <a:cs typeface="Consolas" pitchFamily="34" charset="-120"/>
               </a:rPr>
-              <a:t>https://demourl.com</a:t>
-            </a:r>
-            <a:endParaRPr lang="en-US" sz="1500" dirty="0"/>
-          </a:p>
-        </p:txBody>
-      </p:sp>
-      <p:sp>
-        <p:nvSpPr>
-          <p:cNvPr id="12" name="Text 10"/>
-          <p:cNvSpPr/>
-          <p:nvPr/>
-        </p:nvSpPr>
-        <p:spPr>
-          <a:xfrm>
-            <a:off x="914400" y="4754880"/>
-            <a:ext cx="2194560" cy="502920"/>
-          </a:xfrm>
-          <a:prstGeom prst="rect">
-            <a:avLst/>
-          </a:prstGeom>
-          <a:noFill/>
-          <a:ln/>
-        </p:spPr>
-        <p:txBody>
-          <a:bodyPr wrap="square" rtlCol="0" anchor="ctr"/>
-          <a:lstStyle/>
-          <a:p>
-            <a:pPr indent="0" marL="0">
-              <a:buNone/>
-            </a:pPr>
-            <a:r>
-              <a:rPr lang="en-US" sz="1400" b="1" dirty="0">
-                <a:solidFill>
-                  <a:srgbClr val="9CA3AF"/>
-                </a:solidFill>
-                <a:latin typeface="Segoe UI" pitchFamily="34" charset="0"/>
-                <a:ea typeface="Segoe UI" pitchFamily="34" charset="-122"/>
-                <a:cs typeface="Segoe UI" pitchFamily="34" charset="-120"/>
-              </a:rPr>
-              <a:t>Repo URL</a:t>
-            </a:r>
-            <a:endParaRPr lang="en-US" sz="1400" dirty="0"/>
-          </a:p>
-        </p:txBody>
-      </p:sp>
-      <p:sp>
-        <p:nvSpPr>
-          <p:cNvPr id="13" name="Text 11"/>
-          <p:cNvSpPr/>
-          <p:nvPr/>
-        </p:nvSpPr>
-        <p:spPr>
-          <a:xfrm>
-            <a:off x="3200400" y="4754880"/>
-            <a:ext cx="8229600" cy="502920"/>
-          </a:xfrm>
-          <a:prstGeom prst="rect">
-            <a:avLst/>
-          </a:prstGeom>
-          <a:noFill/>
-          <a:ln/>
-        </p:spPr>
-        <p:txBody>
-          <a:bodyPr wrap="square" rtlCol="0" anchor="ctr"/>
-          <a:lstStyle/>
-          <a:p>
-            <a:pPr indent="0" marL="0">
-              <a:buNone/>
-            </a:pPr>
-            <a:r>
-              <a:rPr lang="en-US" sz="1500" dirty="0">
+              <a:t> Code(</a:t>
+            </a:r>
+            <a:r>
+              <a:rPr lang="en-US" sz="1500" dirty="0" err="1" smtClean="0">
                 <a:solidFill>
                   <a:srgbClr val="F3F4F6"/>
                 </a:solidFill>
@@ -2355,7 +1936,190 @@
                 <a:ea typeface="Consolas" pitchFamily="34" charset="-122"/>
                 <a:cs typeface="Consolas" pitchFamily="34" charset="-120"/>
               </a:rPr>
-              <a:t>https://github/repodemo</a:t>
+              <a:t>Ritika</a:t>
+            </a:r>
+            <a:r>
+              <a:rPr lang="en-US" sz="1500" dirty="0" smtClean="0">
+                <a:solidFill>
+                  <a:srgbClr val="F3F4F6"/>
+                </a:solidFill>
+                <a:latin typeface="Consolas" pitchFamily="34" charset="0"/>
+                <a:ea typeface="Consolas" pitchFamily="34" charset="-122"/>
+                <a:cs typeface="Consolas" pitchFamily="34" charset="-120"/>
+              </a:rPr>
+              <a:t> </a:t>
+            </a:r>
+            <a:r>
+              <a:rPr lang="en-US" sz="1500" dirty="0" err="1" smtClean="0">
+                <a:solidFill>
+                  <a:srgbClr val="F3F4F6"/>
+                </a:solidFill>
+                <a:latin typeface="Consolas" pitchFamily="34" charset="0"/>
+                <a:ea typeface="Consolas" pitchFamily="34" charset="-122"/>
+                <a:cs typeface="Consolas" pitchFamily="34" charset="-120"/>
+              </a:rPr>
+              <a:t>Bisht</a:t>
+            </a:r>
+            <a:r>
+              <a:rPr lang="en-US" sz="1500" dirty="0" smtClean="0">
+                <a:solidFill>
+                  <a:srgbClr val="F3F4F6"/>
+                </a:solidFill>
+                <a:latin typeface="Consolas" pitchFamily="34" charset="0"/>
+                <a:ea typeface="Consolas" pitchFamily="34" charset="-122"/>
+                <a:cs typeface="Consolas" pitchFamily="34" charset="-120"/>
+              </a:rPr>
+              <a:t>)</a:t>
+            </a:r>
+            <a:endParaRPr lang="en-US" sz="1500" dirty="0"/>
+          </a:p>
+        </p:txBody>
+      </p:sp>
+      <p:sp>
+        <p:nvSpPr>
+          <p:cNvPr id="10" name="Text 8"/>
+          <p:cNvSpPr/>
+          <p:nvPr/>
+        </p:nvSpPr>
+        <p:spPr>
+          <a:xfrm>
+            <a:off x="914400" y="4251960"/>
+            <a:ext cx="2194560" cy="502920"/>
+          </a:xfrm>
+          <a:prstGeom prst="rect">
+            <a:avLst/>
+          </a:prstGeom>
+          <a:noFill/>
+          <a:ln/>
+        </p:spPr>
+        <p:txBody>
+          <a:bodyPr wrap="square" rtlCol="0" anchor="ctr"/>
+          <a:lstStyle/>
+          <a:p>
+            <a:pPr marL="0" indent="0">
+              <a:buNone/>
+            </a:pPr>
+            <a:r>
+              <a:rPr lang="en-US" sz="1400" b="1" dirty="0">
+                <a:solidFill>
+                  <a:srgbClr val="9CA3AF"/>
+                </a:solidFill>
+                <a:latin typeface="Segoe UI" pitchFamily="34" charset="0"/>
+                <a:ea typeface="Segoe UI" pitchFamily="34" charset="-122"/>
+                <a:cs typeface="Segoe UI" pitchFamily="34" charset="-120"/>
+              </a:rPr>
+              <a:t>Live URL</a:t>
+            </a:r>
+            <a:endParaRPr lang="en-US" sz="1400" dirty="0"/>
+          </a:p>
+        </p:txBody>
+      </p:sp>
+      <p:sp>
+        <p:nvSpPr>
+          <p:cNvPr id="11" name="Text 9"/>
+          <p:cNvSpPr/>
+          <p:nvPr/>
+        </p:nvSpPr>
+        <p:spPr>
+          <a:xfrm>
+            <a:off x="3200400" y="4251960"/>
+            <a:ext cx="8229600" cy="502920"/>
+          </a:xfrm>
+          <a:prstGeom prst="rect">
+            <a:avLst/>
+          </a:prstGeom>
+          <a:noFill/>
+          <a:ln/>
+        </p:spPr>
+        <p:txBody>
+          <a:bodyPr wrap="square" rtlCol="0" anchor="ctr"/>
+          <a:lstStyle/>
+          <a:p>
+            <a:r>
+              <a:rPr lang="en-US" sz="1500" dirty="0">
+                <a:solidFill>
+                  <a:srgbClr val="F3F4F6"/>
+                </a:solidFill>
+                <a:latin typeface="Consolas" pitchFamily="34" charset="0"/>
+                <a:ea typeface="Consolas" pitchFamily="34" charset="-122"/>
+                <a:cs typeface="Consolas" pitchFamily="34" charset="-120"/>
+              </a:rPr>
+              <a:t>https://intain-full-stack-hackathon-solutio-pi.vercel.app/login</a:t>
+            </a:r>
+            <a:endParaRPr lang="en-US" sz="1500" dirty="0"/>
+          </a:p>
+        </p:txBody>
+      </p:sp>
+      <p:sp>
+        <p:nvSpPr>
+          <p:cNvPr id="12" name="Text 10"/>
+          <p:cNvSpPr/>
+          <p:nvPr/>
+        </p:nvSpPr>
+        <p:spPr>
+          <a:xfrm>
+            <a:off x="914400" y="4754880"/>
+            <a:ext cx="2194560" cy="502920"/>
+          </a:xfrm>
+          <a:prstGeom prst="rect">
+            <a:avLst/>
+          </a:prstGeom>
+          <a:noFill/>
+          <a:ln/>
+        </p:spPr>
+        <p:txBody>
+          <a:bodyPr wrap="square" rtlCol="0" anchor="ctr"/>
+          <a:lstStyle/>
+          <a:p>
+            <a:pPr marL="0" indent="0">
+              <a:buNone/>
+            </a:pPr>
+            <a:r>
+              <a:rPr lang="en-US" sz="1400" b="1" dirty="0">
+                <a:solidFill>
+                  <a:srgbClr val="9CA3AF"/>
+                </a:solidFill>
+                <a:latin typeface="Segoe UI" pitchFamily="34" charset="0"/>
+                <a:ea typeface="Segoe UI" pitchFamily="34" charset="-122"/>
+                <a:cs typeface="Segoe UI" pitchFamily="34" charset="-120"/>
+              </a:rPr>
+              <a:t>Repo URL</a:t>
+            </a:r>
+            <a:endParaRPr lang="en-US" sz="1400" dirty="0"/>
+          </a:p>
+        </p:txBody>
+      </p:sp>
+      <p:sp>
+        <p:nvSpPr>
+          <p:cNvPr id="13" name="Text 11"/>
+          <p:cNvSpPr/>
+          <p:nvPr/>
+        </p:nvSpPr>
+        <p:spPr>
+          <a:xfrm>
+            <a:off x="3200400" y="4754880"/>
+            <a:ext cx="8229600" cy="502920"/>
+          </a:xfrm>
+          <a:prstGeom prst="rect">
+            <a:avLst/>
+          </a:prstGeom>
+          <a:noFill/>
+          <a:ln/>
+        </p:spPr>
+        <p:txBody>
+          <a:bodyPr wrap="square" rtlCol="0" anchor="ctr"/>
+          <a:lstStyle/>
+          <a:p>
+            <a:r>
+              <a:rPr lang="en-US" sz="1500" dirty="0">
+                <a:solidFill>
+                  <a:srgbClr val="F3F4F6"/>
+                </a:solidFill>
+                <a:latin typeface="Consolas" pitchFamily="34" charset="0"/>
+                <a:ea typeface="Consolas" pitchFamily="34" charset="-122"/>
+                <a:cs typeface="Consolas" pitchFamily="34" charset="-120"/>
+              </a:rPr>
+              <a:t>https://github.com/HeyRitika1/Intain-FullStack-Hackathon-Solution</a:t>
             </a:r>
             <a:endParaRPr lang="en-US" sz="1500" dirty="0"/>
           </a:p>
@@ -2382,20 +2146,9 @@
           <a:bodyPr wrap="square" rtlCol="0" anchor="ctr"/>
           <a:lstStyle/>
           <a:p>
-            <a:pPr algn="l" indent="0" marL="0">
-              <a:buNone/>
-            </a:pPr>
-            <a:r>
-              <a:rPr lang="en-US" sz="1200" i="1" dirty="0">
-                <a:solidFill>
-                  <a:srgbClr val="9CA3AF"/>
-                </a:solidFill>
-                <a:latin typeface="Segoe UI" pitchFamily="34" charset="0"/>
-                <a:ea typeface="Segoe UI" pitchFamily="34" charset="-122"/>
-                <a:cs typeface="Segoe UI" pitchFamily="34" charset="-120"/>
-              </a:rPr>
-              <a:t>Product pitch deck  ·  every artefact, every guarantee, one place</a:t>
-            </a:r>
+            <a:pPr marL="0" indent="0" algn="l">
+              <a:buNone/>
+            </a:pPr>
             <a:endParaRPr lang="en-US" sz="1200" dirty="0"/>
           </a:p>
         </p:txBody>
@@ -2416,6 +2169,7 @@
         <a:solidFill>
           <a:srgbClr val="0B1220"/>
         </a:solidFill>
+        <a:effectLst/>
       </p:bgPr>
     </p:bg>
     <p:spTree>
@@ -2473,7 +2227,7 @@
           <a:bodyPr wrap="square" rtlCol="0" anchor="ctr"/>
           <a:lstStyle/>
           <a:p>
-            <a:pPr indent="0" marL="0">
+            <a:pPr marL="0" indent="0">
               <a:buNone/>
             </a:pPr>
             <a:r>
@@ -2512,7 +2266,7 @@
           <a:bodyPr wrap="square" rtlCol="0" anchor="ctr"/>
           <a:lstStyle/>
           <a:p>
-            <a:pPr algn="r" indent="0" marL="0">
+            <a:pPr marL="0" indent="0" algn="r">
               <a:buNone/>
             </a:pPr>
             <a:r>
@@ -2551,7 +2305,7 @@
           <a:bodyPr wrap="square" rtlCol="0" anchor="ctr"/>
           <a:lstStyle/>
           <a:p>
-            <a:pPr indent="0" marL="0">
+            <a:pPr marL="0" indent="0">
               <a:buNone/>
             </a:pPr>
             <a:r>
@@ -2610,7 +2364,7 @@
           <a:bodyPr wrap="square" rtlCol="0" anchor="ctr"/>
           <a:lstStyle/>
           <a:p>
-            <a:pPr indent="0" marL="0">
+            <a:pPr marL="0" indent="0">
               <a:buNone/>
             </a:pPr>
             <a:r>
@@ -2676,7 +2430,7 @@
           <a:bodyPr wrap="square" rtlCol="0" anchor="ctr"/>
           <a:lstStyle/>
           <a:p>
-            <a:pPr indent="0" marL="0">
+            <a:pPr marL="0" indent="0">
               <a:buNone/>
             </a:pPr>
             <a:r>
@@ -2974,7 +2728,7 @@
           <a:bodyPr wrap="square" rtlCol="0" anchor="ctr"/>
           <a:lstStyle/>
           <a:p>
-            <a:pPr indent="0" marL="0">
+            <a:pPr marL="0" indent="0">
               <a:buNone/>
             </a:pPr>
             <a:r>
@@ -3104,7 +2858,7 @@
           <a:bodyPr wrap="square" rtlCol="0" anchor="ctr"/>
           <a:lstStyle/>
           <a:p>
-            <a:pPr indent="0" marL="0">
+            <a:pPr marL="0" indent="0">
               <a:buNone/>
             </a:pPr>
             <a:r>
@@ -3223,6 +2977,7 @@
         <a:solidFill>
           <a:srgbClr val="0B1220"/>
         </a:solidFill>
+        <a:effectLst/>
       </p:bgPr>
     </p:bg>
     <p:spTree>
@@ -3280,7 +3035,7 @@
           <a:bodyPr wrap="square" rtlCol="0" anchor="ctr"/>
           <a:lstStyle/>
           <a:p>
-            <a:pPr indent="0" marL="0">
+            <a:pPr marL="0" indent="0">
               <a:buNone/>
             </a:pPr>
             <a:r>
@@ -3319,7 +3074,7 @@
           <a:bodyPr wrap="square" rtlCol="0" anchor="ctr"/>
           <a:lstStyle/>
           <a:p>
-            <a:pPr indent="0" marL="0">
+            <a:pPr marL="0" indent="0">
               <a:buNone/>
             </a:pPr>
             <a:r>
@@ -3378,7 +3133,7 @@
           <a:bodyPr wrap="square" rtlCol="0" anchor="ctr"/>
           <a:lstStyle/>
           <a:p>
-            <a:pPr indent="0" marL="0">
+            <a:pPr marL="0" indent="0">
               <a:buNone/>
             </a:pPr>
             <a:r>
@@ -3464,7 +3219,7 @@
           <a:bodyPr wrap="square" rtlCol="0" anchor="ctr"/>
           <a:lstStyle/>
           <a:p>
-            <a:pPr indent="0" marL="0">
+            <a:pPr marL="0" indent="0">
               <a:buNone/>
             </a:pPr>
             <a:r>
@@ -3503,7 +3258,7 @@
           <a:bodyPr wrap="square" rtlCol="0" anchor="ctr"/>
           <a:lstStyle/>
           <a:p>
-            <a:pPr indent="0" marL="0">
+            <a:pPr marL="0" indent="0">
               <a:buNone/>
             </a:pPr>
             <a:r>
@@ -3542,7 +3297,7 @@
           <a:bodyPr wrap="square" rtlCol="0" anchor="ctr"/>
           <a:lstStyle/>
           <a:p>
-            <a:pPr indent="0" marL="0">
+            <a:pPr marL="0" indent="0">
               <a:buNone/>
             </a:pPr>
             <a:r>
@@ -3628,7 +3383,7 @@
           <a:bodyPr wrap="square" rtlCol="0" anchor="ctr"/>
           <a:lstStyle/>
           <a:p>
-            <a:pPr indent="0" marL="0">
+            <a:pPr marL="0" indent="0">
               <a:buNone/>
             </a:pPr>
             <a:r>
@@ -3667,7 +3422,7 @@
           <a:bodyPr wrap="square" rtlCol="0" anchor="ctr"/>
           <a:lstStyle/>
           <a:p>
-            <a:pPr indent="0" marL="0">
+            <a:pPr marL="0" indent="0">
               <a:buNone/>
             </a:pPr>
             <a:r>
@@ -3706,7 +3461,7 @@
           <a:bodyPr wrap="square" rtlCol="0" anchor="ctr"/>
           <a:lstStyle/>
           <a:p>
-            <a:pPr indent="0" marL="0">
+            <a:pPr marL="0" indent="0">
               <a:buNone/>
             </a:pPr>
             <a:r>
@@ -3792,7 +3547,7 @@
           <a:bodyPr wrap="square" rtlCol="0" anchor="ctr"/>
           <a:lstStyle/>
           <a:p>
-            <a:pPr indent="0" marL="0">
+            <a:pPr marL="0" indent="0">
               <a:buNone/>
             </a:pPr>
             <a:r>
@@ -3831,7 +3586,7 @@
           <a:bodyPr wrap="square" rtlCol="0" anchor="ctr"/>
           <a:lstStyle/>
           <a:p>
-            <a:pPr indent="0" marL="0">
+            <a:pPr marL="0" indent="0">
               <a:buNone/>
             </a:pPr>
             <a:r>
@@ -3870,7 +3625,7 @@
           <a:bodyPr wrap="square" rtlCol="0" anchor="ctr"/>
           <a:lstStyle/>
           <a:p>
-            <a:pPr indent="0" marL="0">
+            <a:pPr marL="0" indent="0">
               <a:buNone/>
             </a:pPr>
             <a:r>
@@ -3956,7 +3711,7 @@
           <a:bodyPr wrap="square" rtlCol="0" anchor="ctr"/>
           <a:lstStyle/>
           <a:p>
-            <a:pPr indent="0" marL="0">
+            <a:pPr marL="0" indent="0">
               <a:buNone/>
             </a:pPr>
             <a:r>
@@ -3995,7 +3750,7 @@
           <a:bodyPr wrap="square" rtlCol="0" anchor="ctr"/>
           <a:lstStyle/>
           <a:p>
-            <a:pPr indent="0" marL="0">
+            <a:pPr marL="0" indent="0">
               <a:buNone/>
             </a:pPr>
             <a:r>
@@ -4034,7 +3789,7 @@
           <a:bodyPr wrap="square" rtlCol="0" anchor="ctr"/>
           <a:lstStyle/>
           <a:p>
-            <a:pPr indent="0" marL="0">
+            <a:pPr marL="0" indent="0">
               <a:buNone/>
             </a:pPr>
             <a:r>
@@ -4120,7 +3875,7 @@
           <a:bodyPr wrap="square" rtlCol="0" anchor="ctr"/>
           <a:lstStyle/>
           <a:p>
-            <a:pPr indent="0" marL="0">
+            <a:pPr marL="0" indent="0">
               <a:buNone/>
             </a:pPr>
             <a:r>
@@ -4159,7 +3914,7 @@
           <a:bodyPr wrap="square" rtlCol="0" anchor="ctr"/>
           <a:lstStyle/>
           <a:p>
-            <a:pPr indent="0" marL="0">
+            <a:pPr marL="0" indent="0">
               <a:buNone/>
             </a:pPr>
             <a:r>
@@ -4198,7 +3953,7 @@
           <a:bodyPr wrap="square" rtlCol="0" anchor="ctr"/>
           <a:lstStyle/>
           <a:p>
-            <a:pPr indent="0" marL="0">
+            <a:pPr marL="0" indent="0">
               <a:buNone/>
             </a:pPr>
             <a:r>
@@ -4284,7 +4039,7 @@
           <a:bodyPr wrap="square" rtlCol="0" anchor="ctr"/>
           <a:lstStyle/>
           <a:p>
-            <a:pPr indent="0" marL="0">
+            <a:pPr marL="0" indent="0">
               <a:buNone/>
             </a:pPr>
             <a:r>
@@ -4323,7 +4078,7 @@
           <a:bodyPr wrap="square" rtlCol="0" anchor="ctr"/>
           <a:lstStyle/>
           <a:p>
-            <a:pPr indent="0" marL="0">
+            <a:pPr marL="0" indent="0">
               <a:buNone/>
             </a:pPr>
             <a:r>
@@ -4362,7 +4117,7 @@
           <a:bodyPr wrap="square" rtlCol="0" anchor="ctr"/>
           <a:lstStyle/>
           <a:p>
-            <a:pPr indent="0" marL="0">
+            <a:pPr marL="0" indent="0">
               <a:buNone/>
             </a:pPr>
             <a:r>
@@ -4448,7 +4203,7 @@
           <a:bodyPr wrap="square" rtlCol="0" anchor="ctr"/>
           <a:lstStyle/>
           <a:p>
-            <a:pPr indent="0" marL="0">
+            <a:pPr marL="0" indent="0">
               <a:buNone/>
             </a:pPr>
             <a:r>
@@ -4487,7 +4242,7 @@
           <a:bodyPr wrap="square" rtlCol="0" anchor="ctr"/>
           <a:lstStyle/>
           <a:p>
-            <a:pPr indent="0" marL="0">
+            <a:pPr marL="0" indent="0">
               <a:buNone/>
             </a:pPr>
             <a:r>
@@ -4526,7 +4281,7 @@
           <a:bodyPr wrap="square" rtlCol="0" anchor="ctr"/>
           <a:lstStyle/>
           <a:p>
-            <a:pPr indent="0" marL="0">
+            <a:pPr marL="0" indent="0">
               <a:buNone/>
             </a:pPr>
             <a:r>
@@ -4612,7 +4367,7 @@
           <a:bodyPr wrap="square" rtlCol="0" anchor="ctr"/>
           <a:lstStyle/>
           <a:p>
-            <a:pPr indent="0" marL="0">
+            <a:pPr marL="0" indent="0">
               <a:buNone/>
             </a:pPr>
             <a:r>
@@ -4651,7 +4406,7 @@
           <a:bodyPr wrap="square" rtlCol="0" anchor="ctr"/>
           <a:lstStyle/>
           <a:p>
-            <a:pPr indent="0" marL="0">
+            <a:pPr marL="0" indent="0">
               <a:buNone/>
             </a:pPr>
             <a:r>
@@ -4690,7 +4445,7 @@
           <a:bodyPr wrap="square" rtlCol="0" anchor="ctr"/>
           <a:lstStyle/>
           <a:p>
-            <a:pPr indent="0" marL="0">
+            <a:pPr marL="0" indent="0">
               <a:buNone/>
             </a:pPr>
             <a:r>
@@ -4724,6 +4479,7 @@
         <a:solidFill>
           <a:srgbClr val="0B1220"/>
         </a:solidFill>
+        <a:effectLst/>
       </p:bgPr>
     </p:bg>
     <p:spTree>
@@ -4781,7 +4537,7 @@
           <a:bodyPr wrap="square" rtlCol="0" anchor="ctr"/>
           <a:lstStyle/>
           <a:p>
-            <a:pPr indent="0" marL="0">
+            <a:pPr marL="0" indent="0">
               <a:buNone/>
             </a:pPr>
             <a:r>
@@ -4820,7 +4576,7 @@
           <a:bodyPr wrap="square" rtlCol="0" anchor="ctr"/>
           <a:lstStyle/>
           <a:p>
-            <a:pPr indent="0" marL="0">
+            <a:pPr marL="0" indent="0">
               <a:buNone/>
             </a:pPr>
             <a:r>
@@ -4879,7 +4635,7 @@
           <a:bodyPr wrap="square" rtlCol="0" anchor="ctr"/>
           <a:lstStyle/>
           <a:p>
-            <a:pPr indent="0" marL="0">
+            <a:pPr marL="0" indent="0">
               <a:buNone/>
             </a:pPr>
             <a:r>
@@ -4945,7 +4701,7 @@
           <a:bodyPr wrap="square" rtlCol="0" anchor="ctr"/>
           <a:lstStyle/>
           <a:p>
-            <a:pPr indent="0" marL="0">
+            <a:pPr marL="0" indent="0">
               <a:buNone/>
             </a:pPr>
             <a:r>
@@ -4984,7 +4740,7 @@
           <a:bodyPr wrap="square" rtlCol="0" anchor="ctr"/>
           <a:lstStyle/>
           <a:p>
-            <a:pPr indent="0" marL="0">
+            <a:pPr marL="0" indent="0">
               <a:buNone/>
             </a:pPr>
             <a:r>
@@ -4998,9 +4754,6 @@
               </a:rPr>
               <a:t>recordHash = sha256(</a:t>
             </a:r>
-            <a:pPr indent="0" marL="0">
-              <a:buNone/>
-            </a:pPr>
             <a:r>
               <a:rPr lang="en-US" sz="1300" dirty="0">
                 <a:solidFill>
@@ -5012,9 +4765,6 @@
               </a:rPr>
               <a:t>canonicalStringify(payload)</a:t>
             </a:r>
-            <a:pPr indent="0" marL="0">
-              <a:buNone/>
-            </a:pPr>
             <a:r>
               <a:rPr lang="en-US" sz="1300" dirty="0">
                 <a:solidFill>
@@ -5226,7 +4976,7 @@
           <a:bodyPr wrap="square" rtlCol="0" anchor="ctr"/>
           <a:lstStyle/>
           <a:p>
-            <a:pPr indent="0" marL="0">
+            <a:pPr marL="0" indent="0">
               <a:buNone/>
             </a:pPr>
             <a:r>
@@ -5440,7 +5190,7 @@
           <a:bodyPr wrap="square" rtlCol="0" anchor="ctr"/>
           <a:lstStyle/>
           <a:p>
-            <a:pPr indent="0" marL="0">
+            <a:pPr marL="0" indent="0">
               <a:buNone/>
             </a:pPr>
             <a:r>
@@ -5479,7 +5229,7 @@
           <a:bodyPr wrap="square" rtlCol="0" anchor="ctr"/>
           <a:lstStyle/>
           <a:p>
-            <a:pPr indent="0" marL="0">
+            <a:pPr marL="0" indent="0">
               <a:buNone/>
             </a:pPr>
             <a:r>
@@ -5513,6 +5263,7 @@
         <a:solidFill>
           <a:srgbClr val="0B1220"/>
         </a:solidFill>
+        <a:effectLst/>
       </p:bgPr>
     </p:bg>
     <p:spTree>
@@ -5570,7 +5321,7 @@
           <a:bodyPr wrap="square" rtlCol="0" anchor="ctr"/>
           <a:lstStyle/>
           <a:p>
-            <a:pPr indent="0" marL="0">
+            <a:pPr marL="0" indent="0">
               <a:buNone/>
             </a:pPr>
             <a:r>
@@ -5609,7 +5360,7 @@
           <a:bodyPr wrap="square" rtlCol="0" anchor="ctr"/>
           <a:lstStyle/>
           <a:p>
-            <a:pPr indent="0" marL="0">
+            <a:pPr marL="0" indent="0">
               <a:buNone/>
             </a:pPr>
             <a:r>
@@ -5668,7 +5419,7 @@
           <a:bodyPr wrap="square" rtlCol="0" anchor="ctr"/>
           <a:lstStyle/>
           <a:p>
-            <a:pPr indent="0" marL="0">
+            <a:pPr marL="0" indent="0">
               <a:buNone/>
             </a:pPr>
             <a:r>
@@ -5734,7 +5485,7 @@
           <a:bodyPr wrap="square" rtlCol="0" anchor="ctr"/>
           <a:lstStyle/>
           <a:p>
-            <a:pPr indent="0" marL="0">
+            <a:pPr marL="0" indent="0">
               <a:buNone/>
             </a:pPr>
             <a:r>
@@ -5773,7 +5524,7 @@
           <a:bodyPr wrap="square" rtlCol="0" anchor="ctr"/>
           <a:lstStyle/>
           <a:p>
-            <a:pPr indent="0" marL="0">
+            <a:pPr marL="0" indent="0">
               <a:buNone/>
             </a:pPr>
             <a:r>
@@ -5812,7 +5563,7 @@
           <a:bodyPr wrap="square" rtlCol="0" anchor="ctr"/>
           <a:lstStyle/>
           <a:p>
-            <a:pPr indent="0" marL="0">
+            <a:pPr marL="0" indent="0">
               <a:buNone/>
             </a:pPr>
             <a:r>
@@ -5851,7 +5602,7 @@
           <a:bodyPr wrap="square" rtlCol="0" anchor="ctr"/>
           <a:lstStyle/>
           <a:p>
-            <a:pPr indent="0" marL="0">
+            <a:pPr marL="0" indent="0">
               <a:buNone/>
             </a:pPr>
             <a:r>
@@ -5890,7 +5641,7 @@
           <a:bodyPr wrap="square" rtlCol="0" anchor="ctr"/>
           <a:lstStyle/>
           <a:p>
-            <a:pPr indent="0" marL="0">
+            <a:pPr marL="0" indent="0">
               <a:buNone/>
             </a:pPr>
             <a:r>
@@ -5929,7 +5680,7 @@
           <a:bodyPr wrap="square" rtlCol="0" anchor="ctr"/>
           <a:lstStyle/>
           <a:p>
-            <a:pPr indent="0" marL="0">
+            <a:pPr marL="0" indent="0">
               <a:buNone/>
             </a:pPr>
             <a:r>
@@ -5968,7 +5719,7 @@
           <a:bodyPr wrap="square" rtlCol="0" anchor="ctr"/>
           <a:lstStyle/>
           <a:p>
-            <a:pPr indent="0" marL="0">
+            <a:pPr marL="0" indent="0">
               <a:buNone/>
             </a:pPr>
             <a:r>
@@ -6007,7 +5758,7 @@
           <a:bodyPr wrap="square" rtlCol="0" anchor="ctr"/>
           <a:lstStyle/>
           <a:p>
-            <a:pPr indent="0" marL="0">
+            <a:pPr marL="0" indent="0">
               <a:buNone/>
             </a:pPr>
             <a:r>
@@ -6046,7 +5797,7 @@
           <a:bodyPr wrap="square" rtlCol="0" anchor="ctr"/>
           <a:lstStyle/>
           <a:p>
-            <a:pPr indent="0" marL="0">
+            <a:pPr marL="0" indent="0">
               <a:buNone/>
             </a:pPr>
             <a:r>
@@ -6085,7 +5836,7 @@
           <a:bodyPr wrap="square" rtlCol="0" anchor="ctr"/>
           <a:lstStyle/>
           <a:p>
-            <a:pPr indent="0" marL="0">
+            <a:pPr marL="0" indent="0">
               <a:buNone/>
             </a:pPr>
             <a:r>
@@ -6124,7 +5875,7 @@
           <a:bodyPr wrap="square" rtlCol="0" anchor="ctr"/>
           <a:lstStyle/>
           <a:p>
-            <a:pPr indent="0" marL="0">
+            <a:pPr marL="0" indent="0">
               <a:buNone/>
             </a:pPr>
             <a:r>
@@ -6163,7 +5914,7 @@
           <a:bodyPr wrap="square" rtlCol="0" anchor="ctr"/>
           <a:lstStyle/>
           <a:p>
-            <a:pPr indent="0" marL="0">
+            <a:pPr marL="0" indent="0">
               <a:buNone/>
             </a:pPr>
             <a:r>
@@ -6202,7 +5953,7 @@
           <a:bodyPr wrap="square" rtlCol="0" anchor="ctr"/>
           <a:lstStyle/>
           <a:p>
-            <a:pPr indent="0" marL="0">
+            <a:pPr marL="0" indent="0">
               <a:buNone/>
             </a:pPr>
             <a:r>
@@ -6241,7 +5992,7 @@
           <a:bodyPr wrap="square" rtlCol="0" anchor="ctr"/>
           <a:lstStyle/>
           <a:p>
-            <a:pPr indent="0" marL="0">
+            <a:pPr marL="0" indent="0">
               <a:buNone/>
             </a:pPr>
             <a:r>
@@ -6302,7 +6053,7 @@
           <a:bodyPr wrap="square" rtlCol="0" anchor="ctr"/>
           <a:lstStyle/>
           <a:p>
-            <a:pPr algn="ctr" indent="0" marL="0">
+            <a:pPr marL="0" indent="0" algn="ctr">
               <a:buNone/>
             </a:pPr>
             <a:r>
@@ -6336,6 +6087,7 @@
         <a:solidFill>
           <a:srgbClr val="0B1220"/>
         </a:solidFill>
+        <a:effectLst/>
       </p:bgPr>
     </p:bg>
     <p:spTree>
@@ -6393,7 +6145,7 @@
           <a:bodyPr wrap="square" rtlCol="0" anchor="ctr"/>
           <a:lstStyle/>
           <a:p>
-            <a:pPr indent="0" marL="0">
+            <a:pPr marL="0" indent="0">
               <a:buNone/>
             </a:pPr>
             <a:r>
@@ -6432,7 +6184,7 @@
           <a:bodyPr wrap="square" rtlCol="0" anchor="ctr"/>
           <a:lstStyle/>
           <a:p>
-            <a:pPr indent="0" marL="0">
+            <a:pPr marL="0" indent="0">
               <a:buNone/>
             </a:pPr>
             <a:r>
@@ -6491,7 +6243,7 @@
           <a:bodyPr wrap="square" rtlCol="0" anchor="ctr"/>
           <a:lstStyle/>
           <a:p>
-            <a:pPr indent="0" marL="0">
+            <a:pPr marL="0" indent="0">
               <a:buNone/>
             </a:pPr>
             <a:r>
@@ -6530,7 +6282,7 @@
           <a:bodyPr wrap="square" rtlCol="0" anchor="ctr"/>
           <a:lstStyle/>
           <a:p>
-            <a:pPr indent="0" marL="0">
+            <a:pPr marL="0" indent="0">
               <a:buNone/>
             </a:pPr>
             <a:r>
@@ -6569,7 +6321,7 @@
           <a:bodyPr wrap="square" rtlCol="0" anchor="ctr"/>
           <a:lstStyle/>
           <a:p>
-            <a:pPr indent="0" marL="0">
+            <a:pPr marL="0" indent="0">
               <a:buNone/>
             </a:pPr>
             <a:r>
@@ -6608,7 +6360,7 @@
           <a:bodyPr wrap="square" rtlCol="0" anchor="ctr"/>
           <a:lstStyle/>
           <a:p>
-            <a:pPr indent="0" marL="0">
+            <a:pPr marL="0" indent="0">
               <a:buNone/>
             </a:pPr>
             <a:r>
@@ -6647,7 +6399,7 @@
           <a:bodyPr wrap="square" rtlCol="0" anchor="ctr"/>
           <a:lstStyle/>
           <a:p>
-            <a:pPr indent="0" marL="0">
+            <a:pPr marL="0" indent="0">
               <a:buNone/>
             </a:pPr>
             <a:r>
@@ -6686,7 +6438,7 @@
           <a:bodyPr wrap="square" rtlCol="0" anchor="ctr"/>
           <a:lstStyle/>
           <a:p>
-            <a:pPr indent="0" marL="0">
+            <a:pPr marL="0" indent="0">
               <a:buNone/>
             </a:pPr>
             <a:r>
@@ -6725,7 +6477,7 @@
           <a:bodyPr wrap="square" rtlCol="0" anchor="ctr"/>
           <a:lstStyle/>
           <a:p>
-            <a:pPr indent="0" marL="0">
+            <a:pPr marL="0" indent="0">
               <a:buNone/>
             </a:pPr>
             <a:r>
@@ -6764,7 +6516,7 @@
           <a:bodyPr wrap="square" rtlCol="0" anchor="ctr"/>
           <a:lstStyle/>
           <a:p>
-            <a:pPr indent="0" marL="0">
+            <a:pPr marL="0" indent="0">
               <a:buNone/>
             </a:pPr>
             <a:r>
@@ -6803,7 +6555,7 @@
           <a:bodyPr wrap="square" rtlCol="0" anchor="ctr"/>
           <a:lstStyle/>
           <a:p>
-            <a:pPr indent="0" marL="0">
+            <a:pPr marL="0" indent="0">
               <a:buNone/>
             </a:pPr>
             <a:r>
@@ -6842,7 +6594,7 @@
           <a:bodyPr wrap="square" rtlCol="0" anchor="ctr"/>
           <a:lstStyle/>
           <a:p>
-            <a:pPr indent="0" marL="0">
+            <a:pPr marL="0" indent="0">
               <a:buNone/>
             </a:pPr>
             <a:r>
@@ -6881,7 +6633,7 @@
           <a:bodyPr wrap="square" rtlCol="0" anchor="ctr"/>
           <a:lstStyle/>
           <a:p>
-            <a:pPr indent="0" marL="0">
+            <a:pPr marL="0" indent="0">
               <a:buNone/>
             </a:pPr>
             <a:r>
@@ -6920,7 +6672,7 @@
           <a:bodyPr wrap="square" rtlCol="0" anchor="ctr"/>
           <a:lstStyle/>
           <a:p>
-            <a:pPr indent="0" marL="0">
+            <a:pPr marL="0" indent="0">
               <a:buNone/>
             </a:pPr>
             <a:r>
@@ -6959,7 +6711,7 @@
           <a:bodyPr wrap="square" rtlCol="0" anchor="ctr"/>
           <a:lstStyle/>
           <a:p>
-            <a:pPr indent="0" marL="0">
+            <a:pPr marL="0" indent="0">
               <a:buNone/>
             </a:pPr>
             <a:r>
@@ -6998,7 +6750,7 @@
           <a:bodyPr wrap="square" rtlCol="0" anchor="ctr"/>
           <a:lstStyle/>
           <a:p>
-            <a:pPr indent="0" marL="0">
+            <a:pPr marL="0" indent="0">
               <a:buNone/>
             </a:pPr>
             <a:r>
@@ -7037,7 +6789,7 @@
           <a:bodyPr wrap="square" rtlCol="0" anchor="ctr"/>
           <a:lstStyle/>
           <a:p>
-            <a:pPr indent="0" marL="0">
+            <a:pPr marL="0" indent="0">
               <a:buNone/>
             </a:pPr>
             <a:r>
@@ -7076,7 +6828,7 @@
           <a:bodyPr wrap="square" rtlCol="0" anchor="ctr"/>
           <a:lstStyle/>
           <a:p>
-            <a:pPr indent="0" marL="0">
+            <a:pPr marL="0" indent="0">
               <a:buNone/>
             </a:pPr>
             <a:r>
@@ -7115,7 +6867,7 @@
           <a:bodyPr wrap="square" rtlCol="0" anchor="ctr"/>
           <a:lstStyle/>
           <a:p>
-            <a:pPr indent="0" marL="0">
+            <a:pPr marL="0" indent="0">
               <a:buNone/>
             </a:pPr>
             <a:r>
@@ -7154,7 +6906,7 @@
           <a:bodyPr wrap="square" rtlCol="0" anchor="ctr"/>
           <a:lstStyle/>
           <a:p>
-            <a:pPr indent="0" marL="0">
+            <a:pPr marL="0" indent="0">
               <a:buNone/>
             </a:pPr>
             <a:r>
@@ -7193,7 +6945,7 @@
           <a:bodyPr wrap="square" rtlCol="0" anchor="ctr"/>
           <a:lstStyle/>
           <a:p>
-            <a:pPr indent="0" marL="0">
+            <a:pPr marL="0" indent="0">
               <a:buNone/>
             </a:pPr>
             <a:r>
@@ -7232,7 +6984,7 @@
           <a:bodyPr wrap="square" rtlCol="0" anchor="ctr"/>
           <a:lstStyle/>
           <a:p>
-            <a:pPr indent="0" marL="0">
+            <a:pPr marL="0" indent="0">
               <a:buNone/>
             </a:pPr>
             <a:r>
@@ -7271,7 +7023,7 @@
           <a:bodyPr wrap="square" rtlCol="0" anchor="ctr"/>
           <a:lstStyle/>
           <a:p>
-            <a:pPr indent="0" marL="0">
+            <a:pPr marL="0" indent="0">
               <a:buNone/>
             </a:pPr>
             <a:r>
@@ -7310,7 +7062,7 @@
           <a:bodyPr wrap="square" rtlCol="0" anchor="ctr"/>
           <a:lstStyle/>
           <a:p>
-            <a:pPr indent="0" marL="0">
+            <a:pPr marL="0" indent="0">
               <a:buNone/>
             </a:pPr>
             <a:r>
@@ -7349,7 +7101,7 @@
           <a:bodyPr wrap="square" rtlCol="0" anchor="ctr"/>
           <a:lstStyle/>
           <a:p>
-            <a:pPr indent="0" marL="0">
+            <a:pPr marL="0" indent="0">
               <a:buNone/>
             </a:pPr>
             <a:r>
@@ -7388,7 +7140,7 @@
           <a:bodyPr wrap="square" rtlCol="0" anchor="ctr"/>
           <a:lstStyle/>
           <a:p>
-            <a:pPr indent="0" marL="0">
+            <a:pPr marL="0" indent="0">
               <a:buNone/>
             </a:pPr>
             <a:r>
@@ -7427,7 +7179,7 @@
           <a:bodyPr wrap="square" rtlCol="0" anchor="ctr"/>
           <a:lstStyle/>
           <a:p>
-            <a:pPr indent="0" marL="0">
+            <a:pPr marL="0" indent="0">
               <a:buNone/>
             </a:pPr>
             <a:r>
@@ -7466,7 +7218,7 @@
           <a:bodyPr wrap="square" rtlCol="0" anchor="ctr"/>
           <a:lstStyle/>
           <a:p>
-            <a:pPr indent="0" marL="0">
+            <a:pPr marL="0" indent="0">
               <a:buNone/>
             </a:pPr>
             <a:r>
@@ -7505,7 +7257,7 @@
           <a:bodyPr wrap="square" rtlCol="0" anchor="ctr"/>
           <a:lstStyle/>
           <a:p>
-            <a:pPr indent="0" marL="0">
+            <a:pPr marL="0" indent="0">
               <a:buNone/>
             </a:pPr>
             <a:r>
@@ -7544,7 +7296,7 @@
           <a:bodyPr wrap="square" rtlCol="0" anchor="ctr"/>
           <a:lstStyle/>
           <a:p>
-            <a:pPr indent="0" marL="0">
+            <a:pPr marL="0" indent="0">
               <a:buNone/>
             </a:pPr>
             <a:r>
@@ -7583,7 +7335,7 @@
           <a:bodyPr wrap="square" rtlCol="0" anchor="ctr"/>
           <a:lstStyle/>
           <a:p>
-            <a:pPr indent="0" marL="0">
+            <a:pPr marL="0" indent="0">
               <a:buNone/>
             </a:pPr>
             <a:r>
@@ -7622,7 +7374,7 @@
           <a:bodyPr wrap="square" rtlCol="0" anchor="ctr"/>
           <a:lstStyle/>
           <a:p>
-            <a:pPr indent="0" marL="0">
+            <a:pPr marL="0" indent="0">
               <a:buNone/>
             </a:pPr>
             <a:r>
@@ -7661,7 +7413,7 @@
           <a:bodyPr wrap="square" rtlCol="0" anchor="ctr"/>
           <a:lstStyle/>
           <a:p>
-            <a:pPr indent="0" marL="0">
+            <a:pPr marL="0" indent="0">
               <a:buNone/>
             </a:pPr>
             <a:r>
@@ -7700,7 +7452,7 @@
           <a:bodyPr wrap="square" rtlCol="0" anchor="ctr"/>
           <a:lstStyle/>
           <a:p>
-            <a:pPr indent="0" marL="0">
+            <a:pPr marL="0" indent="0">
               <a:buNone/>
             </a:pPr>
             <a:r>
@@ -7739,7 +7491,7 @@
           <a:bodyPr wrap="square" rtlCol="0" anchor="ctr"/>
           <a:lstStyle/>
           <a:p>
-            <a:pPr indent="0" marL="0">
+            <a:pPr marL="0" indent="0">
               <a:buNone/>
             </a:pPr>
             <a:r>
@@ -7778,7 +7530,7 @@
           <a:bodyPr wrap="square" rtlCol="0" anchor="ctr"/>
           <a:lstStyle/>
           <a:p>
-            <a:pPr indent="0" marL="0">
+            <a:pPr marL="0" indent="0">
               <a:buNone/>
             </a:pPr>
             <a:r>
@@ -7812,6 +7564,7 @@
         <a:solidFill>
           <a:srgbClr val="0B1220"/>
         </a:solidFill>
+        <a:effectLst/>
       </p:bgPr>
     </p:bg>
     <p:spTree>
@@ -7869,7 +7622,7 @@
           <a:bodyPr wrap="square" rtlCol="0" anchor="ctr"/>
           <a:lstStyle/>
           <a:p>
-            <a:pPr indent="0" marL="0">
+            <a:pPr marL="0" indent="0">
               <a:buNone/>
             </a:pPr>
             <a:r>
@@ -7908,7 +7661,7 @@
           <a:bodyPr wrap="square" rtlCol="0" anchor="ctr"/>
           <a:lstStyle/>
           <a:p>
-            <a:pPr indent="0" marL="0">
+            <a:pPr marL="0" indent="0">
               <a:buNone/>
             </a:pPr>
             <a:r>
@@ -7967,7 +7720,7 @@
           <a:bodyPr wrap="square" rtlCol="0" anchor="ctr"/>
           <a:lstStyle/>
           <a:p>
-            <a:pPr indent="0" marL="0">
+            <a:pPr marL="0" indent="0">
               <a:buNone/>
             </a:pPr>
             <a:r>
@@ -8033,7 +7786,7 @@
           <a:bodyPr wrap="square" rtlCol="0" anchor="ctr"/>
           <a:lstStyle/>
           <a:p>
-            <a:pPr indent="0" marL="0">
+            <a:pPr marL="0" indent="0">
               <a:buNone/>
             </a:pPr>
             <a:r>
@@ -8205,7 +7958,7 @@
           <a:bodyPr wrap="square" rtlCol="0" anchor="ctr"/>
           <a:lstStyle/>
           <a:p>
-            <a:pPr indent="0" marL="0">
+            <a:pPr marL="0" indent="0">
               <a:buNone/>
             </a:pPr>
             <a:r>
@@ -8345,6 +8098,7 @@
         <a:solidFill>
           <a:srgbClr val="0B1220"/>
         </a:solidFill>
+        <a:effectLst/>
       </p:bgPr>
     </p:bg>
     <p:spTree>
@@ -8402,7 +8156,7 @@
           <a:bodyPr wrap="square" rtlCol="0" anchor="ctr"/>
           <a:lstStyle/>
           <a:p>
-            <a:pPr indent="0" marL="0">
+            <a:pPr marL="0" indent="0">
               <a:buNone/>
             </a:pPr>
             <a:r>
@@ -8441,7 +8195,7 @@
           <a:bodyPr wrap="square" rtlCol="0" anchor="ctr"/>
           <a:lstStyle/>
           <a:p>
-            <a:pPr indent="0" marL="0">
+            <a:pPr marL="0" indent="0">
               <a:buNone/>
             </a:pPr>
             <a:r>
@@ -8500,7 +8254,7 @@
           <a:bodyPr wrap="square" rtlCol="0" anchor="ctr"/>
           <a:lstStyle/>
           <a:p>
-            <a:pPr indent="0" marL="0">
+            <a:pPr marL="0" indent="0">
               <a:buNone/>
             </a:pPr>
             <a:r>
@@ -8566,7 +8320,7 @@
           <a:bodyPr wrap="square" rtlCol="0" anchor="ctr"/>
           <a:lstStyle/>
           <a:p>
-            <a:pPr algn="ctr" indent="0" marL="0">
+            <a:pPr marL="0" indent="0" algn="ctr">
               <a:buNone/>
             </a:pPr>
             <a:r>
@@ -8605,7 +8359,7 @@
           <a:bodyPr wrap="square" rtlCol="0" anchor="ctr"/>
           <a:lstStyle/>
           <a:p>
-            <a:pPr algn="ctr" indent="0" marL="0">
+            <a:pPr marL="0" indent="0" algn="ctr">
               <a:buNone/>
             </a:pPr>
             <a:r>
@@ -8644,7 +8398,7 @@
           <a:bodyPr wrap="square" rtlCol="0" anchor="ctr"/>
           <a:lstStyle/>
           <a:p>
-            <a:pPr algn="ctr" indent="0" marL="0">
+            <a:pPr marL="0" indent="0" algn="ctr">
               <a:buNone/>
             </a:pPr>
             <a:r>
@@ -8710,7 +8464,7 @@
           <a:bodyPr wrap="square" rtlCol="0" anchor="ctr"/>
           <a:lstStyle/>
           <a:p>
-            <a:pPr algn="ctr" indent="0" marL="0">
+            <a:pPr marL="0" indent="0" algn="ctr">
               <a:buNone/>
             </a:pPr>
             <a:r>
@@ -8749,7 +8503,7 @@
           <a:bodyPr wrap="square" rtlCol="0" anchor="ctr"/>
           <a:lstStyle/>
           <a:p>
-            <a:pPr algn="ctr" indent="0" marL="0">
+            <a:pPr marL="0" indent="0" algn="ctr">
               <a:buNone/>
             </a:pPr>
             <a:r>
@@ -8788,7 +8542,7 @@
           <a:bodyPr wrap="square" rtlCol="0" anchor="ctr"/>
           <a:lstStyle/>
           <a:p>
-            <a:pPr algn="ctr" indent="0" marL="0">
+            <a:pPr marL="0" indent="0" algn="ctr">
               <a:buNone/>
             </a:pPr>
             <a:r>
@@ -8854,7 +8608,7 @@
           <a:bodyPr wrap="square" rtlCol="0" anchor="ctr"/>
           <a:lstStyle/>
           <a:p>
-            <a:pPr algn="ctr" indent="0" marL="0">
+            <a:pPr marL="0" indent="0" algn="ctr">
               <a:buNone/>
             </a:pPr>
             <a:r>
@@ -8893,7 +8647,7 @@
           <a:bodyPr wrap="square" rtlCol="0" anchor="ctr"/>
           <a:lstStyle/>
           <a:p>
-            <a:pPr algn="ctr" indent="0" marL="0">
+            <a:pPr marL="0" indent="0" algn="ctr">
               <a:buNone/>
             </a:pPr>
             <a:r>
@@ -8932,7 +8686,7 @@
           <a:bodyPr wrap="square" rtlCol="0" anchor="ctr"/>
           <a:lstStyle/>
           <a:p>
-            <a:pPr algn="ctr" indent="0" marL="0">
+            <a:pPr marL="0" indent="0" algn="ctr">
               <a:buNone/>
             </a:pPr>
             <a:r>
@@ -8998,7 +8752,7 @@
           <a:bodyPr wrap="square" rtlCol="0" anchor="ctr"/>
           <a:lstStyle/>
           <a:p>
-            <a:pPr algn="ctr" indent="0" marL="0">
+            <a:pPr marL="0" indent="0" algn="ctr">
               <a:buNone/>
             </a:pPr>
             <a:r>
@@ -9037,7 +8791,7 @@
           <a:bodyPr wrap="square" rtlCol="0" anchor="ctr"/>
           <a:lstStyle/>
           <a:p>
-            <a:pPr algn="ctr" indent="0" marL="0">
+            <a:pPr marL="0" indent="0" algn="ctr">
               <a:buNone/>
             </a:pPr>
             <a:r>
@@ -9076,7 +8830,7 @@
           <a:bodyPr wrap="square" rtlCol="0" anchor="ctr"/>
           <a:lstStyle/>
           <a:p>
-            <a:pPr algn="ctr" indent="0" marL="0">
+            <a:pPr marL="0" indent="0" algn="ctr">
               <a:buNone/>
             </a:pPr>
             <a:r>
@@ -9142,7 +8896,7 @@
           <a:bodyPr wrap="square" rtlCol="0" anchor="ctr"/>
           <a:lstStyle/>
           <a:p>
-            <a:pPr algn="ctr" indent="0" marL="0">
+            <a:pPr marL="0" indent="0" algn="ctr">
               <a:buNone/>
             </a:pPr>
             <a:r>
@@ -9181,7 +8935,7 @@
           <a:bodyPr wrap="square" rtlCol="0" anchor="ctr"/>
           <a:lstStyle/>
           <a:p>
-            <a:pPr algn="ctr" indent="0" marL="0">
+            <a:pPr marL="0" indent="0" algn="ctr">
               <a:buNone/>
             </a:pPr>
             <a:r>
@@ -9220,7 +8974,7 @@
           <a:bodyPr wrap="square" rtlCol="0" anchor="ctr"/>
           <a:lstStyle/>
           <a:p>
-            <a:pPr algn="ctr" indent="0" marL="0">
+            <a:pPr marL="0" indent="0" algn="ctr">
               <a:buNone/>
             </a:pPr>
             <a:r>
@@ -9286,7 +9040,7 @@
           <a:bodyPr wrap="square" rtlCol="0" anchor="ctr"/>
           <a:lstStyle/>
           <a:p>
-            <a:pPr algn="ctr" indent="0" marL="0">
+            <a:pPr marL="0" indent="0" algn="ctr">
               <a:buNone/>
             </a:pPr>
             <a:r>
@@ -9325,7 +9079,7 @@
           <a:bodyPr wrap="square" rtlCol="0" anchor="ctr"/>
           <a:lstStyle/>
           <a:p>
-            <a:pPr algn="ctr" indent="0" marL="0">
+            <a:pPr marL="0" indent="0" algn="ctr">
               <a:buNone/>
             </a:pPr>
             <a:r>
@@ -9411,11 +9165,11 @@
           <a:bodyPr wrap="square" rtlCol="0" anchor="ctr"/>
           <a:lstStyle/>
           <a:p>
-            <a:pPr indent="0" marL="0">
-              <a:buNone/>
-            </a:pPr>
-            <a:r>
-              <a:rPr lang="en-US" sz="2000" b="1" spc="300" kern="0" dirty="0">
+            <a:pPr marL="0" indent="0">
+              <a:buNone/>
+            </a:pPr>
+            <a:r>
+              <a:rPr lang="en-US" sz="2000" b="1" kern="0" spc="300" dirty="0">
                 <a:solidFill>
                   <a:srgbClr val="22D3EE"/>
                 </a:solidFill>
@@ -9450,7 +9204,7 @@
           <a:bodyPr wrap="square" rtlCol="0" anchor="ctr"/>
           <a:lstStyle/>
           <a:p>
-            <a:pPr indent="0" marL="0">
+            <a:pPr marL="0" indent="0">
               <a:buNone/>
             </a:pPr>
             <a:r>
@@ -9621,11 +9375,11 @@
           <a:bodyPr wrap="square" rtlCol="0" anchor="ctr"/>
           <a:lstStyle/>
           <a:p>
-            <a:pPr indent="0" marL="0">
-              <a:buNone/>
-            </a:pPr>
-            <a:r>
-              <a:rPr lang="en-US" sz="2000" b="1" spc="300" kern="0" dirty="0">
+            <a:pPr marL="0" indent="0">
+              <a:buNone/>
+            </a:pPr>
+            <a:r>
+              <a:rPr lang="en-US" sz="2000" b="1" kern="0" spc="300" dirty="0">
                 <a:solidFill>
                   <a:srgbClr val="A78BFA"/>
                 </a:solidFill>
@@ -9660,7 +9414,7 @@
           <a:bodyPr wrap="square" rtlCol="0" anchor="ctr"/>
           <a:lstStyle/>
           <a:p>
-            <a:pPr indent="0" marL="0">
+            <a:pPr marL="0" indent="0">
               <a:buNone/>
             </a:pPr>
             <a:r>
@@ -9831,11 +9585,11 @@
           <a:bodyPr wrap="square" rtlCol="0" anchor="ctr"/>
           <a:lstStyle/>
           <a:p>
-            <a:pPr indent="0" marL="0">
-              <a:buNone/>
-            </a:pPr>
-            <a:r>
-              <a:rPr lang="en-US" sz="2000" b="1" spc="300" kern="0" dirty="0">
+            <a:pPr marL="0" indent="0">
+              <a:buNone/>
+            </a:pPr>
+            <a:r>
+              <a:rPr lang="en-US" sz="2000" b="1" kern="0" spc="300" dirty="0">
                 <a:solidFill>
                   <a:srgbClr val="34D399"/>
                 </a:solidFill>
@@ -9870,7 +9624,7 @@
           <a:bodyPr wrap="square" rtlCol="0" anchor="ctr"/>
           <a:lstStyle/>
           <a:p>
-            <a:pPr indent="0" marL="0">
+            <a:pPr marL="0" indent="0">
               <a:buNone/>
             </a:pPr>
             <a:r>
@@ -9989,6 +9743,7 @@
         <a:solidFill>
           <a:srgbClr val="0B1220"/>
         </a:solidFill>
+        <a:effectLst/>
       </p:bgPr>
     </p:bg>
     <p:spTree>
@@ -10046,7 +9801,7 @@
           <a:bodyPr wrap="square" rtlCol="0" anchor="ctr"/>
           <a:lstStyle/>
           <a:p>
-            <a:pPr indent="0" marL="0">
+            <a:pPr marL="0" indent="0">
               <a:buNone/>
             </a:pPr>
             <a:r>
@@ -10085,7 +9840,7 @@
           <a:bodyPr wrap="square" rtlCol="0" anchor="ctr"/>
           <a:lstStyle/>
           <a:p>
-            <a:pPr indent="0" marL="0">
+            <a:pPr marL="0" indent="0">
               <a:buNone/>
             </a:pPr>
             <a:r>
@@ -10144,7 +9899,7 @@
           <a:bodyPr wrap="square" rtlCol="0" anchor="ctr"/>
           <a:lstStyle/>
           <a:p>
-            <a:pPr indent="0" marL="0">
+            <a:pPr marL="0" indent="0">
               <a:buNone/>
             </a:pPr>
             <a:r>
@@ -10230,7 +9985,7 @@
           <a:bodyPr wrap="square" rtlCol="0" anchor="ctr"/>
           <a:lstStyle/>
           <a:p>
-            <a:pPr indent="0" marL="0">
+            <a:pPr marL="0" indent="0">
               <a:buNone/>
             </a:pPr>
             <a:r>
@@ -10269,7 +10024,7 @@
           <a:bodyPr wrap="square" rtlCol="0" anchor="ctr"/>
           <a:lstStyle/>
           <a:p>
-            <a:pPr indent="0" marL="0">
+            <a:pPr marL="0" indent="0">
               <a:buNone/>
             </a:pPr>
             <a:r>
@@ -10355,7 +10110,7 @@
           <a:bodyPr wrap="square" rtlCol="0" anchor="ctr"/>
           <a:lstStyle/>
           <a:p>
-            <a:pPr indent="0" marL="0">
+            <a:pPr marL="0" indent="0">
               <a:buNone/>
             </a:pPr>
             <a:r>
@@ -10394,7 +10149,7 @@
           <a:bodyPr wrap="square" rtlCol="0" anchor="ctr"/>
           <a:lstStyle/>
           <a:p>
-            <a:pPr indent="0" marL="0">
+            <a:pPr marL="0" indent="0">
               <a:buNone/>
             </a:pPr>
             <a:r>
@@ -10480,7 +10235,7 @@
           <a:bodyPr wrap="square" rtlCol="0" anchor="ctr"/>
           <a:lstStyle/>
           <a:p>
-            <a:pPr indent="0" marL="0">
+            <a:pPr marL="0" indent="0">
               <a:buNone/>
             </a:pPr>
             <a:r>
@@ -10519,7 +10274,7 @@
           <a:bodyPr wrap="square" rtlCol="0" anchor="ctr"/>
           <a:lstStyle/>
           <a:p>
-            <a:pPr indent="0" marL="0">
+            <a:pPr marL="0" indent="0">
               <a:buNone/>
             </a:pPr>
             <a:r>
@@ -10605,7 +10360,7 @@
           <a:bodyPr wrap="square" rtlCol="0" anchor="ctr"/>
           <a:lstStyle/>
           <a:p>
-            <a:pPr indent="0" marL="0">
+            <a:pPr marL="0" indent="0">
               <a:buNone/>
             </a:pPr>
             <a:r>
@@ -10644,7 +10399,7 @@
           <a:bodyPr wrap="square" rtlCol="0" anchor="ctr"/>
           <a:lstStyle/>
           <a:p>
-            <a:pPr indent="0" marL="0">
+            <a:pPr marL="0" indent="0">
               <a:buNone/>
             </a:pPr>
             <a:r>
@@ -10730,7 +10485,7 @@
           <a:bodyPr wrap="square" rtlCol="0" anchor="ctr"/>
           <a:lstStyle/>
           <a:p>
-            <a:pPr indent="0" marL="0">
+            <a:pPr marL="0" indent="0">
               <a:buNone/>
             </a:pPr>
             <a:r>
@@ -10769,7 +10524,7 @@
           <a:bodyPr wrap="square" rtlCol="0" anchor="ctr"/>
           <a:lstStyle/>
           <a:p>
-            <a:pPr indent="0" marL="0">
+            <a:pPr marL="0" indent="0">
               <a:buNone/>
             </a:pPr>
             <a:r>
@@ -10855,7 +10610,7 @@
           <a:bodyPr wrap="square" rtlCol="0" anchor="ctr"/>
           <a:lstStyle/>
           <a:p>
-            <a:pPr indent="0" marL="0">
+            <a:pPr marL="0" indent="0">
               <a:buNone/>
             </a:pPr>
             <a:r>
@@ -10894,7 +10649,7 @@
           <a:bodyPr wrap="square" rtlCol="0" anchor="ctr"/>
           <a:lstStyle/>
           <a:p>
-            <a:pPr indent="0" marL="0">
+            <a:pPr marL="0" indent="0">
               <a:buNone/>
             </a:pPr>
             <a:r>
@@ -10980,7 +10735,7 @@
           <a:bodyPr wrap="square" rtlCol="0" anchor="ctr"/>
           <a:lstStyle/>
           <a:p>
-            <a:pPr indent="0" marL="0">
+            <a:pPr marL="0" indent="0">
               <a:buNone/>
             </a:pPr>
             <a:r>
@@ -11019,7 +10774,7 @@
           <a:bodyPr wrap="square" rtlCol="0" anchor="ctr"/>
           <a:lstStyle/>
           <a:p>
-            <a:pPr indent="0" marL="0">
+            <a:pPr marL="0" indent="0">
               <a:buNone/>
             </a:pPr>
             <a:r>
@@ -11105,7 +10860,7 @@
           <a:bodyPr wrap="square" rtlCol="0" anchor="ctr"/>
           <a:lstStyle/>
           <a:p>
-            <a:pPr indent="0" marL="0">
+            <a:pPr marL="0" indent="0">
               <a:buNone/>
             </a:pPr>
             <a:r>
@@ -11144,7 +10899,7 @@
           <a:bodyPr wrap="square" rtlCol="0" anchor="ctr"/>
           <a:lstStyle/>
           <a:p>
-            <a:pPr indent="0" marL="0">
+            <a:pPr marL="0" indent="0">
               <a:buNone/>
             </a:pPr>
             <a:r>
@@ -11230,7 +10985,7 @@
           <a:bodyPr wrap="square" rtlCol="0" anchor="ctr"/>
           <a:lstStyle/>
           <a:p>
-            <a:pPr indent="0" marL="0">
+            <a:pPr marL="0" indent="0">
               <a:buNone/>
             </a:pPr>
             <a:r>
@@ -11269,7 +11024,7 @@
           <a:bodyPr wrap="square" rtlCol="0" anchor="ctr"/>
           <a:lstStyle/>
           <a:p>
-            <a:pPr indent="0" marL="0">
+            <a:pPr marL="0" indent="0">
               <a:buNone/>
             </a:pPr>
             <a:r>
@@ -11355,7 +11110,7 @@
           <a:bodyPr wrap="square" rtlCol="0" anchor="ctr"/>
           <a:lstStyle/>
           <a:p>
-            <a:pPr indent="0" marL="0">
+            <a:pPr marL="0" indent="0">
               <a:buNone/>
             </a:pPr>
             <a:r>
@@ -11394,7 +11149,7 @@
           <a:bodyPr wrap="square" rtlCol="0" anchor="ctr"/>
           <a:lstStyle/>
           <a:p>
-            <a:pPr indent="0" marL="0">
+            <a:pPr marL="0" indent="0">
               <a:buNone/>
             </a:pPr>
             <a:r>
@@ -11428,6 +11183,7 @@
         <a:solidFill>
           <a:srgbClr val="0B1220"/>
         </a:solidFill>
+        <a:effectLst/>
       </p:bgPr>
     </p:bg>
     <p:spTree>
@@ -11485,7 +11241,7 @@
           <a:bodyPr wrap="square" rtlCol="0" anchor="ctr"/>
           <a:lstStyle/>
           <a:p>
-            <a:pPr indent="0" marL="0">
+            <a:pPr marL="0" indent="0">
               <a:buNone/>
             </a:pPr>
             <a:r>
@@ -11524,7 +11280,7 @@
           <a:bodyPr wrap="square" rtlCol="0" anchor="ctr"/>
           <a:lstStyle/>
           <a:p>
-            <a:pPr indent="0" marL="0">
+            <a:pPr marL="0" indent="0">
               <a:buNone/>
             </a:pPr>
             <a:r>
@@ -11583,7 +11339,7 @@
           <a:bodyPr wrap="square" rtlCol="0" anchor="ctr"/>
           <a:lstStyle/>
           <a:p>
-            <a:pPr indent="0" marL="0">
+            <a:pPr marL="0" indent="0">
               <a:buNone/>
             </a:pPr>
             <a:r>
@@ -11649,7 +11405,7 @@
           <a:bodyPr wrap="square" rtlCol="0" anchor="ctr"/>
           <a:lstStyle/>
           <a:p>
-            <a:pPr indent="0" marL="0">
+            <a:pPr marL="0" indent="0">
               <a:buNone/>
             </a:pPr>
             <a:r>
@@ -11688,7 +11444,7 @@
           <a:bodyPr wrap="square" rtlCol="0" anchor="ctr"/>
           <a:lstStyle/>
           <a:p>
-            <a:pPr indent="0" marL="0">
+            <a:pPr marL="0" indent="0">
               <a:buNone/>
             </a:pPr>
             <a:r>
@@ -11727,7 +11483,7 @@
           <a:bodyPr wrap="square" rtlCol="0" anchor="ctr"/>
           <a:lstStyle/>
           <a:p>
-            <a:pPr indent="0" marL="0">
+            <a:pPr marL="0" indent="0">
               <a:buNone/>
             </a:pPr>
             <a:r>
@@ -11793,7 +11549,7 @@
           <a:bodyPr wrap="square" rtlCol="0" anchor="ctr"/>
           <a:lstStyle/>
           <a:p>
-            <a:pPr indent="0" marL="0">
+            <a:pPr marL="0" indent="0">
               <a:buNone/>
             </a:pPr>
             <a:r>
@@ -11832,7 +11588,7 @@
           <a:bodyPr wrap="square" rtlCol="0" anchor="ctr"/>
           <a:lstStyle/>
           <a:p>
-            <a:pPr indent="0" marL="0">
+            <a:pPr marL="0" indent="0">
               <a:buNone/>
             </a:pPr>
             <a:r>
@@ -11871,7 +11627,7 @@
           <a:bodyPr wrap="square" rtlCol="0" anchor="ctr"/>
           <a:lstStyle/>
           <a:p>
-            <a:pPr indent="0" marL="0">
+            <a:pPr marL="0" indent="0">
               <a:buNone/>
             </a:pPr>
             <a:r>
@@ -11937,7 +11693,7 @@
           <a:bodyPr wrap="square" rtlCol="0" anchor="ctr"/>
           <a:lstStyle/>
           <a:p>
-            <a:pPr indent="0" marL="0">
+            <a:pPr marL="0" indent="0">
               <a:buNone/>
             </a:pPr>
             <a:r>
@@ -11976,7 +11732,7 @@
           <a:bodyPr wrap="square" rtlCol="0" anchor="ctr"/>
           <a:lstStyle/>
           <a:p>
-            <a:pPr indent="0" marL="0">
+            <a:pPr marL="0" indent="0">
               <a:buNone/>
             </a:pPr>
             <a:r>
@@ -12015,7 +11771,7 @@
           <a:bodyPr wrap="square" rtlCol="0" anchor="ctr"/>
           <a:lstStyle/>
           <a:p>
-            <a:pPr indent="0" marL="0">
+            <a:pPr marL="0" indent="0">
               <a:buNone/>
             </a:pPr>
             <a:r>
@@ -12081,7 +11837,7 @@
           <a:bodyPr wrap="square" rtlCol="0" anchor="ctr"/>
           <a:lstStyle/>
           <a:p>
-            <a:pPr indent="0" marL="0">
+            <a:pPr marL="0" indent="0">
               <a:buNone/>
             </a:pPr>
             <a:r>
@@ -12120,7 +11876,7 @@
           <a:bodyPr wrap="square" rtlCol="0" anchor="ctr"/>
           <a:lstStyle/>
           <a:p>
-            <a:pPr indent="0" marL="0">
+            <a:pPr marL="0" indent="0">
               <a:buNone/>
             </a:pPr>
             <a:r>
@@ -12159,7 +11915,7 @@
           <a:bodyPr wrap="square" rtlCol="0" anchor="ctr"/>
           <a:lstStyle/>
           <a:p>
-            <a:pPr indent="0" marL="0">
+            <a:pPr marL="0" indent="0">
               <a:buNone/>
             </a:pPr>
             <a:r>
@@ -12225,7 +11981,7 @@
           <a:bodyPr wrap="square" rtlCol="0" anchor="ctr"/>
           <a:lstStyle/>
           <a:p>
-            <a:pPr indent="0" marL="0">
+            <a:pPr marL="0" indent="0">
               <a:buNone/>
             </a:pPr>
             <a:r>
@@ -12264,7 +12020,7 @@
           <a:bodyPr wrap="square" rtlCol="0" anchor="ctr"/>
           <a:lstStyle/>
           <a:p>
-            <a:pPr indent="0" marL="0">
+            <a:pPr marL="0" indent="0">
               <a:buNone/>
             </a:pPr>
             <a:r>
@@ -12303,7 +12059,7 @@
           <a:bodyPr wrap="square" rtlCol="0" anchor="ctr"/>
           <a:lstStyle/>
           <a:p>
-            <a:pPr indent="0" marL="0">
+            <a:pPr marL="0" indent="0">
               <a:buNone/>
             </a:pPr>
             <a:r>
@@ -12337,6 +12093,7 @@
         <a:solidFill>
           <a:srgbClr val="0B1220"/>
         </a:solidFill>
+        <a:effectLst/>
       </p:bgPr>
     </p:bg>
     <p:spTree>
@@ -12394,7 +12151,7 @@
           <a:bodyPr wrap="square" rtlCol="0" anchor="ctr"/>
           <a:lstStyle/>
           <a:p>
-            <a:pPr indent="0" marL="0">
+            <a:pPr marL="0" indent="0">
               <a:buNone/>
             </a:pPr>
             <a:r>
@@ -12433,7 +12190,7 @@
           <a:bodyPr wrap="square" rtlCol="0" anchor="ctr"/>
           <a:lstStyle/>
           <a:p>
-            <a:pPr indent="0" marL="0">
+            <a:pPr marL="0" indent="0">
               <a:buNone/>
             </a:pPr>
             <a:r>
@@ -12492,7 +12249,7 @@
           <a:bodyPr wrap="square" rtlCol="0" anchor="ctr"/>
           <a:lstStyle/>
           <a:p>
-            <a:pPr indent="0" marL="0">
+            <a:pPr marL="0" indent="0">
               <a:buNone/>
             </a:pPr>
             <a:r>
@@ -12578,7 +12335,7 @@
           <a:bodyPr wrap="square" rtlCol="0" anchor="ctr"/>
           <a:lstStyle/>
           <a:p>
-            <a:pPr indent="0" marL="0">
+            <a:pPr marL="0" indent="0">
               <a:buNone/>
             </a:pPr>
             <a:r>
@@ -12617,7 +12374,7 @@
           <a:bodyPr wrap="square" rtlCol="0" anchor="ctr"/>
           <a:lstStyle/>
           <a:p>
-            <a:pPr algn="r" indent="0" marL="0">
+            <a:pPr marL="0" indent="0" algn="r">
               <a:buNone/>
             </a:pPr>
             <a:r>
@@ -12656,7 +12413,7 @@
           <a:bodyPr wrap="square" rtlCol="0" anchor="ctr"/>
           <a:lstStyle/>
           <a:p>
-            <a:pPr indent="0" marL="0">
+            <a:pPr marL="0" indent="0">
               <a:buNone/>
             </a:pPr>
             <a:r>
@@ -12742,7 +12499,7 @@
           <a:bodyPr wrap="square" rtlCol="0" anchor="ctr"/>
           <a:lstStyle/>
           <a:p>
-            <a:pPr indent="0" marL="0">
+            <a:pPr marL="0" indent="0">
               <a:buNone/>
             </a:pPr>
             <a:r>
@@ -12781,7 +12538,7 @@
           <a:bodyPr wrap="square" rtlCol="0" anchor="ctr"/>
           <a:lstStyle/>
           <a:p>
-            <a:pPr algn="r" indent="0" marL="0">
+            <a:pPr marL="0" indent="0" algn="r">
               <a:buNone/>
             </a:pPr>
             <a:r>
@@ -12820,7 +12577,7 @@
           <a:bodyPr wrap="square" rtlCol="0" anchor="ctr"/>
           <a:lstStyle/>
           <a:p>
-            <a:pPr indent="0" marL="0">
+            <a:pPr marL="0" indent="0">
               <a:buNone/>
             </a:pPr>
             <a:r>
@@ -12906,7 +12663,7 @@
           <a:bodyPr wrap="square" rtlCol="0" anchor="ctr"/>
           <a:lstStyle/>
           <a:p>
-            <a:pPr indent="0" marL="0">
+            <a:pPr marL="0" indent="0">
               <a:buNone/>
             </a:pPr>
             <a:r>
@@ -12945,7 +12702,7 @@
           <a:bodyPr wrap="square" rtlCol="0" anchor="ctr"/>
           <a:lstStyle/>
           <a:p>
-            <a:pPr algn="r" indent="0" marL="0">
+            <a:pPr marL="0" indent="0" algn="r">
               <a:buNone/>
             </a:pPr>
             <a:r>
@@ -12984,7 +12741,7 @@
           <a:bodyPr wrap="square" rtlCol="0" anchor="ctr"/>
           <a:lstStyle/>
           <a:p>
-            <a:pPr indent="0" marL="0">
+            <a:pPr marL="0" indent="0">
               <a:buNone/>
             </a:pPr>
             <a:r>
@@ -13018,6 +12775,7 @@
         <a:solidFill>
           <a:srgbClr val="0B1220"/>
         </a:solidFill>
+        <a:effectLst/>
       </p:bgPr>
     </p:bg>
     <p:spTree>
@@ -13075,7 +12833,7 @@
           <a:bodyPr wrap="square" rtlCol="0" anchor="ctr"/>
           <a:lstStyle/>
           <a:p>
-            <a:pPr indent="0" marL="0">
+            <a:pPr marL="0" indent="0">
               <a:buNone/>
             </a:pPr>
             <a:r>
@@ -13114,7 +12872,7 @@
           <a:bodyPr wrap="square" rtlCol="0" anchor="ctr"/>
           <a:lstStyle/>
           <a:p>
-            <a:pPr algn="r" indent="0" marL="0">
+            <a:pPr marL="0" indent="0" algn="r">
               <a:buNone/>
             </a:pPr>
             <a:r>
@@ -13153,7 +12911,7 @@
           <a:bodyPr wrap="square" rtlCol="0" anchor="ctr"/>
           <a:lstStyle/>
           <a:p>
-            <a:pPr indent="0" marL="0">
+            <a:pPr marL="0" indent="0">
               <a:buNone/>
             </a:pPr>
             <a:r>
@@ -13212,7 +12970,7 @@
           <a:bodyPr wrap="square" rtlCol="0" anchor="ctr"/>
           <a:lstStyle/>
           <a:p>
-            <a:pPr indent="0" marL="0">
+            <a:pPr marL="0" indent="0">
               <a:buNone/>
             </a:pPr>
             <a:r>
@@ -13278,7 +13036,7 @@
           <a:bodyPr wrap="square" rtlCol="0" anchor="ctr"/>
           <a:lstStyle/>
           <a:p>
-            <a:pPr indent="0" marL="0">
+            <a:pPr marL="0" indent="0">
               <a:buNone/>
             </a:pPr>
             <a:r>
@@ -13555,7 +13313,7 @@
           <a:bodyPr wrap="square" rtlCol="0" anchor="ctr"/>
           <a:lstStyle/>
           <a:p>
-            <a:pPr indent="0" marL="0">
+            <a:pPr marL="0" indent="0">
               <a:buNone/>
             </a:pPr>
             <a:r>
@@ -13706,7 +13464,7 @@
           <a:bodyPr wrap="square" rtlCol="0" anchor="ctr"/>
           <a:lstStyle/>
           <a:p>
-            <a:pPr indent="0" marL="0">
+            <a:pPr marL="0" indent="0">
               <a:buNone/>
             </a:pPr>
             <a:r>
@@ -13825,6 +13583,7 @@
         <a:solidFill>
           <a:srgbClr val="0B1220"/>
         </a:solidFill>
+        <a:effectLst/>
       </p:bgPr>
     </p:bg>
     <p:spTree>
@@ -13882,7 +13641,7 @@
           <a:bodyPr wrap="square" rtlCol="0" anchor="ctr"/>
           <a:lstStyle/>
           <a:p>
-            <a:pPr indent="0" marL="0">
+            <a:pPr marL="0" indent="0">
               <a:buNone/>
             </a:pPr>
             <a:r>
@@ -13921,7 +13680,7 @@
           <a:bodyPr wrap="square" rtlCol="0" anchor="ctr"/>
           <a:lstStyle/>
           <a:p>
-            <a:pPr algn="r" indent="0" marL="0">
+            <a:pPr marL="0" indent="0" algn="r">
               <a:buNone/>
             </a:pPr>
             <a:r>
@@ -13960,7 +13719,7 @@
           <a:bodyPr wrap="square" rtlCol="0" anchor="ctr"/>
           <a:lstStyle/>
           <a:p>
-            <a:pPr indent="0" marL="0">
+            <a:pPr marL="0" indent="0">
               <a:buNone/>
             </a:pPr>
             <a:r>
@@ -14019,7 +13778,7 @@
           <a:bodyPr wrap="square" rtlCol="0" anchor="ctr"/>
           <a:lstStyle/>
           <a:p>
-            <a:pPr indent="0" marL="0">
+            <a:pPr marL="0" indent="0">
               <a:buNone/>
             </a:pPr>
             <a:r>
@@ -14085,7 +13844,7 @@
           <a:bodyPr wrap="square" rtlCol="0" anchor="ctr"/>
           <a:lstStyle/>
           <a:p>
-            <a:pPr indent="0" marL="0">
+            <a:pPr marL="0" indent="0">
               <a:buNone/>
             </a:pPr>
             <a:r>
@@ -14320,7 +14079,7 @@
           <a:bodyPr wrap="square" rtlCol="0" anchor="ctr"/>
           <a:lstStyle/>
           <a:p>
-            <a:pPr indent="0" marL="0">
+            <a:pPr marL="0" indent="0">
               <a:buNone/>
             </a:pPr>
             <a:r>
@@ -14450,7 +14209,7 @@
           <a:bodyPr wrap="square" rtlCol="0" anchor="ctr"/>
           <a:lstStyle/>
           <a:p>
-            <a:pPr indent="0" marL="0">
+            <a:pPr marL="0" indent="0">
               <a:buNone/>
             </a:pPr>
             <a:r>
@@ -14854,4 +14613,265 @@
     </a:ext>
   </a:extLst>
 </a:theme>
+</file>
+
+<file path=ppt/theme/theme2.xml><?xml version="1.0" encoding="utf-8"?>
+<a:theme xmlns:a="http://schemas.openxmlformats.org/drawingml/2006/main" name="Office Theme">
+  <a:themeElements>
+    <a:clrScheme name="Office">
+      <a:dk1>
+        <a:sysClr val="windowText" lastClr="000000"/>
+      </a:dk1>
+      <a:lt1>
+        <a:sysClr val="window" lastClr="FFFFFF"/>
+      </a:lt1>
+      <a:dk2>
+        <a:srgbClr val="44546A"/>
+      </a:dk2>
+      <a:lt2>
+        <a:srgbClr val="E7E6E6"/>
+      </a:lt2>
+      <a:accent1>
+        <a:srgbClr val="5B9BD5"/>
+      </a:accent1>
+      <a:accent2>
+        <a:srgbClr val="ED7D31"/>
+      </a:accent2>
+      <a:accent3>
+        <a:srgbClr val="A5A5A5"/>
+      </a:accent3>
+      <a:accent4>
+        <a:srgbClr val="FFC000"/>
+      </a:accent4>
+      <a:accent5>
+        <a:srgbClr val="4472C4"/>
+      </a:accent5>
+      <a:accent6>
+        <a:srgbClr val="70AD47"/>
+      </a:accent6>
+      <a:hlink>
+        <a:srgbClr val="0563C1"/>
+      </a:hlink>
+      <a:folHlink>
+        <a:srgbClr val="954F72"/>
+      </a:folHlink>
+    </a:clrScheme>
+    <a:fontScheme name="Office">
+      <a:majorFont>
+        <a:latin typeface="Calibri Light" panose="020F0302020204030204"/>
+        <a:ea typeface=""/>
+        <a:cs typeface=""/>
+        <a:font script="Jpan" typeface="ＭＳ Ｐゴシック"/>
+        <a:font script="Hang" typeface="맑은 고딕"/>
+        <a:font script="Hans" typeface="宋体"/>
+        <a:font script="Hant" typeface="新細明體"/>
+        <a:font script="Arab" typeface="Times New Roman"/>
+        <a:font script="Hebr" typeface="Times New Roman"/>
+        <a:font script="Thai" typeface="Angsana New"/>
+        <a:font script="Ethi" typeface="Nyala"/>
+        <a:font script="Beng" typeface="Vrinda"/>
+        <a:font script="Gujr" typeface="Shruti"/>
+        <a:font script="Khmr" typeface="MoolBoran"/>
+        <a:font script="Knda" typeface="Tunga"/>
+        <a:font script="Guru" typeface="Raavi"/>
+        <a:font script="Cans" typeface="Euphemia"/>
+        <a:font script="Cher" typeface="Plantagenet Cherokee"/>
+        <a:font script="Yiii" typeface="Microsoft Yi Baiti"/>
+        <a:font script="Tibt" typeface="Microsoft Himalaya"/>
+        <a:font script="Thaa" typeface="MV Boli"/>
+        <a:font script="Deva" typeface="Mangal"/>
+        <a:font script="Telu" typeface="Gautami"/>
+        <a:font script="Taml" typeface="Latha"/>
+        <a:font script="Syrc" typeface="Estrangelo Edessa"/>
+        <a:font script="Orya" typeface="Kalinga"/>
+        <a:font script="Mlym" typeface="Kartika"/>
+        <a:font script="Laoo" typeface="DokChampa"/>
+        <a:font script="Sinh" typeface="Iskoola Pota"/>
+        <a:font script="Mong" typeface="Mongolian Baiti"/>
+        <a:font script="Viet" typeface="Times New Roman"/>
+        <a:font script="Uigh" typeface="Microsoft Uighur"/>
+        <a:font script="Geor" typeface="Sylfaen"/>
+      </a:majorFont>
+      <a:minorFont>
+        <a:latin typeface="Calibri" panose="020F0502020204030204"/>
+        <a:ea typeface=""/>
+        <a:cs typeface=""/>
+        <a:font script="Jpan" typeface="ＭＳ Ｐゴシック"/>
+        <a:font script="Hang" typeface="맑은 고딕"/>
+        <a:font script="Hans" typeface="宋体"/>
+        <a:font script="Hant" typeface="新細明體"/>
+        <a:font script="Arab" typeface="Arial"/>
+        <a:font script="Hebr" typeface="Arial"/>
+        <a:font script="Thai" typeface="Cordia New"/>
+        <a:font script="Ethi" typeface="Nyala"/>
+        <a:font script="Beng" typeface="Vrinda"/>
+        <a:font script="Gujr" typeface="Shruti"/>
+        <a:font script="Khmr" typeface="DaunPenh"/>
+        <a:font script="Knda" typeface="Tunga"/>
+        <a:font script="Guru" typeface="Raavi"/>
+        <a:font script="Cans" typeface="Euphemia"/>
+        <a:font script="Cher" typeface="Plantagenet Cherokee"/>
+        <a:font script="Yiii" typeface="Microsoft Yi Baiti"/>
+        <a:font script="Tibt" typeface="Microsoft Himalaya"/>
+        <a:font script="Thaa" typeface="MV Boli"/>
+        <a:font script="Deva" typeface="Mangal"/>
+        <a:font script="Telu" typeface="Gautami"/>
+        <a:font script="Taml" typeface="Latha"/>
+        <a:font script="Syrc" typeface="Estrangelo Edessa"/>
+        <a:font script="Orya" typeface="Kalinga"/>
+        <a:font script="Mlym" typeface="Kartika"/>
+        <a:font script="Laoo" typeface="DokChampa"/>
+        <a:font script="Sinh" typeface="Iskoola Pota"/>
+        <a:font script="Mong" typeface="Mongolian Baiti"/>
+        <a:font script="Viet" typeface="Arial"/>
+        <a:font script="Uigh" typeface="Microsoft Uighur"/>
+        <a:font script="Geor" typeface="Sylfaen"/>
+      </a:minorFont>
+    </a:fontScheme>
+    <a:fmtScheme name="Office">
+      <a:fillStyleLst>
+        <a:solidFill>
+          <a:schemeClr val="phClr"/>
+        </a:solidFill>
+        <a:gradFill rotWithShape="1">
+          <a:gsLst>
+            <a:gs pos="0">
+              <a:schemeClr val="phClr">
+                <a:lumMod val="110000"/>
+                <a:satMod val="105000"/>
+                <a:tint val="67000"/>
+              </a:schemeClr>
+            </a:gs>
+            <a:gs pos="50000">
+              <a:schemeClr val="phClr">
+                <a:lumMod val="105000"/>
+                <a:satMod val="103000"/>
+                <a:tint val="73000"/>
+              </a:schemeClr>
+            </a:gs>
+            <a:gs pos="100000">
+              <a:schemeClr val="phClr">
+                <a:lumMod val="105000"/>
+                <a:satMod val="109000"/>
+                <a:tint val="81000"/>
+              </a:schemeClr>
+            </a:gs>
+          </a:gsLst>
+          <a:lin ang="5400000" scaled="0"/>
+        </a:gradFill>
+        <a:gradFill rotWithShape="1">
+          <a:gsLst>
+            <a:gs pos="0">
+              <a:schemeClr val="phClr">
+                <a:satMod val="103000"/>
+                <a:lumMod val="102000"/>
+                <a:tint val="94000"/>
+              </a:schemeClr>
+            </a:gs>
+            <a:gs pos="50000">
+              <a:schemeClr val="phClr">
+                <a:satMod val="110000"/>
+                <a:lumMod val="100000"/>
+                <a:shade val="100000"/>
+              </a:schemeClr>
+            </a:gs>
+            <a:gs pos="100000">
+              <a:schemeClr val="phClr">
+                <a:lumMod val="99000"/>
+                <a:satMod val="120000"/>
+                <a:shade val="78000"/>
+              </a:schemeClr>
+            </a:gs>
+          </a:gsLst>
+          <a:lin ang="5400000" scaled="0"/>
+        </a:gradFill>
+      </a:fillStyleLst>
+      <a:lnStyleLst>
+        <a:ln w="6350" cap="flat" cmpd="sng" algn="ctr">
+          <a:solidFill>
+            <a:schemeClr val="phClr"/>
+          </a:solidFill>
+          <a:prstDash val="solid"/>
+          <a:miter lim="800000"/>
+        </a:ln>
+        <a:ln w="12700" cap="flat" cmpd="sng" algn="ctr">
+          <a:solidFill>
+            <a:schemeClr val="phClr"/>
+          </a:solidFill>
+          <a:prstDash val="solid"/>
+          <a:miter lim="800000"/>
+        </a:ln>
+        <a:ln w="19050" cap="flat" cmpd="sng" algn="ctr">
+          <a:solidFill>
+            <a:schemeClr val="phClr"/>
+          </a:solidFill>
+          <a:prstDash val="solid"/>
+          <a:miter lim="800000"/>
+        </a:ln>
+      </a:lnStyleLst>
+      <a:effectStyleLst>
+        <a:effectStyle>
+          <a:effectLst/>
+        </a:effectStyle>
+        <a:effectStyle>
+          <a:effectLst/>
+        </a:effectStyle>
+        <a:effectStyle>
+          <a:effectLst>
+            <a:outerShdw blurRad="57150" dist="19050" dir="5400000" algn="ctr" rotWithShape="0">
+              <a:srgbClr val="000000">
+                <a:alpha val="63000"/>
+              </a:srgbClr>
+            </a:outerShdw>
+          </a:effectLst>
+        </a:effectStyle>
+      </a:effectStyleLst>
+      <a:bgFillStyleLst>
+        <a:solidFill>
+          <a:schemeClr val="phClr"/>
+        </a:solidFill>
+        <a:solidFill>
+          <a:schemeClr val="phClr">
+            <a:tint val="95000"/>
+            <a:satMod val="170000"/>
+          </a:schemeClr>
+        </a:solidFill>
+        <a:gradFill rotWithShape="1">
+          <a:gsLst>
+            <a:gs pos="0">
+              <a:schemeClr val="phClr">
+                <a:tint val="93000"/>
+                <a:satMod val="150000"/>
+                <a:shade val="98000"/>
+                <a:lumMod val="102000"/>
+              </a:schemeClr>
+            </a:gs>
+            <a:gs pos="50000">
+              <a:schemeClr val="phClr">
+                <a:tint val="98000"/>
+                <a:satMod val="130000"/>
+                <a:shade val="90000"/>
+                <a:lumMod val="103000"/>
+              </a:schemeClr>
+            </a:gs>
+            <a:gs pos="100000">
+              <a:schemeClr val="phClr">
+                <a:shade val="63000"/>
+                <a:satMod val="120000"/>
+              </a:schemeClr>
+            </a:gs>
+          </a:gsLst>
+          <a:lin ang="5400000" scaled="0"/>
+        </a:gradFill>
+      </a:bgFillStyleLst>
+    </a:fmtScheme>
+  </a:themeElements>
+  <a:objectDefaults/>
+  <a:extraClrSchemeLst/>
+  <a:extLst>
+    <a:ext uri="{05A4C25C-085E-4340-85A3-A5531E510DB2}">
+      <thm15:themeFamily xmlns:thm15="http://schemas.microsoft.com/office/thememl/2012/main" name="Office Theme" id="{62F939B6-93AF-4DB8-9C6B-D6C7DFDC589F}" vid="{4A3C46E8-61CC-4603-A589-7422A47A8E4A}"/>
+    </a:ext>
+  </a:extLst>
+</a:theme>
 </file>
--- a/Intain-Verify-Pitch.pptx
+++ b/Intain-Verify-Pitch.pptx
@@ -12,6 +12,9 @@
     <p:sldId id="257" r:id="rId3"/>
     <p:sldId id="258" r:id="rId4"/>
     <p:sldId id="259" r:id="rId5"/>
+    <p:sldId id="269" r:id="rId20"/>
+    <p:sldId id="270" r:id="rId21"/>
+    <p:sldId id="271" r:id="rId22"/>
     <p:sldId id="260" r:id="rId6"/>
     <p:sldId id="261" r:id="rId7"/>
     <p:sldId id="262" r:id="rId8"/>
@@ -6068,6 +6071,6098 @@
               <a:t>From trust-me data to traceable truth.</a:t>
             </a:r>
             <a:endParaRPr lang="en-US" sz="1600" dirty="0"/>
+          </a:p>
+        </p:txBody>
+      </p:sp>
+    </p:spTree>
+  </p:cSld>
+  <p:clrMapOvr>
+    <a:masterClrMapping/>
+  </p:clrMapOvr>
+</p:sld>
+</file>
+
+<file path=ppt/slides/slide14.xml><?xml version="1.0" encoding="utf-8"?>
+<p:sld xmlns:a="http://schemas.openxmlformats.org/drawingml/2006/main" xmlns:p="http://schemas.openxmlformats.org/presentationml/2006/main" xmlns:r="http://schemas.openxmlformats.org/officeDocument/2006/relationships">
+  <p:cSld>
+    <p:bg>
+      <p:bgPr>
+        <a:solidFill>
+          <a:srgbClr val="0A1222"/>
+        </a:solidFill>
+        <a:effectLst/>
+      </p:bgPr>
+    </p:bg>
+    <p:spTree>
+      <p:nvGrpSpPr>
+        <p:cNvPr id="1" name=""/>
+        <p:cNvGrpSpPr/>
+        <p:nvPr/>
+      </p:nvGrpSpPr>
+      <p:grpSpPr/>
+      <p:sp>
+        <p:nvSpPr>
+          <p:cNvPr id="2" name="Rectangle 1"/>
+          <p:cNvSpPr/>
+          <p:nvPr/>
+        </p:nvSpPr>
+        <p:spPr>
+          <a:xfrm>
+            <a:off x="0" y="0"/>
+            <a:ext cx="164592" cy="6858000"/>
+          </a:xfrm>
+          <a:prstGeom prst="rect">
+            <a:avLst/>
+          </a:prstGeom>
+          <a:solidFill>
+            <a:srgbClr val="22D3EE"/>
+          </a:solidFill>
+          <a:ln>
+            <a:noFill/>
+          </a:ln>
+        </p:spPr>
+        <p:style>
+          <a:lnRef idx="1">
+            <a:schemeClr val="accent1"/>
+          </a:lnRef>
+          <a:fillRef idx="3">
+            <a:schemeClr val="accent1"/>
+          </a:fillRef>
+          <a:effectRef idx="2">
+            <a:schemeClr val="accent1"/>
+          </a:effectRef>
+          <a:fontRef idx="minor">
+            <a:schemeClr val="lt1"/>
+          </a:fontRef>
+        </p:style>
+        <p:txBody>
+          <a:bodyPr rtlCol="0" anchor="ctr"/>
+          <a:lstStyle/>
+          <a:p>
+            <a:pPr algn="ctr"/>
+          </a:p>
+        </p:txBody>
+      </p:sp>
+      <p:sp>
+        <p:nvSpPr>
+          <p:cNvPr id="3" name="TextBox 2"/>
+          <p:cNvSpPr txBox="1"/>
+          <p:nvPr/>
+        </p:nvSpPr>
+        <p:spPr>
+          <a:xfrm>
+            <a:off x="320040" y="6537960"/>
+            <a:ext cx="6400800" cy="274320"/>
+          </a:xfrm>
+          <a:prstGeom prst="rect">
+            <a:avLst/>
+          </a:prstGeom>
+          <a:noFill/>
+        </p:spPr>
+        <p:txBody>
+          <a:bodyPr wrap="none" anchor="ctr">
+            <a:spAutoFit/>
+          </a:bodyPr>
+          <a:lstStyle/>
+          <a:p>
+            <a:pPr algn="l"/>
+            <a:r>
+              <a:rPr sz="800" b="0">
+                <a:solidFill>
+                  <a:srgbClr val="AAB6C9"/>
+                </a:solidFill>
+                <a:latin typeface="Aptos"/>
+              </a:rPr>
+              <a:t>Intain Verify   ·   Loan Data Verification Copilot</a:t>
+            </a:r>
+          </a:p>
+        </p:txBody>
+      </p:sp>
+      <p:sp>
+        <p:nvSpPr>
+          <p:cNvPr id="4" name="TextBox 3"/>
+          <p:cNvSpPr txBox="1"/>
+          <p:nvPr/>
+        </p:nvSpPr>
+        <p:spPr>
+          <a:xfrm>
+            <a:off x="457200" y="320040"/>
+            <a:ext cx="11247120" cy="640080"/>
+          </a:xfrm>
+          <a:prstGeom prst="rect">
+            <a:avLst/>
+          </a:prstGeom>
+          <a:noFill/>
+        </p:spPr>
+        <p:txBody>
+          <a:bodyPr wrap="none" anchor="ctr">
+            <a:spAutoFit/>
+          </a:bodyPr>
+          <a:lstStyle/>
+          <a:p>
+            <a:pPr algn="l"/>
+            <a:r>
+              <a:rPr sz="2700" b="1">
+                <a:solidFill>
+                  <a:srgbClr val="F5F7FA"/>
+                </a:solidFill>
+                <a:latin typeface="Aptos"/>
+              </a:rPr>
+              <a:t>End-to-end application flow</a:t>
+            </a:r>
+          </a:p>
+        </p:txBody>
+      </p:sp>
+      <p:sp>
+        <p:nvSpPr>
+          <p:cNvPr id="5" name="TextBox 4"/>
+          <p:cNvSpPr txBox="1"/>
+          <p:nvPr/>
+        </p:nvSpPr>
+        <p:spPr>
+          <a:xfrm>
+            <a:off x="457200" y="1051560"/>
+            <a:ext cx="11247120" cy="320040"/>
+          </a:xfrm>
+          <a:prstGeom prst="rect">
+            <a:avLst/>
+          </a:prstGeom>
+          <a:noFill/>
+        </p:spPr>
+        <p:txBody>
+          <a:bodyPr wrap="none" anchor="ctr">
+            <a:spAutoFit/>
+          </a:bodyPr>
+          <a:lstStyle/>
+          <a:p>
+            <a:pPr algn="l"/>
+            <a:r>
+              <a:rPr sz="1200" b="0">
+                <a:solidFill>
+                  <a:srgbClr val="AAB6C9"/>
+                </a:solidFill>
+                <a:latin typeface="Aptos"/>
+              </a:rPr>
+              <a:t>One lifecycle: raw loan data → reviewed exceptions → verified, traceable records</a:t>
+            </a:r>
+          </a:p>
+        </p:txBody>
+      </p:sp>
+      <p:sp>
+        <p:nvSpPr>
+          <p:cNvPr id="6" name="Rectangle 5"/>
+          <p:cNvSpPr/>
+          <p:nvPr/>
+        </p:nvSpPr>
+        <p:spPr>
+          <a:xfrm>
+            <a:off x="457200" y="1389888"/>
+            <a:ext cx="1005840" cy="54864"/>
+          </a:xfrm>
+          <a:prstGeom prst="rect">
+            <a:avLst/>
+          </a:prstGeom>
+          <a:solidFill>
+            <a:srgbClr val="22D3EE"/>
+          </a:solidFill>
+          <a:ln>
+            <a:noFill/>
+          </a:ln>
+        </p:spPr>
+        <p:style>
+          <a:lnRef idx="1">
+            <a:schemeClr val="accent1"/>
+          </a:lnRef>
+          <a:fillRef idx="3">
+            <a:schemeClr val="accent1"/>
+          </a:fillRef>
+          <a:effectRef idx="2">
+            <a:schemeClr val="accent1"/>
+          </a:effectRef>
+          <a:fontRef idx="minor">
+            <a:schemeClr val="lt1"/>
+          </a:fontRef>
+        </p:style>
+        <p:txBody>
+          <a:bodyPr rtlCol="0" anchor="ctr"/>
+          <a:lstStyle/>
+          <a:p>
+            <a:pPr algn="ctr"/>
+          </a:p>
+        </p:txBody>
+      </p:sp>
+      <p:sp>
+        <p:nvSpPr>
+          <p:cNvPr id="7" name="Rounded Rectangle 6"/>
+          <p:cNvSpPr/>
+          <p:nvPr/>
+        </p:nvSpPr>
+        <p:spPr>
+          <a:xfrm>
+            <a:off x="566928" y="1572768"/>
+            <a:ext cx="3520440" cy="658368"/>
+          </a:xfrm>
+          <a:prstGeom prst="roundRect">
+            <a:avLst/>
+          </a:prstGeom>
+          <a:solidFill>
+            <a:srgbClr val="16223B"/>
+          </a:solidFill>
+          <a:ln>
+            <a:solidFill>
+              <a:srgbClr val="2A3953"/>
+            </a:solidFill>
+          </a:ln>
+        </p:spPr>
+        <p:style>
+          <a:lnRef idx="1">
+            <a:schemeClr val="accent1"/>
+          </a:lnRef>
+          <a:fillRef idx="3">
+            <a:schemeClr val="accent1"/>
+          </a:fillRef>
+          <a:effectRef idx="2">
+            <a:schemeClr val="accent1"/>
+          </a:effectRef>
+          <a:fontRef idx="minor">
+            <a:schemeClr val="lt1"/>
+          </a:fontRef>
+        </p:style>
+        <p:txBody>
+          <a:bodyPr rtlCol="0" anchor="ctr"/>
+          <a:lstStyle/>
+          <a:p>
+            <a:pPr algn="ctr"/>
+          </a:p>
+        </p:txBody>
+      </p:sp>
+      <p:sp>
+        <p:nvSpPr>
+          <p:cNvPr id="8" name="Rectangle 7"/>
+          <p:cNvSpPr/>
+          <p:nvPr/>
+        </p:nvSpPr>
+        <p:spPr>
+          <a:xfrm>
+            <a:off x="566928" y="1572768"/>
+            <a:ext cx="54864" cy="658368"/>
+          </a:xfrm>
+          <a:prstGeom prst="rect">
+            <a:avLst/>
+          </a:prstGeom>
+          <a:solidFill>
+            <a:srgbClr val="22D3EE"/>
+          </a:solidFill>
+          <a:ln>
+            <a:noFill/>
+          </a:ln>
+        </p:spPr>
+        <p:style>
+          <a:lnRef idx="1">
+            <a:schemeClr val="accent1"/>
+          </a:lnRef>
+          <a:fillRef idx="3">
+            <a:schemeClr val="accent1"/>
+          </a:fillRef>
+          <a:effectRef idx="2">
+            <a:schemeClr val="accent1"/>
+          </a:effectRef>
+          <a:fontRef idx="minor">
+            <a:schemeClr val="lt1"/>
+          </a:fontRef>
+        </p:style>
+        <p:txBody>
+          <a:bodyPr rtlCol="0" anchor="ctr"/>
+          <a:lstStyle/>
+          <a:p>
+            <a:pPr algn="ctr"/>
+          </a:p>
+        </p:txBody>
+      </p:sp>
+      <p:sp>
+        <p:nvSpPr>
+          <p:cNvPr id="9" name="TextBox 8"/>
+          <p:cNvSpPr txBox="1"/>
+          <p:nvPr/>
+        </p:nvSpPr>
+        <p:spPr>
+          <a:xfrm>
+            <a:off x="731520" y="1682495"/>
+            <a:ext cx="3246120" cy="320040"/>
+          </a:xfrm>
+          <a:prstGeom prst="rect">
+            <a:avLst/>
+          </a:prstGeom>
+          <a:noFill/>
+        </p:spPr>
+        <p:txBody>
+          <a:bodyPr wrap="none" anchor="ctr">
+            <a:spAutoFit/>
+          </a:bodyPr>
+          <a:lstStyle/>
+          <a:p>
+            <a:pPr algn="l"/>
+            <a:r>
+              <a:rPr sz="1150" b="1">
+                <a:solidFill>
+                  <a:srgbClr val="F5F7FA"/>
+                </a:solidFill>
+                <a:latin typeface="Aptos"/>
+              </a:rPr>
+              <a:t>OPERATOR</a:t>
+            </a:r>
+          </a:p>
+        </p:txBody>
+      </p:sp>
+      <p:sp>
+        <p:nvSpPr>
+          <p:cNvPr id="10" name="TextBox 9"/>
+          <p:cNvSpPr txBox="1"/>
+          <p:nvPr/>
+        </p:nvSpPr>
+        <p:spPr>
+          <a:xfrm>
+            <a:off x="731520" y="2048256"/>
+            <a:ext cx="3227832" cy="91439"/>
+          </a:xfrm>
+          <a:prstGeom prst="rect">
+            <a:avLst/>
+          </a:prstGeom>
+          <a:noFill/>
+        </p:spPr>
+        <p:txBody>
+          <a:bodyPr wrap="none" anchor="t">
+            <a:spAutoFit/>
+          </a:bodyPr>
+          <a:lstStyle/>
+          <a:p>
+            <a:pPr algn="l"/>
+            <a:r>
+              <a:rPr sz="919" b="0">
+                <a:solidFill>
+                  <a:srgbClr val="AAB6C9"/>
+                </a:solidFill>
+                <a:latin typeface="Aptos"/>
+              </a:rPr>
+              <a:t>Ingest + lineage</a:t>
+            </a:r>
+          </a:p>
+        </p:txBody>
+      </p:sp>
+      <p:sp>
+        <p:nvSpPr>
+          <p:cNvPr id="11" name="Rounded Rectangle 10"/>
+          <p:cNvSpPr/>
+          <p:nvPr/>
+        </p:nvSpPr>
+        <p:spPr>
+          <a:xfrm>
+            <a:off x="4334256" y="1572768"/>
+            <a:ext cx="3520440" cy="658368"/>
+          </a:xfrm>
+          <a:prstGeom prst="roundRect">
+            <a:avLst/>
+          </a:prstGeom>
+          <a:solidFill>
+            <a:srgbClr val="16223B"/>
+          </a:solidFill>
+          <a:ln>
+            <a:solidFill>
+              <a:srgbClr val="2A3953"/>
+            </a:solidFill>
+          </a:ln>
+        </p:spPr>
+        <p:style>
+          <a:lnRef idx="1">
+            <a:schemeClr val="accent1"/>
+          </a:lnRef>
+          <a:fillRef idx="3">
+            <a:schemeClr val="accent1"/>
+          </a:fillRef>
+          <a:effectRef idx="2">
+            <a:schemeClr val="accent1"/>
+          </a:effectRef>
+          <a:fontRef idx="minor">
+            <a:schemeClr val="lt1"/>
+          </a:fontRef>
+        </p:style>
+        <p:txBody>
+          <a:bodyPr rtlCol="0" anchor="ctr"/>
+          <a:lstStyle/>
+          <a:p>
+            <a:pPr algn="ctr"/>
+          </a:p>
+        </p:txBody>
+      </p:sp>
+      <p:sp>
+        <p:nvSpPr>
+          <p:cNvPr id="12" name="Rectangle 11"/>
+          <p:cNvSpPr/>
+          <p:nvPr/>
+        </p:nvSpPr>
+        <p:spPr>
+          <a:xfrm>
+            <a:off x="4334256" y="1572768"/>
+            <a:ext cx="54864" cy="658368"/>
+          </a:xfrm>
+          <a:prstGeom prst="rect">
+            <a:avLst/>
+          </a:prstGeom>
+          <a:solidFill>
+            <a:srgbClr val="A78BFA"/>
+          </a:solidFill>
+          <a:ln>
+            <a:noFill/>
+          </a:ln>
+        </p:spPr>
+        <p:style>
+          <a:lnRef idx="1">
+            <a:schemeClr val="accent1"/>
+          </a:lnRef>
+          <a:fillRef idx="3">
+            <a:schemeClr val="accent1"/>
+          </a:fillRef>
+          <a:effectRef idx="2">
+            <a:schemeClr val="accent1"/>
+          </a:effectRef>
+          <a:fontRef idx="minor">
+            <a:schemeClr val="lt1"/>
+          </a:fontRef>
+        </p:style>
+        <p:txBody>
+          <a:bodyPr rtlCol="0" anchor="ctr"/>
+          <a:lstStyle/>
+          <a:p>
+            <a:pPr algn="ctr"/>
+          </a:p>
+        </p:txBody>
+      </p:sp>
+      <p:sp>
+        <p:nvSpPr>
+          <p:cNvPr id="13" name="TextBox 12"/>
+          <p:cNvSpPr txBox="1"/>
+          <p:nvPr/>
+        </p:nvSpPr>
+        <p:spPr>
+          <a:xfrm>
+            <a:off x="4498848" y="1682495"/>
+            <a:ext cx="3246120" cy="320040"/>
+          </a:xfrm>
+          <a:prstGeom prst="rect">
+            <a:avLst/>
+          </a:prstGeom>
+          <a:noFill/>
+        </p:spPr>
+        <p:txBody>
+          <a:bodyPr wrap="none" anchor="ctr">
+            <a:spAutoFit/>
+          </a:bodyPr>
+          <a:lstStyle/>
+          <a:p>
+            <a:pPr algn="l"/>
+            <a:r>
+              <a:rPr sz="1150" b="1">
+                <a:solidFill>
+                  <a:srgbClr val="F5F7FA"/>
+                </a:solidFill>
+                <a:latin typeface="Aptos"/>
+              </a:rPr>
+              <a:t>REVIEWER</a:t>
+            </a:r>
+          </a:p>
+        </p:txBody>
+      </p:sp>
+      <p:sp>
+        <p:nvSpPr>
+          <p:cNvPr id="14" name="TextBox 13"/>
+          <p:cNvSpPr txBox="1"/>
+          <p:nvPr/>
+        </p:nvSpPr>
+        <p:spPr>
+          <a:xfrm>
+            <a:off x="4498848" y="2048256"/>
+            <a:ext cx="3227832" cy="91439"/>
+          </a:xfrm>
+          <a:prstGeom prst="rect">
+            <a:avLst/>
+          </a:prstGeom>
+          <a:noFill/>
+        </p:spPr>
+        <p:txBody>
+          <a:bodyPr wrap="none" anchor="t">
+            <a:spAutoFit/>
+          </a:bodyPr>
+          <a:lstStyle/>
+          <a:p>
+            <a:pPr algn="l"/>
+            <a:r>
+              <a:rPr sz="919" b="0">
+                <a:solidFill>
+                  <a:srgbClr val="AAB6C9"/>
+                </a:solidFill>
+                <a:latin typeface="Aptos"/>
+              </a:rPr>
+              <a:t>Resolve + reconcile</a:t>
+            </a:r>
+          </a:p>
+        </p:txBody>
+      </p:sp>
+      <p:sp>
+        <p:nvSpPr>
+          <p:cNvPr id="15" name="Rounded Rectangle 14"/>
+          <p:cNvSpPr/>
+          <p:nvPr/>
+        </p:nvSpPr>
+        <p:spPr>
+          <a:xfrm>
+            <a:off x="8101583" y="1572768"/>
+            <a:ext cx="3520440" cy="658368"/>
+          </a:xfrm>
+          <a:prstGeom prst="roundRect">
+            <a:avLst/>
+          </a:prstGeom>
+          <a:solidFill>
+            <a:srgbClr val="16223B"/>
+          </a:solidFill>
+          <a:ln>
+            <a:solidFill>
+              <a:srgbClr val="2A3953"/>
+            </a:solidFill>
+          </a:ln>
+        </p:spPr>
+        <p:style>
+          <a:lnRef idx="1">
+            <a:schemeClr val="accent1"/>
+          </a:lnRef>
+          <a:fillRef idx="3">
+            <a:schemeClr val="accent1"/>
+          </a:fillRef>
+          <a:effectRef idx="2">
+            <a:schemeClr val="accent1"/>
+          </a:effectRef>
+          <a:fontRef idx="minor">
+            <a:schemeClr val="lt1"/>
+          </a:fontRef>
+        </p:style>
+        <p:txBody>
+          <a:bodyPr rtlCol="0" anchor="ctr"/>
+          <a:lstStyle/>
+          <a:p>
+            <a:pPr algn="ctr"/>
+          </a:p>
+        </p:txBody>
+      </p:sp>
+      <p:sp>
+        <p:nvSpPr>
+          <p:cNvPr id="16" name="Rectangle 15"/>
+          <p:cNvSpPr/>
+          <p:nvPr/>
+        </p:nvSpPr>
+        <p:spPr>
+          <a:xfrm>
+            <a:off x="8101583" y="1572768"/>
+            <a:ext cx="54864" cy="658368"/>
+          </a:xfrm>
+          <a:prstGeom prst="rect">
+            <a:avLst/>
+          </a:prstGeom>
+          <a:solidFill>
+            <a:srgbClr val="34D399"/>
+          </a:solidFill>
+          <a:ln>
+            <a:noFill/>
+          </a:ln>
+        </p:spPr>
+        <p:style>
+          <a:lnRef idx="1">
+            <a:schemeClr val="accent1"/>
+          </a:lnRef>
+          <a:fillRef idx="3">
+            <a:schemeClr val="accent1"/>
+          </a:fillRef>
+          <a:effectRef idx="2">
+            <a:schemeClr val="accent1"/>
+          </a:effectRef>
+          <a:fontRef idx="minor">
+            <a:schemeClr val="lt1"/>
+          </a:fontRef>
+        </p:style>
+        <p:txBody>
+          <a:bodyPr rtlCol="0" anchor="ctr"/>
+          <a:lstStyle/>
+          <a:p>
+            <a:pPr algn="ctr"/>
+          </a:p>
+        </p:txBody>
+      </p:sp>
+      <p:sp>
+        <p:nvSpPr>
+          <p:cNvPr id="17" name="TextBox 16"/>
+          <p:cNvSpPr txBox="1"/>
+          <p:nvPr/>
+        </p:nvSpPr>
+        <p:spPr>
+          <a:xfrm>
+            <a:off x="8266175" y="1682495"/>
+            <a:ext cx="3246120" cy="320040"/>
+          </a:xfrm>
+          <a:prstGeom prst="rect">
+            <a:avLst/>
+          </a:prstGeom>
+          <a:noFill/>
+        </p:spPr>
+        <p:txBody>
+          <a:bodyPr wrap="none" anchor="ctr">
+            <a:spAutoFit/>
+          </a:bodyPr>
+          <a:lstStyle/>
+          <a:p>
+            <a:pPr algn="l"/>
+            <a:r>
+              <a:rPr sz="1150" b="1">
+                <a:solidFill>
+                  <a:srgbClr val="F5F7FA"/>
+                </a:solidFill>
+                <a:latin typeface="Aptos"/>
+              </a:rPr>
+              <a:t>CONSUMER</a:t>
+            </a:r>
+          </a:p>
+        </p:txBody>
+      </p:sp>
+      <p:sp>
+        <p:nvSpPr>
+          <p:cNvPr id="18" name="TextBox 17"/>
+          <p:cNvSpPr txBox="1"/>
+          <p:nvPr/>
+        </p:nvSpPr>
+        <p:spPr>
+          <a:xfrm>
+            <a:off x="8266175" y="2048256"/>
+            <a:ext cx="3227832" cy="91439"/>
+          </a:xfrm>
+          <a:prstGeom prst="rect">
+            <a:avLst/>
+          </a:prstGeom>
+          <a:noFill/>
+        </p:spPr>
+        <p:txBody>
+          <a:bodyPr wrap="none" anchor="t">
+            <a:spAutoFit/>
+          </a:bodyPr>
+          <a:lstStyle/>
+          <a:p>
+            <a:pPr algn="l"/>
+            <a:r>
+              <a:rPr sz="919" b="0">
+                <a:solidFill>
+                  <a:srgbClr val="AAB6C9"/>
+                </a:solidFill>
+                <a:latin typeface="Aptos"/>
+              </a:rPr>
+              <a:t>Consume + prove</a:t>
+            </a:r>
+          </a:p>
+        </p:txBody>
+      </p:sp>
+      <p:sp>
+        <p:nvSpPr>
+          <p:cNvPr id="19" name="Rounded Rectangle 18"/>
+          <p:cNvSpPr/>
+          <p:nvPr/>
+        </p:nvSpPr>
+        <p:spPr>
+          <a:xfrm>
+            <a:off x="502920" y="2606040"/>
+            <a:ext cx="1444752" cy="1261872"/>
+          </a:xfrm>
+          <a:prstGeom prst="roundRect">
+            <a:avLst/>
+          </a:prstGeom>
+          <a:solidFill>
+            <a:srgbClr val="16223B"/>
+          </a:solidFill>
+          <a:ln>
+            <a:solidFill>
+              <a:srgbClr val="22D3EE"/>
+            </a:solidFill>
+          </a:ln>
+        </p:spPr>
+        <p:style>
+          <a:lnRef idx="1">
+            <a:schemeClr val="accent1"/>
+          </a:lnRef>
+          <a:fillRef idx="3">
+            <a:schemeClr val="accent1"/>
+          </a:fillRef>
+          <a:effectRef idx="2">
+            <a:schemeClr val="accent1"/>
+          </a:effectRef>
+          <a:fontRef idx="minor">
+            <a:schemeClr val="lt1"/>
+          </a:fontRef>
+        </p:style>
+        <p:txBody>
+          <a:bodyPr rtlCol="0" anchor="ctr"/>
+          <a:lstStyle/>
+          <a:p>
+            <a:pPr algn="ctr"/>
+          </a:p>
+        </p:txBody>
+      </p:sp>
+      <p:sp>
+        <p:nvSpPr>
+          <p:cNvPr id="20" name="TextBox 19"/>
+          <p:cNvSpPr txBox="1"/>
+          <p:nvPr/>
+        </p:nvSpPr>
+        <p:spPr>
+          <a:xfrm>
+            <a:off x="576072" y="2633472"/>
+            <a:ext cx="1298448" cy="1207007"/>
+          </a:xfrm>
+          <a:prstGeom prst="rect">
+            <a:avLst/>
+          </a:prstGeom>
+          <a:noFill/>
+        </p:spPr>
+        <p:txBody>
+          <a:bodyPr wrap="none" anchor="ctr">
+            <a:spAutoFit/>
+          </a:bodyPr>
+          <a:lstStyle/>
+          <a:p>
+            <a:pPr algn="ctr"/>
+            <a:r>
+              <a:rPr sz="869" b="1">
+                <a:solidFill>
+                  <a:srgbClr val="F5F7FA"/>
+                </a:solidFill>
+                <a:latin typeface="Aptos"/>
+              </a:rPr>
+              <a:t>1
+UPLOAD
+3 CSVs
++ client SHA-256</a:t>
+            </a:r>
+          </a:p>
+        </p:txBody>
+      </p:sp>
+      <p:cxnSp>
+        <p:nvCxnSpPr>
+          <p:cNvPr id="21" name="Connector 20"/>
+          <p:cNvCxnSpPr/>
+          <p:nvPr/>
+        </p:nvCxnSpPr>
+        <p:spPr>
+          <a:xfrm>
+            <a:off x="1947672" y="3236976"/>
+            <a:ext cx="219456" cy="0"/>
+          </a:xfrm>
+          <a:prstGeom prst="line">
+            <a:avLst/>
+          </a:prstGeom>
+          <a:ln w="20320">
+            <a:solidFill>
+              <a:srgbClr val="AAB6C9"/>
+            </a:solidFill>
+          </a:ln>
+        </p:spPr>
+        <p:style>
+          <a:lnRef idx="2">
+            <a:schemeClr val="accent1"/>
+          </a:lnRef>
+          <a:fillRef idx="0">
+            <a:schemeClr val="accent1"/>
+          </a:fillRef>
+          <a:effectRef idx="1">
+            <a:schemeClr val="accent1"/>
+          </a:effectRef>
+          <a:fontRef idx="minor">
+            <a:schemeClr val="tx1"/>
+          </a:fontRef>
+        </p:style>
+      </p:cxnSp>
+      <p:sp>
+        <p:nvSpPr>
+          <p:cNvPr id="22" name="Rounded Rectangle 21"/>
+          <p:cNvSpPr/>
+          <p:nvPr/>
+        </p:nvSpPr>
+        <p:spPr>
+          <a:xfrm>
+            <a:off x="2167128" y="2606040"/>
+            <a:ext cx="1444752" cy="1261872"/>
+          </a:xfrm>
+          <a:prstGeom prst="roundRect">
+            <a:avLst/>
+          </a:prstGeom>
+          <a:solidFill>
+            <a:srgbClr val="16223B"/>
+          </a:solidFill>
+          <a:ln>
+            <a:solidFill>
+              <a:srgbClr val="22D3EE"/>
+            </a:solidFill>
+          </a:ln>
+        </p:spPr>
+        <p:style>
+          <a:lnRef idx="1">
+            <a:schemeClr val="accent1"/>
+          </a:lnRef>
+          <a:fillRef idx="3">
+            <a:schemeClr val="accent1"/>
+          </a:fillRef>
+          <a:effectRef idx="2">
+            <a:schemeClr val="accent1"/>
+          </a:effectRef>
+          <a:fontRef idx="minor">
+            <a:schemeClr val="lt1"/>
+          </a:fontRef>
+        </p:style>
+        <p:txBody>
+          <a:bodyPr rtlCol="0" anchor="ctr"/>
+          <a:lstStyle/>
+          <a:p>
+            <a:pPr algn="ctr"/>
+          </a:p>
+        </p:txBody>
+      </p:sp>
+      <p:sp>
+        <p:nvSpPr>
+          <p:cNvPr id="23" name="TextBox 22"/>
+          <p:cNvSpPr txBox="1"/>
+          <p:nvPr/>
+        </p:nvSpPr>
+        <p:spPr>
+          <a:xfrm>
+            <a:off x="2240280" y="2633472"/>
+            <a:ext cx="1298448" cy="1207007"/>
+          </a:xfrm>
+          <a:prstGeom prst="rect">
+            <a:avLst/>
+          </a:prstGeom>
+          <a:noFill/>
+        </p:spPr>
+        <p:txBody>
+          <a:bodyPr wrap="none" anchor="ctr">
+            <a:spAutoFit/>
+          </a:bodyPr>
+          <a:lstStyle/>
+          <a:p>
+            <a:pPr algn="ctr"/>
+            <a:r>
+              <a:rPr sz="869" b="1">
+                <a:solidFill>
+                  <a:srgbClr val="F5F7FA"/>
+                </a:solidFill>
+                <a:latin typeface="Aptos"/>
+              </a:rPr>
+              <a:t>2
+NORMALIZE
+Raw import
++ source lineage</a:t>
+            </a:r>
+          </a:p>
+        </p:txBody>
+      </p:sp>
+      <p:cxnSp>
+        <p:nvCxnSpPr>
+          <p:cNvPr id="24" name="Connector 23"/>
+          <p:cNvCxnSpPr/>
+          <p:nvPr/>
+        </p:nvCxnSpPr>
+        <p:spPr>
+          <a:xfrm>
+            <a:off x="3611880" y="3236976"/>
+            <a:ext cx="219456" cy="0"/>
+          </a:xfrm>
+          <a:prstGeom prst="line">
+            <a:avLst/>
+          </a:prstGeom>
+          <a:ln w="20320">
+            <a:solidFill>
+              <a:srgbClr val="AAB6C9"/>
+            </a:solidFill>
+          </a:ln>
+        </p:spPr>
+        <p:style>
+          <a:lnRef idx="2">
+            <a:schemeClr val="accent1"/>
+          </a:lnRef>
+          <a:fillRef idx="0">
+            <a:schemeClr val="accent1"/>
+          </a:fillRef>
+          <a:effectRef idx="1">
+            <a:schemeClr val="accent1"/>
+          </a:effectRef>
+          <a:fontRef idx="minor">
+            <a:schemeClr val="tx1"/>
+          </a:fontRef>
+        </p:style>
+      </p:cxnSp>
+      <p:sp>
+        <p:nvSpPr>
+          <p:cNvPr id="25" name="Rounded Rectangle 24"/>
+          <p:cNvSpPr/>
+          <p:nvPr/>
+        </p:nvSpPr>
+        <p:spPr>
+          <a:xfrm>
+            <a:off x="3831336" y="2606040"/>
+            <a:ext cx="1444752" cy="1261872"/>
+          </a:xfrm>
+          <a:prstGeom prst="roundRect">
+            <a:avLst/>
+          </a:prstGeom>
+          <a:solidFill>
+            <a:srgbClr val="16223B"/>
+          </a:solidFill>
+          <a:ln>
+            <a:solidFill>
+              <a:srgbClr val="22D3EE"/>
+            </a:solidFill>
+          </a:ln>
+        </p:spPr>
+        <p:style>
+          <a:lnRef idx="1">
+            <a:schemeClr val="accent1"/>
+          </a:lnRef>
+          <a:fillRef idx="3">
+            <a:schemeClr val="accent1"/>
+          </a:fillRef>
+          <a:effectRef idx="2">
+            <a:schemeClr val="accent1"/>
+          </a:effectRef>
+          <a:fontRef idx="minor">
+            <a:schemeClr val="lt1"/>
+          </a:fontRef>
+        </p:style>
+        <p:txBody>
+          <a:bodyPr rtlCol="0" anchor="ctr"/>
+          <a:lstStyle/>
+          <a:p>
+            <a:pPr algn="ctr"/>
+          </a:p>
+        </p:txBody>
+      </p:sp>
+      <p:sp>
+        <p:nvSpPr>
+          <p:cNvPr id="26" name="TextBox 25"/>
+          <p:cNvSpPr txBox="1"/>
+          <p:nvPr/>
+        </p:nvSpPr>
+        <p:spPr>
+          <a:xfrm>
+            <a:off x="3904488" y="2633472"/>
+            <a:ext cx="1298448" cy="1207007"/>
+          </a:xfrm>
+          <a:prstGeom prst="rect">
+            <a:avLst/>
+          </a:prstGeom>
+          <a:noFill/>
+        </p:spPr>
+        <p:txBody>
+          <a:bodyPr wrap="none" anchor="ctr">
+            <a:spAutoFit/>
+          </a:bodyPr>
+          <a:lstStyle/>
+          <a:p>
+            <a:pPr algn="ctr"/>
+            <a:r>
+              <a:rPr sz="869" b="1">
+                <a:solidFill>
+                  <a:srgbClr val="F5F7FA"/>
+                </a:solidFill>
+                <a:latin typeface="Aptos"/>
+              </a:rPr>
+              <a:t>3
+VALIDATE
+Config-driven
+rules</a:t>
+            </a:r>
+          </a:p>
+        </p:txBody>
+      </p:sp>
+      <p:cxnSp>
+        <p:nvCxnSpPr>
+          <p:cNvPr id="27" name="Connector 26"/>
+          <p:cNvCxnSpPr/>
+          <p:nvPr/>
+        </p:nvCxnSpPr>
+        <p:spPr>
+          <a:xfrm>
+            <a:off x="5276088" y="3236976"/>
+            <a:ext cx="219456" cy="0"/>
+          </a:xfrm>
+          <a:prstGeom prst="line">
+            <a:avLst/>
+          </a:prstGeom>
+          <a:ln w="20320">
+            <a:solidFill>
+              <a:srgbClr val="AAB6C9"/>
+            </a:solidFill>
+          </a:ln>
+        </p:spPr>
+        <p:style>
+          <a:lnRef idx="2">
+            <a:schemeClr val="accent1"/>
+          </a:lnRef>
+          <a:fillRef idx="0">
+            <a:schemeClr val="accent1"/>
+          </a:fillRef>
+          <a:effectRef idx="1">
+            <a:schemeClr val="accent1"/>
+          </a:effectRef>
+          <a:fontRef idx="minor">
+            <a:schemeClr val="tx1"/>
+          </a:fontRef>
+        </p:style>
+      </p:cxnSp>
+      <p:sp>
+        <p:nvSpPr>
+          <p:cNvPr id="28" name="Rounded Rectangle 27"/>
+          <p:cNvSpPr/>
+          <p:nvPr/>
+        </p:nvSpPr>
+        <p:spPr>
+          <a:xfrm>
+            <a:off x="5495544" y="2606040"/>
+            <a:ext cx="1444752" cy="1261872"/>
+          </a:xfrm>
+          <a:prstGeom prst="roundRect">
+            <a:avLst/>
+          </a:prstGeom>
+          <a:solidFill>
+            <a:srgbClr val="16223B"/>
+          </a:solidFill>
+          <a:ln>
+            <a:solidFill>
+              <a:srgbClr val="FBBF24"/>
+            </a:solidFill>
+          </a:ln>
+        </p:spPr>
+        <p:style>
+          <a:lnRef idx="1">
+            <a:schemeClr val="accent1"/>
+          </a:lnRef>
+          <a:fillRef idx="3">
+            <a:schemeClr val="accent1"/>
+          </a:fillRef>
+          <a:effectRef idx="2">
+            <a:schemeClr val="accent1"/>
+          </a:effectRef>
+          <a:fontRef idx="minor">
+            <a:schemeClr val="lt1"/>
+          </a:fontRef>
+        </p:style>
+        <p:txBody>
+          <a:bodyPr rtlCol="0" anchor="ctr"/>
+          <a:lstStyle/>
+          <a:p>
+            <a:pPr algn="ctr"/>
+          </a:p>
+        </p:txBody>
+      </p:sp>
+      <p:sp>
+        <p:nvSpPr>
+          <p:cNvPr id="29" name="TextBox 28"/>
+          <p:cNvSpPr txBox="1"/>
+          <p:nvPr/>
+        </p:nvSpPr>
+        <p:spPr>
+          <a:xfrm>
+            <a:off x="5568696" y="2633472"/>
+            <a:ext cx="1298448" cy="1207007"/>
+          </a:xfrm>
+          <a:prstGeom prst="rect">
+            <a:avLst/>
+          </a:prstGeom>
+          <a:noFill/>
+        </p:spPr>
+        <p:txBody>
+          <a:bodyPr wrap="none" anchor="ctr">
+            <a:spAutoFit/>
+          </a:bodyPr>
+          <a:lstStyle/>
+          <a:p>
+            <a:pPr algn="ctr"/>
+            <a:r>
+              <a:rPr sz="869" b="1">
+                <a:solidFill>
+                  <a:srgbClr val="F5F7FA"/>
+                </a:solidFill>
+                <a:latin typeface="Aptos"/>
+              </a:rPr>
+              <a:t>4
+EXCEPTIONS
+Queue by
+severity</a:t>
+            </a:r>
+          </a:p>
+        </p:txBody>
+      </p:sp>
+      <p:cxnSp>
+        <p:nvCxnSpPr>
+          <p:cNvPr id="30" name="Connector 29"/>
+          <p:cNvCxnSpPr/>
+          <p:nvPr/>
+        </p:nvCxnSpPr>
+        <p:spPr>
+          <a:xfrm>
+            <a:off x="6940296" y="3236976"/>
+            <a:ext cx="219456" cy="0"/>
+          </a:xfrm>
+          <a:prstGeom prst="line">
+            <a:avLst/>
+          </a:prstGeom>
+          <a:ln w="20320">
+            <a:solidFill>
+              <a:srgbClr val="AAB6C9"/>
+            </a:solidFill>
+          </a:ln>
+        </p:spPr>
+        <p:style>
+          <a:lnRef idx="2">
+            <a:schemeClr val="accent1"/>
+          </a:lnRef>
+          <a:fillRef idx="0">
+            <a:schemeClr val="accent1"/>
+          </a:fillRef>
+          <a:effectRef idx="1">
+            <a:schemeClr val="accent1"/>
+          </a:effectRef>
+          <a:fontRef idx="minor">
+            <a:schemeClr val="tx1"/>
+          </a:fontRef>
+        </p:style>
+      </p:cxnSp>
+      <p:sp>
+        <p:nvSpPr>
+          <p:cNvPr id="31" name="Rounded Rectangle 30"/>
+          <p:cNvSpPr/>
+          <p:nvPr/>
+        </p:nvSpPr>
+        <p:spPr>
+          <a:xfrm>
+            <a:off x="7159752" y="2606040"/>
+            <a:ext cx="1444752" cy="1261872"/>
+          </a:xfrm>
+          <a:prstGeom prst="roundRect">
+            <a:avLst/>
+          </a:prstGeom>
+          <a:solidFill>
+            <a:srgbClr val="16223B"/>
+          </a:solidFill>
+          <a:ln>
+            <a:solidFill>
+              <a:srgbClr val="A78BFA"/>
+            </a:solidFill>
+          </a:ln>
+        </p:spPr>
+        <p:style>
+          <a:lnRef idx="1">
+            <a:schemeClr val="accent1"/>
+          </a:lnRef>
+          <a:fillRef idx="3">
+            <a:schemeClr val="accent1"/>
+          </a:fillRef>
+          <a:effectRef idx="2">
+            <a:schemeClr val="accent1"/>
+          </a:effectRef>
+          <a:fontRef idx="minor">
+            <a:schemeClr val="lt1"/>
+          </a:fontRef>
+        </p:style>
+        <p:txBody>
+          <a:bodyPr rtlCol="0" anchor="ctr"/>
+          <a:lstStyle/>
+          <a:p>
+            <a:pPr algn="ctr"/>
+          </a:p>
+        </p:txBody>
+      </p:sp>
+      <p:sp>
+        <p:nvSpPr>
+          <p:cNvPr id="32" name="TextBox 31"/>
+          <p:cNvSpPr txBox="1"/>
+          <p:nvPr/>
+        </p:nvSpPr>
+        <p:spPr>
+          <a:xfrm>
+            <a:off x="7232904" y="2633472"/>
+            <a:ext cx="1298448" cy="1207007"/>
+          </a:xfrm>
+          <a:prstGeom prst="rect">
+            <a:avLst/>
+          </a:prstGeom>
+          <a:noFill/>
+        </p:spPr>
+        <p:txBody>
+          <a:bodyPr wrap="none" anchor="ctr">
+            <a:spAutoFit/>
+          </a:bodyPr>
+          <a:lstStyle/>
+          <a:p>
+            <a:pPr algn="ctr"/>
+            <a:r>
+              <a:rPr sz="869" b="1">
+                <a:solidFill>
+                  <a:srgbClr val="F5F7FA"/>
+                </a:solidFill>
+                <a:latin typeface="Aptos"/>
+              </a:rPr>
+              <a:t>5
+AI ASSIST
+Explain +
+recommend</a:t>
+            </a:r>
+          </a:p>
+        </p:txBody>
+      </p:sp>
+      <p:cxnSp>
+        <p:nvCxnSpPr>
+          <p:cNvPr id="33" name="Connector 32"/>
+          <p:cNvCxnSpPr/>
+          <p:nvPr/>
+        </p:nvCxnSpPr>
+        <p:spPr>
+          <a:xfrm>
+            <a:off x="8604504" y="3236976"/>
+            <a:ext cx="219456" cy="0"/>
+          </a:xfrm>
+          <a:prstGeom prst="line">
+            <a:avLst/>
+          </a:prstGeom>
+          <a:ln w="20320">
+            <a:solidFill>
+              <a:srgbClr val="AAB6C9"/>
+            </a:solidFill>
+          </a:ln>
+        </p:spPr>
+        <p:style>
+          <a:lnRef idx="2">
+            <a:schemeClr val="accent1"/>
+          </a:lnRef>
+          <a:fillRef idx="0">
+            <a:schemeClr val="accent1"/>
+          </a:fillRef>
+          <a:effectRef idx="1">
+            <a:schemeClr val="accent1"/>
+          </a:effectRef>
+          <a:fontRef idx="minor">
+            <a:schemeClr val="tx1"/>
+          </a:fontRef>
+        </p:style>
+      </p:cxnSp>
+      <p:sp>
+        <p:nvSpPr>
+          <p:cNvPr id="34" name="Rounded Rectangle 33"/>
+          <p:cNvSpPr/>
+          <p:nvPr/>
+        </p:nvSpPr>
+        <p:spPr>
+          <a:xfrm>
+            <a:off x="8823960" y="2606040"/>
+            <a:ext cx="1444752" cy="1261872"/>
+          </a:xfrm>
+          <a:prstGeom prst="roundRect">
+            <a:avLst/>
+          </a:prstGeom>
+          <a:solidFill>
+            <a:srgbClr val="16223B"/>
+          </a:solidFill>
+          <a:ln>
+            <a:solidFill>
+              <a:srgbClr val="A78BFA"/>
+            </a:solidFill>
+          </a:ln>
+        </p:spPr>
+        <p:style>
+          <a:lnRef idx="1">
+            <a:schemeClr val="accent1"/>
+          </a:lnRef>
+          <a:fillRef idx="3">
+            <a:schemeClr val="accent1"/>
+          </a:fillRef>
+          <a:effectRef idx="2">
+            <a:schemeClr val="accent1"/>
+          </a:effectRef>
+          <a:fontRef idx="minor">
+            <a:schemeClr val="lt1"/>
+          </a:fontRef>
+        </p:style>
+        <p:txBody>
+          <a:bodyPr rtlCol="0" anchor="ctr"/>
+          <a:lstStyle/>
+          <a:p>
+            <a:pPr algn="ctr"/>
+          </a:p>
+        </p:txBody>
+      </p:sp>
+      <p:sp>
+        <p:nvSpPr>
+          <p:cNvPr id="35" name="TextBox 34"/>
+          <p:cNvSpPr txBox="1"/>
+          <p:nvPr/>
+        </p:nvSpPr>
+        <p:spPr>
+          <a:xfrm>
+            <a:off x="8897112" y="2633472"/>
+            <a:ext cx="1298448" cy="1207007"/>
+          </a:xfrm>
+          <a:prstGeom prst="rect">
+            <a:avLst/>
+          </a:prstGeom>
+          <a:noFill/>
+        </p:spPr>
+        <p:txBody>
+          <a:bodyPr wrap="none" anchor="ctr">
+            <a:spAutoFit/>
+          </a:bodyPr>
+          <a:lstStyle/>
+          <a:p>
+            <a:pPr algn="ctr"/>
+            <a:r>
+              <a:rPr sz="869" b="1">
+                <a:solidFill>
+                  <a:srgbClr val="F5F7FA"/>
+                </a:solidFill>
+                <a:latin typeface="Aptos"/>
+              </a:rPr>
+              <a:t>6
+HUMAN REVIEW
+Accept / edit /
+reject</a:t>
+            </a:r>
+          </a:p>
+        </p:txBody>
+      </p:sp>
+      <p:cxnSp>
+        <p:nvCxnSpPr>
+          <p:cNvPr id="36" name="Connector 35"/>
+          <p:cNvCxnSpPr/>
+          <p:nvPr/>
+        </p:nvCxnSpPr>
+        <p:spPr>
+          <a:xfrm>
+            <a:off x="10268712" y="3236976"/>
+            <a:ext cx="219456" cy="0"/>
+          </a:xfrm>
+          <a:prstGeom prst="line">
+            <a:avLst/>
+          </a:prstGeom>
+          <a:ln w="20320">
+            <a:solidFill>
+              <a:srgbClr val="AAB6C9"/>
+            </a:solidFill>
+          </a:ln>
+        </p:spPr>
+        <p:style>
+          <a:lnRef idx="2">
+            <a:schemeClr val="accent1"/>
+          </a:lnRef>
+          <a:fillRef idx="0">
+            <a:schemeClr val="accent1"/>
+          </a:fillRef>
+          <a:effectRef idx="1">
+            <a:schemeClr val="accent1"/>
+          </a:effectRef>
+          <a:fontRef idx="minor">
+            <a:schemeClr val="tx1"/>
+          </a:fontRef>
+        </p:style>
+      </p:cxnSp>
+      <p:sp>
+        <p:nvSpPr>
+          <p:cNvPr id="37" name="Rounded Rectangle 36"/>
+          <p:cNvSpPr/>
+          <p:nvPr/>
+        </p:nvSpPr>
+        <p:spPr>
+          <a:xfrm>
+            <a:off x="10488168" y="2606040"/>
+            <a:ext cx="1444752" cy="1261872"/>
+          </a:xfrm>
+          <a:prstGeom prst="roundRect">
+            <a:avLst/>
+          </a:prstGeom>
+          <a:solidFill>
+            <a:srgbClr val="16223B"/>
+          </a:solidFill>
+          <a:ln>
+            <a:solidFill>
+              <a:srgbClr val="34D399"/>
+            </a:solidFill>
+          </a:ln>
+        </p:spPr>
+        <p:style>
+          <a:lnRef idx="1">
+            <a:schemeClr val="accent1"/>
+          </a:lnRef>
+          <a:fillRef idx="3">
+            <a:schemeClr val="accent1"/>
+          </a:fillRef>
+          <a:effectRef idx="2">
+            <a:schemeClr val="accent1"/>
+          </a:effectRef>
+          <a:fontRef idx="minor">
+            <a:schemeClr val="lt1"/>
+          </a:fontRef>
+        </p:style>
+        <p:txBody>
+          <a:bodyPr rtlCol="0" anchor="ctr"/>
+          <a:lstStyle/>
+          <a:p>
+            <a:pPr algn="ctr"/>
+          </a:p>
+        </p:txBody>
+      </p:sp>
+      <p:sp>
+        <p:nvSpPr>
+          <p:cNvPr id="38" name="TextBox 37"/>
+          <p:cNvSpPr txBox="1"/>
+          <p:nvPr/>
+        </p:nvSpPr>
+        <p:spPr>
+          <a:xfrm>
+            <a:off x="10561320" y="2633472"/>
+            <a:ext cx="1298448" cy="1207007"/>
+          </a:xfrm>
+          <a:prstGeom prst="rect">
+            <a:avLst/>
+          </a:prstGeom>
+          <a:noFill/>
+        </p:spPr>
+        <p:txBody>
+          <a:bodyPr wrap="none" anchor="ctr">
+            <a:spAutoFit/>
+          </a:bodyPr>
+          <a:lstStyle/>
+          <a:p>
+            <a:pPr algn="ctr"/>
+            <a:r>
+              <a:rPr sz="869" b="1">
+                <a:solidFill>
+                  <a:srgbClr val="F5F7FA"/>
+                </a:solidFill>
+                <a:latin typeface="Aptos"/>
+              </a:rPr>
+              <a:t>7
+VERIFY
+Trust score +
+snapshot + hash</a:t>
+            </a:r>
+          </a:p>
+        </p:txBody>
+      </p:sp>
+      <p:sp>
+        <p:nvSpPr>
+          <p:cNvPr id="39" name="Rounded Rectangle 38"/>
+          <p:cNvSpPr/>
+          <p:nvPr/>
+        </p:nvSpPr>
+        <p:spPr>
+          <a:xfrm>
+            <a:off x="566928" y="4187952"/>
+            <a:ext cx="3566160" cy="1417320"/>
+          </a:xfrm>
+          <a:prstGeom prst="roundRect">
+            <a:avLst/>
+          </a:prstGeom>
+          <a:solidFill>
+            <a:srgbClr val="16223B"/>
+          </a:solidFill>
+          <a:ln>
+            <a:solidFill>
+              <a:srgbClr val="2A3953"/>
+            </a:solidFill>
+          </a:ln>
+        </p:spPr>
+        <p:style>
+          <a:lnRef idx="1">
+            <a:schemeClr val="accent1"/>
+          </a:lnRef>
+          <a:fillRef idx="3">
+            <a:schemeClr val="accent1"/>
+          </a:fillRef>
+          <a:effectRef idx="2">
+            <a:schemeClr val="accent1"/>
+          </a:effectRef>
+          <a:fontRef idx="minor">
+            <a:schemeClr val="lt1"/>
+          </a:fontRef>
+        </p:style>
+        <p:txBody>
+          <a:bodyPr rtlCol="0" anchor="ctr"/>
+          <a:lstStyle/>
+          <a:p>
+            <a:pPr algn="ctr"/>
+          </a:p>
+        </p:txBody>
+      </p:sp>
+      <p:sp>
+        <p:nvSpPr>
+          <p:cNvPr id="40" name="Rectangle 39"/>
+          <p:cNvSpPr/>
+          <p:nvPr/>
+        </p:nvSpPr>
+        <p:spPr>
+          <a:xfrm>
+            <a:off x="566928" y="4187952"/>
+            <a:ext cx="54864" cy="1417320"/>
+          </a:xfrm>
+          <a:prstGeom prst="rect">
+            <a:avLst/>
+          </a:prstGeom>
+          <a:solidFill>
+            <a:srgbClr val="22D3EE"/>
+          </a:solidFill>
+          <a:ln>
+            <a:noFill/>
+          </a:ln>
+        </p:spPr>
+        <p:style>
+          <a:lnRef idx="1">
+            <a:schemeClr val="accent1"/>
+          </a:lnRef>
+          <a:fillRef idx="3">
+            <a:schemeClr val="accent1"/>
+          </a:fillRef>
+          <a:effectRef idx="2">
+            <a:schemeClr val="accent1"/>
+          </a:effectRef>
+          <a:fontRef idx="minor">
+            <a:schemeClr val="lt1"/>
+          </a:fontRef>
+        </p:style>
+        <p:txBody>
+          <a:bodyPr rtlCol="0" anchor="ctr"/>
+          <a:lstStyle/>
+          <a:p>
+            <a:pPr algn="ctr"/>
+          </a:p>
+        </p:txBody>
+      </p:sp>
+      <p:sp>
+        <p:nvSpPr>
+          <p:cNvPr id="41" name="TextBox 40"/>
+          <p:cNvSpPr txBox="1"/>
+          <p:nvPr/>
+        </p:nvSpPr>
+        <p:spPr>
+          <a:xfrm>
+            <a:off x="731520" y="4297680"/>
+            <a:ext cx="3291840" cy="320040"/>
+          </a:xfrm>
+          <a:prstGeom prst="rect">
+            <a:avLst/>
+          </a:prstGeom>
+          <a:noFill/>
+        </p:spPr>
+        <p:txBody>
+          <a:bodyPr wrap="none" anchor="ctr">
+            <a:spAutoFit/>
+          </a:bodyPr>
+          <a:lstStyle/>
+          <a:p>
+            <a:pPr algn="l"/>
+            <a:r>
+              <a:rPr sz="1200" b="1">
+                <a:solidFill>
+                  <a:srgbClr val="F5F7FA"/>
+                </a:solidFill>
+                <a:latin typeface="Aptos"/>
+              </a:rPr>
+              <a:t>TRACEABILITY</a:t>
+            </a:r>
+          </a:p>
+        </p:txBody>
+      </p:sp>
+      <p:sp>
+        <p:nvSpPr>
+          <p:cNvPr id="42" name="TextBox 41"/>
+          <p:cNvSpPr txBox="1"/>
+          <p:nvPr/>
+        </p:nvSpPr>
+        <p:spPr>
+          <a:xfrm>
+            <a:off x="731520" y="4663440"/>
+            <a:ext cx="3273552" cy="850392"/>
+          </a:xfrm>
+          <a:prstGeom prst="rect">
+            <a:avLst/>
+          </a:prstGeom>
+          <a:noFill/>
+        </p:spPr>
+        <p:txBody>
+          <a:bodyPr wrap="none" anchor="t">
+            <a:spAutoFit/>
+          </a:bodyPr>
+          <a:lstStyle/>
+          <a:p>
+            <a:pPr algn="l"/>
+            <a:r>
+              <a:rPr sz="1000" b="0">
+                <a:solidFill>
+                  <a:srgbClr val="AAB6C9"/>
+                </a:solidFill>
+                <a:latin typeface="Aptos"/>
+              </a:rPr>
+              <a:t>Every important state change becomes an audit event. Events are hash-linked through prevHash → recordHash.</a:t>
+            </a:r>
+          </a:p>
+        </p:txBody>
+      </p:sp>
+      <p:sp>
+        <p:nvSpPr>
+          <p:cNvPr id="43" name="Rounded Rectangle 42"/>
+          <p:cNvSpPr/>
+          <p:nvPr/>
+        </p:nvSpPr>
+        <p:spPr>
+          <a:xfrm>
+            <a:off x="4370832" y="4187952"/>
+            <a:ext cx="3566160" cy="1417320"/>
+          </a:xfrm>
+          <a:prstGeom prst="roundRect">
+            <a:avLst/>
+          </a:prstGeom>
+          <a:solidFill>
+            <a:srgbClr val="16223B"/>
+          </a:solidFill>
+          <a:ln>
+            <a:solidFill>
+              <a:srgbClr val="2A3953"/>
+            </a:solidFill>
+          </a:ln>
+        </p:spPr>
+        <p:style>
+          <a:lnRef idx="1">
+            <a:schemeClr val="accent1"/>
+          </a:lnRef>
+          <a:fillRef idx="3">
+            <a:schemeClr val="accent1"/>
+          </a:fillRef>
+          <a:effectRef idx="2">
+            <a:schemeClr val="accent1"/>
+          </a:effectRef>
+          <a:fontRef idx="minor">
+            <a:schemeClr val="lt1"/>
+          </a:fontRef>
+        </p:style>
+        <p:txBody>
+          <a:bodyPr rtlCol="0" anchor="ctr"/>
+          <a:lstStyle/>
+          <a:p>
+            <a:pPr algn="ctr"/>
+          </a:p>
+        </p:txBody>
+      </p:sp>
+      <p:sp>
+        <p:nvSpPr>
+          <p:cNvPr id="44" name="Rectangle 43"/>
+          <p:cNvSpPr/>
+          <p:nvPr/>
+        </p:nvSpPr>
+        <p:spPr>
+          <a:xfrm>
+            <a:off x="4370832" y="4187952"/>
+            <a:ext cx="54864" cy="1417320"/>
+          </a:xfrm>
+          <a:prstGeom prst="rect">
+            <a:avLst/>
+          </a:prstGeom>
+          <a:solidFill>
+            <a:srgbClr val="A78BFA"/>
+          </a:solidFill>
+          <a:ln>
+            <a:noFill/>
+          </a:ln>
+        </p:spPr>
+        <p:style>
+          <a:lnRef idx="1">
+            <a:schemeClr val="accent1"/>
+          </a:lnRef>
+          <a:fillRef idx="3">
+            <a:schemeClr val="accent1"/>
+          </a:fillRef>
+          <a:effectRef idx="2">
+            <a:schemeClr val="accent1"/>
+          </a:effectRef>
+          <a:fontRef idx="minor">
+            <a:schemeClr val="lt1"/>
+          </a:fontRef>
+        </p:style>
+        <p:txBody>
+          <a:bodyPr rtlCol="0" anchor="ctr"/>
+          <a:lstStyle/>
+          <a:p>
+            <a:pPr algn="ctr"/>
+          </a:p>
+        </p:txBody>
+      </p:sp>
+      <p:sp>
+        <p:nvSpPr>
+          <p:cNvPr id="45" name="TextBox 44"/>
+          <p:cNvSpPr txBox="1"/>
+          <p:nvPr/>
+        </p:nvSpPr>
+        <p:spPr>
+          <a:xfrm>
+            <a:off x="4535424" y="4297680"/>
+            <a:ext cx="3291840" cy="320040"/>
+          </a:xfrm>
+          <a:prstGeom prst="rect">
+            <a:avLst/>
+          </a:prstGeom>
+          <a:noFill/>
+        </p:spPr>
+        <p:txBody>
+          <a:bodyPr wrap="none" anchor="ctr">
+            <a:spAutoFit/>
+          </a:bodyPr>
+          <a:lstStyle/>
+          <a:p>
+            <a:pPr algn="l"/>
+            <a:r>
+              <a:rPr sz="1200" b="1">
+                <a:solidFill>
+                  <a:srgbClr val="F5F7FA"/>
+                </a:solidFill>
+                <a:latin typeface="Aptos"/>
+              </a:rPr>
+              <a:t>RECONCILIATION</a:t>
+            </a:r>
+          </a:p>
+        </p:txBody>
+      </p:sp>
+      <p:sp>
+        <p:nvSpPr>
+          <p:cNvPr id="46" name="TextBox 45"/>
+          <p:cNvSpPr txBox="1"/>
+          <p:nvPr/>
+        </p:nvSpPr>
+        <p:spPr>
+          <a:xfrm>
+            <a:off x="4535424" y="4663440"/>
+            <a:ext cx="3273552" cy="850392"/>
+          </a:xfrm>
+          <a:prstGeom prst="rect">
+            <a:avLst/>
+          </a:prstGeom>
+          <a:noFill/>
+        </p:spPr>
+        <p:txBody>
+          <a:bodyPr wrap="none" anchor="t">
+            <a:spAutoFit/>
+          </a:bodyPr>
+          <a:lstStyle/>
+          <a:p>
+            <a:pPr algn="l"/>
+            <a:r>
+              <a:rPr sz="1000" b="0">
+                <a:solidFill>
+                  <a:srgbClr val="AAB6C9"/>
+                </a:solidFill>
+                <a:latin typeface="Aptos"/>
+              </a:rPr>
+              <a:t>Loan tape vs servicer update are shown side-by-side. The Reviewer decides which value becomes canonical.</a:t>
+            </a:r>
+          </a:p>
+        </p:txBody>
+      </p:sp>
+      <p:sp>
+        <p:nvSpPr>
+          <p:cNvPr id="47" name="Rounded Rectangle 46"/>
+          <p:cNvSpPr/>
+          <p:nvPr/>
+        </p:nvSpPr>
+        <p:spPr>
+          <a:xfrm>
+            <a:off x="8174736" y="4187952"/>
+            <a:ext cx="3566160" cy="1417320"/>
+          </a:xfrm>
+          <a:prstGeom prst="roundRect">
+            <a:avLst/>
+          </a:prstGeom>
+          <a:solidFill>
+            <a:srgbClr val="16223B"/>
+          </a:solidFill>
+          <a:ln>
+            <a:solidFill>
+              <a:srgbClr val="2A3953"/>
+            </a:solidFill>
+          </a:ln>
+        </p:spPr>
+        <p:style>
+          <a:lnRef idx="1">
+            <a:schemeClr val="accent1"/>
+          </a:lnRef>
+          <a:fillRef idx="3">
+            <a:schemeClr val="accent1"/>
+          </a:fillRef>
+          <a:effectRef idx="2">
+            <a:schemeClr val="accent1"/>
+          </a:effectRef>
+          <a:fontRef idx="minor">
+            <a:schemeClr val="lt1"/>
+          </a:fontRef>
+        </p:style>
+        <p:txBody>
+          <a:bodyPr rtlCol="0" anchor="ctr"/>
+          <a:lstStyle/>
+          <a:p>
+            <a:pPr algn="ctr"/>
+          </a:p>
+        </p:txBody>
+      </p:sp>
+      <p:sp>
+        <p:nvSpPr>
+          <p:cNvPr id="48" name="Rectangle 47"/>
+          <p:cNvSpPr/>
+          <p:nvPr/>
+        </p:nvSpPr>
+        <p:spPr>
+          <a:xfrm>
+            <a:off x="8174736" y="4187952"/>
+            <a:ext cx="54864" cy="1417320"/>
+          </a:xfrm>
+          <a:prstGeom prst="rect">
+            <a:avLst/>
+          </a:prstGeom>
+          <a:solidFill>
+            <a:srgbClr val="34D399"/>
+          </a:solidFill>
+          <a:ln>
+            <a:noFill/>
+          </a:ln>
+        </p:spPr>
+        <p:style>
+          <a:lnRef idx="1">
+            <a:schemeClr val="accent1"/>
+          </a:lnRef>
+          <a:fillRef idx="3">
+            <a:schemeClr val="accent1"/>
+          </a:fillRef>
+          <a:effectRef idx="2">
+            <a:schemeClr val="accent1"/>
+          </a:effectRef>
+          <a:fontRef idx="minor">
+            <a:schemeClr val="lt1"/>
+          </a:fontRef>
+        </p:style>
+        <p:txBody>
+          <a:bodyPr rtlCol="0" anchor="ctr"/>
+          <a:lstStyle/>
+          <a:p>
+            <a:pPr algn="ctr"/>
+          </a:p>
+        </p:txBody>
+      </p:sp>
+      <p:sp>
+        <p:nvSpPr>
+          <p:cNvPr id="49" name="TextBox 48"/>
+          <p:cNvSpPr txBox="1"/>
+          <p:nvPr/>
+        </p:nvSpPr>
+        <p:spPr>
+          <a:xfrm>
+            <a:off x="8339327" y="4297680"/>
+            <a:ext cx="3291840" cy="320040"/>
+          </a:xfrm>
+          <a:prstGeom prst="rect">
+            <a:avLst/>
+          </a:prstGeom>
+          <a:noFill/>
+        </p:spPr>
+        <p:txBody>
+          <a:bodyPr wrap="none" anchor="ctr">
+            <a:spAutoFit/>
+          </a:bodyPr>
+          <a:lstStyle/>
+          <a:p>
+            <a:pPr algn="l"/>
+            <a:r>
+              <a:rPr sz="1200" b="1">
+                <a:solidFill>
+                  <a:srgbClr val="F5F7FA"/>
+                </a:solidFill>
+                <a:latin typeface="Aptos"/>
+              </a:rPr>
+              <a:t>DATA CONSUMER</a:t>
+            </a:r>
+          </a:p>
+        </p:txBody>
+      </p:sp>
+      <p:sp>
+        <p:nvSpPr>
+          <p:cNvPr id="50" name="TextBox 49"/>
+          <p:cNvSpPr txBox="1"/>
+          <p:nvPr/>
+        </p:nvSpPr>
+        <p:spPr>
+          <a:xfrm>
+            <a:off x="8339327" y="4663440"/>
+            <a:ext cx="3273552" cy="850392"/>
+          </a:xfrm>
+          <a:prstGeom prst="rect">
+            <a:avLst/>
+          </a:prstGeom>
+          <a:noFill/>
+        </p:spPr>
+        <p:txBody>
+          <a:bodyPr wrap="none" anchor="t">
+            <a:spAutoFit/>
+          </a:bodyPr>
+          <a:lstStyle/>
+          <a:p>
+            <a:pPr algn="l"/>
+            <a:r>
+              <a:rPr sz="1000" b="0">
+                <a:solidFill>
+                  <a:srgbClr val="AAB6C9"/>
+                </a:solidFill>
+                <a:latin typeface="Aptos"/>
+              </a:rPr>
+              <a:t>Verified records, Trust Score, verification history, audit trail and export — the final trusted hand-off.</a:t>
+            </a:r>
+          </a:p>
+        </p:txBody>
+      </p:sp>
+    </p:spTree>
+  </p:cSld>
+  <p:clrMapOvr>
+    <a:masterClrMapping/>
+  </p:clrMapOvr>
+</p:sld>
+</file>
+
+<file path=ppt/slides/slide15.xml><?xml version="1.0" encoding="utf-8"?>
+<p:sld xmlns:a="http://schemas.openxmlformats.org/drawingml/2006/main" xmlns:p="http://schemas.openxmlformats.org/presentationml/2006/main" xmlns:r="http://schemas.openxmlformats.org/officeDocument/2006/relationships">
+  <p:cSld>
+    <p:bg>
+      <p:bgPr>
+        <a:solidFill>
+          <a:srgbClr val="0A1222"/>
+        </a:solidFill>
+        <a:effectLst/>
+      </p:bgPr>
+    </p:bg>
+    <p:spTree>
+      <p:nvGrpSpPr>
+        <p:cNvPr id="1" name=""/>
+        <p:cNvGrpSpPr/>
+        <p:nvPr/>
+      </p:nvGrpSpPr>
+      <p:grpSpPr/>
+      <p:sp>
+        <p:nvSpPr>
+          <p:cNvPr id="2" name="Rectangle 1"/>
+          <p:cNvSpPr/>
+          <p:nvPr/>
+        </p:nvSpPr>
+        <p:spPr>
+          <a:xfrm>
+            <a:off x="0" y="0"/>
+            <a:ext cx="164592" cy="6858000"/>
+          </a:xfrm>
+          <a:prstGeom prst="rect">
+            <a:avLst/>
+          </a:prstGeom>
+          <a:solidFill>
+            <a:srgbClr val="22D3EE"/>
+          </a:solidFill>
+          <a:ln>
+            <a:noFill/>
+          </a:ln>
+        </p:spPr>
+        <p:style>
+          <a:lnRef idx="1">
+            <a:schemeClr val="accent1"/>
+          </a:lnRef>
+          <a:fillRef idx="3">
+            <a:schemeClr val="accent1"/>
+          </a:fillRef>
+          <a:effectRef idx="2">
+            <a:schemeClr val="accent1"/>
+          </a:effectRef>
+          <a:fontRef idx="minor">
+            <a:schemeClr val="lt1"/>
+          </a:fontRef>
+        </p:style>
+        <p:txBody>
+          <a:bodyPr rtlCol="0" anchor="ctr"/>
+          <a:lstStyle/>
+          <a:p>
+            <a:pPr algn="ctr"/>
+          </a:p>
+        </p:txBody>
+      </p:sp>
+      <p:sp>
+        <p:nvSpPr>
+          <p:cNvPr id="3" name="TextBox 2"/>
+          <p:cNvSpPr txBox="1"/>
+          <p:nvPr/>
+        </p:nvSpPr>
+        <p:spPr>
+          <a:xfrm>
+            <a:off x="320040" y="6537960"/>
+            <a:ext cx="6400800" cy="274320"/>
+          </a:xfrm>
+          <a:prstGeom prst="rect">
+            <a:avLst/>
+          </a:prstGeom>
+          <a:noFill/>
+        </p:spPr>
+        <p:txBody>
+          <a:bodyPr wrap="none" anchor="ctr">
+            <a:spAutoFit/>
+          </a:bodyPr>
+          <a:lstStyle/>
+          <a:p>
+            <a:pPr algn="l"/>
+            <a:r>
+              <a:rPr sz="800" b="0">
+                <a:solidFill>
+                  <a:srgbClr val="AAB6C9"/>
+                </a:solidFill>
+                <a:latin typeface="Aptos"/>
+              </a:rPr>
+              <a:t>Intain Verify   ·   Loan Data Verification Copilot</a:t>
+            </a:r>
+          </a:p>
+        </p:txBody>
+      </p:sp>
+      <p:sp>
+        <p:nvSpPr>
+          <p:cNvPr id="4" name="TextBox 3"/>
+          <p:cNvSpPr txBox="1"/>
+          <p:nvPr/>
+        </p:nvSpPr>
+        <p:spPr>
+          <a:xfrm>
+            <a:off x="457200" y="320040"/>
+            <a:ext cx="11247120" cy="640080"/>
+          </a:xfrm>
+          <a:prstGeom prst="rect">
+            <a:avLst/>
+          </a:prstGeom>
+          <a:noFill/>
+        </p:spPr>
+        <p:txBody>
+          <a:bodyPr wrap="none" anchor="ctr">
+            <a:spAutoFit/>
+          </a:bodyPr>
+          <a:lstStyle/>
+          <a:p>
+            <a:pPr algn="l"/>
+            <a:r>
+              <a:rPr sz="2700" b="1">
+                <a:solidFill>
+                  <a:srgbClr val="F5F7FA"/>
+                </a:solidFill>
+                <a:latin typeface="Aptos"/>
+              </a:rPr>
+              <a:t>Backend architecture &amp; data flow</a:t>
+            </a:r>
+          </a:p>
+        </p:txBody>
+      </p:sp>
+      <p:sp>
+        <p:nvSpPr>
+          <p:cNvPr id="5" name="TextBox 4"/>
+          <p:cNvSpPr txBox="1"/>
+          <p:nvPr/>
+        </p:nvSpPr>
+        <p:spPr>
+          <a:xfrm>
+            <a:off x="457200" y="1051560"/>
+            <a:ext cx="11247120" cy="320040"/>
+          </a:xfrm>
+          <a:prstGeom prst="rect">
+            <a:avLst/>
+          </a:prstGeom>
+          <a:noFill/>
+        </p:spPr>
+        <p:txBody>
+          <a:bodyPr wrap="none" anchor="ctr">
+            <a:spAutoFit/>
+          </a:bodyPr>
+          <a:lstStyle/>
+          <a:p>
+            <a:pPr algn="l"/>
+            <a:r>
+              <a:rPr sz="1200" b="0">
+                <a:solidFill>
+                  <a:srgbClr val="AAB6C9"/>
+                </a:solidFill>
+                <a:latin typeface="Aptos"/>
+              </a:rPr>
+              <a:t>Node.js + Express REST API · modular services · MongoDB persistence</a:t>
+            </a:r>
+          </a:p>
+        </p:txBody>
+      </p:sp>
+      <p:sp>
+        <p:nvSpPr>
+          <p:cNvPr id="6" name="Rectangle 5"/>
+          <p:cNvSpPr/>
+          <p:nvPr/>
+        </p:nvSpPr>
+        <p:spPr>
+          <a:xfrm>
+            <a:off x="457200" y="1389888"/>
+            <a:ext cx="1005840" cy="54864"/>
+          </a:xfrm>
+          <a:prstGeom prst="rect">
+            <a:avLst/>
+          </a:prstGeom>
+          <a:solidFill>
+            <a:srgbClr val="22D3EE"/>
+          </a:solidFill>
+          <a:ln>
+            <a:noFill/>
+          </a:ln>
+        </p:spPr>
+        <p:style>
+          <a:lnRef idx="1">
+            <a:schemeClr val="accent1"/>
+          </a:lnRef>
+          <a:fillRef idx="3">
+            <a:schemeClr val="accent1"/>
+          </a:fillRef>
+          <a:effectRef idx="2">
+            <a:schemeClr val="accent1"/>
+          </a:effectRef>
+          <a:fontRef idx="minor">
+            <a:schemeClr val="lt1"/>
+          </a:fontRef>
+        </p:style>
+        <p:txBody>
+          <a:bodyPr rtlCol="0" anchor="ctr"/>
+          <a:lstStyle/>
+          <a:p>
+            <a:pPr algn="ctr"/>
+          </a:p>
+        </p:txBody>
+      </p:sp>
+      <p:sp>
+        <p:nvSpPr>
+          <p:cNvPr id="7" name="Rounded Rectangle 6"/>
+          <p:cNvSpPr/>
+          <p:nvPr/>
+        </p:nvSpPr>
+        <p:spPr>
+          <a:xfrm>
+            <a:off x="566928" y="1627632"/>
+            <a:ext cx="1417320" cy="658368"/>
+          </a:xfrm>
+          <a:prstGeom prst="roundRect">
+            <a:avLst/>
+          </a:prstGeom>
+          <a:solidFill>
+            <a:srgbClr val="16223B"/>
+          </a:solidFill>
+          <a:ln>
+            <a:solidFill>
+              <a:srgbClr val="22D3EE"/>
+            </a:solidFill>
+          </a:ln>
+        </p:spPr>
+        <p:style>
+          <a:lnRef idx="1">
+            <a:schemeClr val="accent1"/>
+          </a:lnRef>
+          <a:fillRef idx="3">
+            <a:schemeClr val="accent1"/>
+          </a:fillRef>
+          <a:effectRef idx="2">
+            <a:schemeClr val="accent1"/>
+          </a:effectRef>
+          <a:fontRef idx="minor">
+            <a:schemeClr val="lt1"/>
+          </a:fontRef>
+        </p:style>
+        <p:txBody>
+          <a:bodyPr rtlCol="0" anchor="ctr"/>
+          <a:lstStyle/>
+          <a:p>
+            <a:pPr algn="ctr"/>
+          </a:p>
+        </p:txBody>
+      </p:sp>
+      <p:sp>
+        <p:nvSpPr>
+          <p:cNvPr id="8" name="TextBox 7"/>
+          <p:cNvSpPr txBox="1"/>
+          <p:nvPr/>
+        </p:nvSpPr>
+        <p:spPr>
+          <a:xfrm>
+            <a:off x="640080" y="1655064"/>
+            <a:ext cx="1271016" cy="603503"/>
+          </a:xfrm>
+          <a:prstGeom prst="rect">
+            <a:avLst/>
+          </a:prstGeom>
+          <a:noFill/>
+        </p:spPr>
+        <p:txBody>
+          <a:bodyPr wrap="none" anchor="ctr">
+            <a:spAutoFit/>
+          </a:bodyPr>
+          <a:lstStyle/>
+          <a:p>
+            <a:pPr algn="ctr"/>
+            <a:r>
+              <a:rPr sz="1100" b="1">
+                <a:solidFill>
+                  <a:srgbClr val="F5F7FA"/>
+                </a:solidFill>
+                <a:latin typeface="Aptos"/>
+              </a:rPr>
+              <a:t>HTTP Request</a:t>
+            </a:r>
+          </a:p>
+        </p:txBody>
+      </p:sp>
+      <p:sp>
+        <p:nvSpPr>
+          <p:cNvPr id="9" name="Rounded Rectangle 8"/>
+          <p:cNvSpPr/>
+          <p:nvPr/>
+        </p:nvSpPr>
+        <p:spPr>
+          <a:xfrm>
+            <a:off x="2212848" y="1627632"/>
+            <a:ext cx="1828800" cy="658368"/>
+          </a:xfrm>
+          <a:prstGeom prst="roundRect">
+            <a:avLst/>
+          </a:prstGeom>
+          <a:solidFill>
+            <a:srgbClr val="16223B"/>
+          </a:solidFill>
+          <a:ln>
+            <a:solidFill>
+              <a:srgbClr val="A78BFA"/>
+            </a:solidFill>
+          </a:ln>
+        </p:spPr>
+        <p:style>
+          <a:lnRef idx="1">
+            <a:schemeClr val="accent1"/>
+          </a:lnRef>
+          <a:fillRef idx="3">
+            <a:schemeClr val="accent1"/>
+          </a:fillRef>
+          <a:effectRef idx="2">
+            <a:schemeClr val="accent1"/>
+          </a:effectRef>
+          <a:fontRef idx="minor">
+            <a:schemeClr val="lt1"/>
+          </a:fontRef>
+        </p:style>
+        <p:txBody>
+          <a:bodyPr rtlCol="0" anchor="ctr"/>
+          <a:lstStyle/>
+          <a:p>
+            <a:pPr algn="ctr"/>
+          </a:p>
+        </p:txBody>
+      </p:sp>
+      <p:sp>
+        <p:nvSpPr>
+          <p:cNvPr id="10" name="TextBox 9"/>
+          <p:cNvSpPr txBox="1"/>
+          <p:nvPr/>
+        </p:nvSpPr>
+        <p:spPr>
+          <a:xfrm>
+            <a:off x="2286000" y="1655064"/>
+            <a:ext cx="1682496" cy="603503"/>
+          </a:xfrm>
+          <a:prstGeom prst="rect">
+            <a:avLst/>
+          </a:prstGeom>
+          <a:noFill/>
+        </p:spPr>
+        <p:txBody>
+          <a:bodyPr wrap="none" anchor="ctr">
+            <a:spAutoFit/>
+          </a:bodyPr>
+          <a:lstStyle/>
+          <a:p>
+            <a:pPr algn="ctr"/>
+            <a:r>
+              <a:rPr sz="1000" b="1">
+                <a:solidFill>
+                  <a:srgbClr val="F5F7FA"/>
+                </a:solidFill>
+                <a:latin typeface="Aptos"/>
+              </a:rPr>
+              <a:t>Auth + RBAC
+middleware/auth.js</a:t>
+            </a:r>
+          </a:p>
+        </p:txBody>
+      </p:sp>
+      <p:sp>
+        <p:nvSpPr>
+          <p:cNvPr id="11" name="Rounded Rectangle 10"/>
+          <p:cNvSpPr/>
+          <p:nvPr/>
+        </p:nvSpPr>
+        <p:spPr>
+          <a:xfrm>
+            <a:off x="4297680" y="1627632"/>
+            <a:ext cx="1508760" cy="658368"/>
+          </a:xfrm>
+          <a:prstGeom prst="roundRect">
+            <a:avLst/>
+          </a:prstGeom>
+          <a:solidFill>
+            <a:srgbClr val="16223B"/>
+          </a:solidFill>
+          <a:ln>
+            <a:solidFill>
+              <a:srgbClr val="22D3EE"/>
+            </a:solidFill>
+          </a:ln>
+        </p:spPr>
+        <p:style>
+          <a:lnRef idx="1">
+            <a:schemeClr val="accent1"/>
+          </a:lnRef>
+          <a:fillRef idx="3">
+            <a:schemeClr val="accent1"/>
+          </a:fillRef>
+          <a:effectRef idx="2">
+            <a:schemeClr val="accent1"/>
+          </a:effectRef>
+          <a:fontRef idx="minor">
+            <a:schemeClr val="lt1"/>
+          </a:fontRef>
+        </p:style>
+        <p:txBody>
+          <a:bodyPr rtlCol="0" anchor="ctr"/>
+          <a:lstStyle/>
+          <a:p>
+            <a:pPr algn="ctr"/>
+          </a:p>
+        </p:txBody>
+      </p:sp>
+      <p:sp>
+        <p:nvSpPr>
+          <p:cNvPr id="12" name="TextBox 11"/>
+          <p:cNvSpPr txBox="1"/>
+          <p:nvPr/>
+        </p:nvSpPr>
+        <p:spPr>
+          <a:xfrm>
+            <a:off x="4370832" y="1655064"/>
+            <a:ext cx="1362456" cy="603503"/>
+          </a:xfrm>
+          <a:prstGeom prst="rect">
+            <a:avLst/>
+          </a:prstGeom>
+          <a:noFill/>
+        </p:spPr>
+        <p:txBody>
+          <a:bodyPr wrap="none" anchor="ctr">
+            <a:spAutoFit/>
+          </a:bodyPr>
+          <a:lstStyle/>
+          <a:p>
+            <a:pPr algn="ctr"/>
+            <a:r>
+              <a:rPr sz="1100" b="1">
+                <a:solidFill>
+                  <a:srgbClr val="F5F7FA"/>
+                </a:solidFill>
+                <a:latin typeface="Aptos"/>
+              </a:rPr>
+              <a:t>Routes
+/api/*</a:t>
+            </a:r>
+          </a:p>
+        </p:txBody>
+      </p:sp>
+      <p:sp>
+        <p:nvSpPr>
+          <p:cNvPr id="13" name="Rounded Rectangle 12"/>
+          <p:cNvSpPr/>
+          <p:nvPr/>
+        </p:nvSpPr>
+        <p:spPr>
+          <a:xfrm>
+            <a:off x="6071616" y="1627632"/>
+            <a:ext cx="1737360" cy="658368"/>
+          </a:xfrm>
+          <a:prstGeom prst="roundRect">
+            <a:avLst/>
+          </a:prstGeom>
+          <a:solidFill>
+            <a:srgbClr val="16223B"/>
+          </a:solidFill>
+          <a:ln>
+            <a:solidFill>
+              <a:srgbClr val="A78BFA"/>
+            </a:solidFill>
+          </a:ln>
+        </p:spPr>
+        <p:style>
+          <a:lnRef idx="1">
+            <a:schemeClr val="accent1"/>
+          </a:lnRef>
+          <a:fillRef idx="3">
+            <a:schemeClr val="accent1"/>
+          </a:fillRef>
+          <a:effectRef idx="2">
+            <a:schemeClr val="accent1"/>
+          </a:effectRef>
+          <a:fontRef idx="minor">
+            <a:schemeClr val="lt1"/>
+          </a:fontRef>
+        </p:style>
+        <p:txBody>
+          <a:bodyPr rtlCol="0" anchor="ctr"/>
+          <a:lstStyle/>
+          <a:p>
+            <a:pPr algn="ctr"/>
+          </a:p>
+        </p:txBody>
+      </p:sp>
+      <p:sp>
+        <p:nvSpPr>
+          <p:cNvPr id="14" name="TextBox 13"/>
+          <p:cNvSpPr txBox="1"/>
+          <p:nvPr/>
+        </p:nvSpPr>
+        <p:spPr>
+          <a:xfrm>
+            <a:off x="6144768" y="1655064"/>
+            <a:ext cx="1591056" cy="603503"/>
+          </a:xfrm>
+          <a:prstGeom prst="rect">
+            <a:avLst/>
+          </a:prstGeom>
+          <a:noFill/>
+        </p:spPr>
+        <p:txBody>
+          <a:bodyPr wrap="none" anchor="ctr">
+            <a:spAutoFit/>
+          </a:bodyPr>
+          <a:lstStyle/>
+          <a:p>
+            <a:pPr algn="ctr"/>
+            <a:r>
+              <a:rPr sz="1100" b="1">
+                <a:solidFill>
+                  <a:srgbClr val="F5F7FA"/>
+                </a:solidFill>
+                <a:latin typeface="Aptos"/>
+              </a:rPr>
+              <a:t>Services
+business logic</a:t>
+            </a:r>
+          </a:p>
+        </p:txBody>
+      </p:sp>
+      <p:sp>
+        <p:nvSpPr>
+          <p:cNvPr id="15" name="Rounded Rectangle 14"/>
+          <p:cNvSpPr/>
+          <p:nvPr/>
+        </p:nvSpPr>
+        <p:spPr>
+          <a:xfrm>
+            <a:off x="8138160" y="1627632"/>
+            <a:ext cx="1508760" cy="658368"/>
+          </a:xfrm>
+          <a:prstGeom prst="roundRect">
+            <a:avLst/>
+          </a:prstGeom>
+          <a:solidFill>
+            <a:srgbClr val="16223B"/>
+          </a:solidFill>
+          <a:ln>
+            <a:solidFill>
+              <a:srgbClr val="34D399"/>
+            </a:solidFill>
+          </a:ln>
+        </p:spPr>
+        <p:style>
+          <a:lnRef idx="1">
+            <a:schemeClr val="accent1"/>
+          </a:lnRef>
+          <a:fillRef idx="3">
+            <a:schemeClr val="accent1"/>
+          </a:fillRef>
+          <a:effectRef idx="2">
+            <a:schemeClr val="accent1"/>
+          </a:effectRef>
+          <a:fontRef idx="minor">
+            <a:schemeClr val="lt1"/>
+          </a:fontRef>
+        </p:style>
+        <p:txBody>
+          <a:bodyPr rtlCol="0" anchor="ctr"/>
+          <a:lstStyle/>
+          <a:p>
+            <a:pPr algn="ctr"/>
+          </a:p>
+        </p:txBody>
+      </p:sp>
+      <p:sp>
+        <p:nvSpPr>
+          <p:cNvPr id="16" name="TextBox 15"/>
+          <p:cNvSpPr txBox="1"/>
+          <p:nvPr/>
+        </p:nvSpPr>
+        <p:spPr>
+          <a:xfrm>
+            <a:off x="8211312" y="1655064"/>
+            <a:ext cx="1362456" cy="603503"/>
+          </a:xfrm>
+          <a:prstGeom prst="rect">
+            <a:avLst/>
+          </a:prstGeom>
+          <a:noFill/>
+        </p:spPr>
+        <p:txBody>
+          <a:bodyPr wrap="none" anchor="ctr">
+            <a:spAutoFit/>
+          </a:bodyPr>
+          <a:lstStyle/>
+          <a:p>
+            <a:pPr algn="ctr"/>
+            <a:r>
+              <a:rPr sz="1100" b="1">
+                <a:solidFill>
+                  <a:srgbClr val="F5F7FA"/>
+                </a:solidFill>
+                <a:latin typeface="Aptos"/>
+              </a:rPr>
+              <a:t>Models
+Mongoose</a:t>
+            </a:r>
+          </a:p>
+        </p:txBody>
+      </p:sp>
+      <p:sp>
+        <p:nvSpPr>
+          <p:cNvPr id="17" name="Rounded Rectangle 16"/>
+          <p:cNvSpPr/>
+          <p:nvPr/>
+        </p:nvSpPr>
+        <p:spPr>
+          <a:xfrm>
+            <a:off x="9912096" y="1627632"/>
+            <a:ext cx="1508760" cy="658368"/>
+          </a:xfrm>
+          <a:prstGeom prst="roundRect">
+            <a:avLst/>
+          </a:prstGeom>
+          <a:solidFill>
+            <a:srgbClr val="16223B"/>
+          </a:solidFill>
+          <a:ln>
+            <a:solidFill>
+              <a:srgbClr val="34D399"/>
+            </a:solidFill>
+          </a:ln>
+        </p:spPr>
+        <p:style>
+          <a:lnRef idx="1">
+            <a:schemeClr val="accent1"/>
+          </a:lnRef>
+          <a:fillRef idx="3">
+            <a:schemeClr val="accent1"/>
+          </a:fillRef>
+          <a:effectRef idx="2">
+            <a:schemeClr val="accent1"/>
+          </a:effectRef>
+          <a:fontRef idx="minor">
+            <a:schemeClr val="lt1"/>
+          </a:fontRef>
+        </p:style>
+        <p:txBody>
+          <a:bodyPr rtlCol="0" anchor="ctr"/>
+          <a:lstStyle/>
+          <a:p>
+            <a:pPr algn="ctr"/>
+          </a:p>
+        </p:txBody>
+      </p:sp>
+      <p:sp>
+        <p:nvSpPr>
+          <p:cNvPr id="18" name="TextBox 17"/>
+          <p:cNvSpPr txBox="1"/>
+          <p:nvPr/>
+        </p:nvSpPr>
+        <p:spPr>
+          <a:xfrm>
+            <a:off x="9985248" y="1655064"/>
+            <a:ext cx="1362456" cy="603503"/>
+          </a:xfrm>
+          <a:prstGeom prst="rect">
+            <a:avLst/>
+          </a:prstGeom>
+          <a:noFill/>
+        </p:spPr>
+        <p:txBody>
+          <a:bodyPr wrap="none" anchor="ctr">
+            <a:spAutoFit/>
+          </a:bodyPr>
+          <a:lstStyle/>
+          <a:p>
+            <a:pPr algn="ctr"/>
+            <a:r>
+              <a:rPr sz="1100" b="1">
+                <a:solidFill>
+                  <a:srgbClr val="F5F7FA"/>
+                </a:solidFill>
+                <a:latin typeface="Aptos"/>
+              </a:rPr>
+              <a:t>MongoDB</a:t>
+            </a:r>
+          </a:p>
+        </p:txBody>
+      </p:sp>
+      <p:cxnSp>
+        <p:nvCxnSpPr>
+          <p:cNvPr id="19" name="Connector 18"/>
+          <p:cNvCxnSpPr/>
+          <p:nvPr/>
+        </p:nvCxnSpPr>
+        <p:spPr>
+          <a:xfrm>
+            <a:off x="1984248" y="1956816"/>
+            <a:ext cx="228600" cy="0"/>
+          </a:xfrm>
+          <a:prstGeom prst="line">
+            <a:avLst/>
+          </a:prstGeom>
+          <a:ln w="20320">
+            <a:solidFill>
+              <a:srgbClr val="AAB6C9"/>
+            </a:solidFill>
+          </a:ln>
+        </p:spPr>
+        <p:style>
+          <a:lnRef idx="2">
+            <a:schemeClr val="accent1"/>
+          </a:lnRef>
+          <a:fillRef idx="0">
+            <a:schemeClr val="accent1"/>
+          </a:fillRef>
+          <a:effectRef idx="1">
+            <a:schemeClr val="accent1"/>
+          </a:effectRef>
+          <a:fontRef idx="minor">
+            <a:schemeClr val="tx1"/>
+          </a:fontRef>
+        </p:style>
+      </p:cxnSp>
+      <p:cxnSp>
+        <p:nvCxnSpPr>
+          <p:cNvPr id="20" name="Connector 19"/>
+          <p:cNvCxnSpPr/>
+          <p:nvPr/>
+        </p:nvCxnSpPr>
+        <p:spPr>
+          <a:xfrm>
+            <a:off x="4041648" y="1956816"/>
+            <a:ext cx="256032" cy="0"/>
+          </a:xfrm>
+          <a:prstGeom prst="line">
+            <a:avLst/>
+          </a:prstGeom>
+          <a:ln w="20320">
+            <a:solidFill>
+              <a:srgbClr val="AAB6C9"/>
+            </a:solidFill>
+          </a:ln>
+        </p:spPr>
+        <p:style>
+          <a:lnRef idx="2">
+            <a:schemeClr val="accent1"/>
+          </a:lnRef>
+          <a:fillRef idx="0">
+            <a:schemeClr val="accent1"/>
+          </a:fillRef>
+          <a:effectRef idx="1">
+            <a:schemeClr val="accent1"/>
+          </a:effectRef>
+          <a:fontRef idx="minor">
+            <a:schemeClr val="tx1"/>
+          </a:fontRef>
+        </p:style>
+      </p:cxnSp>
+      <p:cxnSp>
+        <p:nvCxnSpPr>
+          <p:cNvPr id="21" name="Connector 20"/>
+          <p:cNvCxnSpPr/>
+          <p:nvPr/>
+        </p:nvCxnSpPr>
+        <p:spPr>
+          <a:xfrm>
+            <a:off x="5806440" y="1956816"/>
+            <a:ext cx="265176" cy="0"/>
+          </a:xfrm>
+          <a:prstGeom prst="line">
+            <a:avLst/>
+          </a:prstGeom>
+          <a:ln w="20320">
+            <a:solidFill>
+              <a:srgbClr val="AAB6C9"/>
+            </a:solidFill>
+          </a:ln>
+        </p:spPr>
+        <p:style>
+          <a:lnRef idx="2">
+            <a:schemeClr val="accent1"/>
+          </a:lnRef>
+          <a:fillRef idx="0">
+            <a:schemeClr val="accent1"/>
+          </a:fillRef>
+          <a:effectRef idx="1">
+            <a:schemeClr val="accent1"/>
+          </a:effectRef>
+          <a:fontRef idx="minor">
+            <a:schemeClr val="tx1"/>
+          </a:fontRef>
+        </p:style>
+      </p:cxnSp>
+      <p:cxnSp>
+        <p:nvCxnSpPr>
+          <p:cNvPr id="22" name="Connector 21"/>
+          <p:cNvCxnSpPr/>
+          <p:nvPr/>
+        </p:nvCxnSpPr>
+        <p:spPr>
+          <a:xfrm>
+            <a:off x="7808975" y="1956816"/>
+            <a:ext cx="329185" cy="0"/>
+          </a:xfrm>
+          <a:prstGeom prst="line">
+            <a:avLst/>
+          </a:prstGeom>
+          <a:ln w="20320">
+            <a:solidFill>
+              <a:srgbClr val="AAB6C9"/>
+            </a:solidFill>
+          </a:ln>
+        </p:spPr>
+        <p:style>
+          <a:lnRef idx="2">
+            <a:schemeClr val="accent1"/>
+          </a:lnRef>
+          <a:fillRef idx="0">
+            <a:schemeClr val="accent1"/>
+          </a:fillRef>
+          <a:effectRef idx="1">
+            <a:schemeClr val="accent1"/>
+          </a:effectRef>
+          <a:fontRef idx="minor">
+            <a:schemeClr val="tx1"/>
+          </a:fontRef>
+        </p:style>
+      </p:cxnSp>
+      <p:cxnSp>
+        <p:nvCxnSpPr>
+          <p:cNvPr id="23" name="Connector 22"/>
+          <p:cNvCxnSpPr/>
+          <p:nvPr/>
+        </p:nvCxnSpPr>
+        <p:spPr>
+          <a:xfrm>
+            <a:off x="9646920" y="1956816"/>
+            <a:ext cx="265176" cy="0"/>
+          </a:xfrm>
+          <a:prstGeom prst="line">
+            <a:avLst/>
+          </a:prstGeom>
+          <a:ln w="20320">
+            <a:solidFill>
+              <a:srgbClr val="AAB6C9"/>
+            </a:solidFill>
+          </a:ln>
+        </p:spPr>
+        <p:style>
+          <a:lnRef idx="2">
+            <a:schemeClr val="accent1"/>
+          </a:lnRef>
+          <a:fillRef idx="0">
+            <a:schemeClr val="accent1"/>
+          </a:fillRef>
+          <a:effectRef idx="1">
+            <a:schemeClr val="accent1"/>
+          </a:effectRef>
+          <a:fontRef idx="minor">
+            <a:schemeClr val="tx1"/>
+          </a:fontRef>
+        </p:style>
+      </p:cxnSp>
+      <p:sp>
+        <p:nvSpPr>
+          <p:cNvPr id="24" name="Rounded Rectangle 23"/>
+          <p:cNvSpPr/>
+          <p:nvPr/>
+        </p:nvSpPr>
+        <p:spPr>
+          <a:xfrm>
+            <a:off x="566928" y="2697480"/>
+            <a:ext cx="2743200" cy="1417320"/>
+          </a:xfrm>
+          <a:prstGeom prst="roundRect">
+            <a:avLst/>
+          </a:prstGeom>
+          <a:solidFill>
+            <a:srgbClr val="16223B"/>
+          </a:solidFill>
+          <a:ln>
+            <a:solidFill>
+              <a:srgbClr val="2A3953"/>
+            </a:solidFill>
+          </a:ln>
+        </p:spPr>
+        <p:style>
+          <a:lnRef idx="1">
+            <a:schemeClr val="accent1"/>
+          </a:lnRef>
+          <a:fillRef idx="3">
+            <a:schemeClr val="accent1"/>
+          </a:fillRef>
+          <a:effectRef idx="2">
+            <a:schemeClr val="accent1"/>
+          </a:effectRef>
+          <a:fontRef idx="minor">
+            <a:schemeClr val="lt1"/>
+          </a:fontRef>
+        </p:style>
+        <p:txBody>
+          <a:bodyPr rtlCol="0" anchor="ctr"/>
+          <a:lstStyle/>
+          <a:p>
+            <a:pPr algn="ctr"/>
+          </a:p>
+        </p:txBody>
+      </p:sp>
+      <p:sp>
+        <p:nvSpPr>
+          <p:cNvPr id="25" name="Rectangle 24"/>
+          <p:cNvSpPr/>
+          <p:nvPr/>
+        </p:nvSpPr>
+        <p:spPr>
+          <a:xfrm>
+            <a:off x="566928" y="2697480"/>
+            <a:ext cx="54864" cy="1417320"/>
+          </a:xfrm>
+          <a:prstGeom prst="rect">
+            <a:avLst/>
+          </a:prstGeom>
+          <a:solidFill>
+            <a:srgbClr val="22D3EE"/>
+          </a:solidFill>
+          <a:ln>
+            <a:noFill/>
+          </a:ln>
+        </p:spPr>
+        <p:style>
+          <a:lnRef idx="1">
+            <a:schemeClr val="accent1"/>
+          </a:lnRef>
+          <a:fillRef idx="3">
+            <a:schemeClr val="accent1"/>
+          </a:fillRef>
+          <a:effectRef idx="2">
+            <a:schemeClr val="accent1"/>
+          </a:effectRef>
+          <a:fontRef idx="minor">
+            <a:schemeClr val="lt1"/>
+          </a:fontRef>
+        </p:style>
+        <p:txBody>
+          <a:bodyPr rtlCol="0" anchor="ctr"/>
+          <a:lstStyle/>
+          <a:p>
+            <a:pPr algn="ctr"/>
+          </a:p>
+        </p:txBody>
+      </p:sp>
+      <p:sp>
+        <p:nvSpPr>
+          <p:cNvPr id="26" name="TextBox 25"/>
+          <p:cNvSpPr txBox="1"/>
+          <p:nvPr/>
+        </p:nvSpPr>
+        <p:spPr>
+          <a:xfrm>
+            <a:off x="731520" y="2807208"/>
+            <a:ext cx="2468880" cy="320040"/>
+          </a:xfrm>
+          <a:prstGeom prst="rect">
+            <a:avLst/>
+          </a:prstGeom>
+          <a:noFill/>
+        </p:spPr>
+        <p:txBody>
+          <a:bodyPr wrap="none" anchor="ctr">
+            <a:spAutoFit/>
+          </a:bodyPr>
+          <a:lstStyle/>
+          <a:p>
+            <a:pPr algn="l"/>
+            <a:r>
+              <a:rPr sz="1200" b="1">
+                <a:solidFill>
+                  <a:srgbClr val="F5F7FA"/>
+                </a:solidFill>
+                <a:latin typeface="Aptos"/>
+              </a:rPr>
+              <a:t>INGESTION</a:t>
+            </a:r>
+          </a:p>
+        </p:txBody>
+      </p:sp>
+      <p:sp>
+        <p:nvSpPr>
+          <p:cNvPr id="27" name="TextBox 26"/>
+          <p:cNvSpPr txBox="1"/>
+          <p:nvPr/>
+        </p:nvSpPr>
+        <p:spPr>
+          <a:xfrm>
+            <a:off x="731520" y="3172968"/>
+            <a:ext cx="2450592" cy="850392"/>
+          </a:xfrm>
+          <a:prstGeom prst="rect">
+            <a:avLst/>
+          </a:prstGeom>
+          <a:noFill/>
+        </p:spPr>
+        <p:txBody>
+          <a:bodyPr wrap="none" anchor="t">
+            <a:spAutoFit/>
+          </a:bodyPr>
+          <a:lstStyle/>
+          <a:p>
+            <a:pPr algn="l"/>
+            <a:r>
+              <a:rPr sz="950" b="0">
+                <a:solidFill>
+                  <a:srgbClr val="AAB6C9"/>
+                </a:solidFill>
+                <a:latin typeface="Aptos"/>
+              </a:rPr>
+              <a:t>ingestService.js
+• parse CSVs
+• preserve rawText + fileHash
+• normalize loans
+• source lineage</a:t>
+            </a:r>
+          </a:p>
+        </p:txBody>
+      </p:sp>
+      <p:sp>
+        <p:nvSpPr>
+          <p:cNvPr id="28" name="Rounded Rectangle 27"/>
+          <p:cNvSpPr/>
+          <p:nvPr/>
+        </p:nvSpPr>
+        <p:spPr>
+          <a:xfrm>
+            <a:off x="3493008" y="2697480"/>
+            <a:ext cx="2743200" cy="1417320"/>
+          </a:xfrm>
+          <a:prstGeom prst="roundRect">
+            <a:avLst/>
+          </a:prstGeom>
+          <a:solidFill>
+            <a:srgbClr val="16223B"/>
+          </a:solidFill>
+          <a:ln>
+            <a:solidFill>
+              <a:srgbClr val="2A3953"/>
+            </a:solidFill>
+          </a:ln>
+        </p:spPr>
+        <p:style>
+          <a:lnRef idx="1">
+            <a:schemeClr val="accent1"/>
+          </a:lnRef>
+          <a:fillRef idx="3">
+            <a:schemeClr val="accent1"/>
+          </a:fillRef>
+          <a:effectRef idx="2">
+            <a:schemeClr val="accent1"/>
+          </a:effectRef>
+          <a:fontRef idx="minor">
+            <a:schemeClr val="lt1"/>
+          </a:fontRef>
+        </p:style>
+        <p:txBody>
+          <a:bodyPr rtlCol="0" anchor="ctr"/>
+          <a:lstStyle/>
+          <a:p>
+            <a:pPr algn="ctr"/>
+          </a:p>
+        </p:txBody>
+      </p:sp>
+      <p:sp>
+        <p:nvSpPr>
+          <p:cNvPr id="29" name="Rectangle 28"/>
+          <p:cNvSpPr/>
+          <p:nvPr/>
+        </p:nvSpPr>
+        <p:spPr>
+          <a:xfrm>
+            <a:off x="3493008" y="2697480"/>
+            <a:ext cx="54864" cy="1417320"/>
+          </a:xfrm>
+          <a:prstGeom prst="rect">
+            <a:avLst/>
+          </a:prstGeom>
+          <a:solidFill>
+            <a:srgbClr val="FBBF24"/>
+          </a:solidFill>
+          <a:ln>
+            <a:noFill/>
+          </a:ln>
+        </p:spPr>
+        <p:style>
+          <a:lnRef idx="1">
+            <a:schemeClr val="accent1"/>
+          </a:lnRef>
+          <a:fillRef idx="3">
+            <a:schemeClr val="accent1"/>
+          </a:fillRef>
+          <a:effectRef idx="2">
+            <a:schemeClr val="accent1"/>
+          </a:effectRef>
+          <a:fontRef idx="minor">
+            <a:schemeClr val="lt1"/>
+          </a:fontRef>
+        </p:style>
+        <p:txBody>
+          <a:bodyPr rtlCol="0" anchor="ctr"/>
+          <a:lstStyle/>
+          <a:p>
+            <a:pPr algn="ctr"/>
+          </a:p>
+        </p:txBody>
+      </p:sp>
+      <p:sp>
+        <p:nvSpPr>
+          <p:cNvPr id="30" name="TextBox 29"/>
+          <p:cNvSpPr txBox="1"/>
+          <p:nvPr/>
+        </p:nvSpPr>
+        <p:spPr>
+          <a:xfrm>
+            <a:off x="3657600" y="2807208"/>
+            <a:ext cx="2468880" cy="320040"/>
+          </a:xfrm>
+          <a:prstGeom prst="rect">
+            <a:avLst/>
+          </a:prstGeom>
+          <a:noFill/>
+        </p:spPr>
+        <p:txBody>
+          <a:bodyPr wrap="none" anchor="ctr">
+            <a:spAutoFit/>
+          </a:bodyPr>
+          <a:lstStyle/>
+          <a:p>
+            <a:pPr algn="l"/>
+            <a:r>
+              <a:rPr sz="1200" b="1">
+                <a:solidFill>
+                  <a:srgbClr val="F5F7FA"/>
+                </a:solidFill>
+                <a:latin typeface="Aptos"/>
+              </a:rPr>
+              <a:t>VALIDATION</a:t>
+            </a:r>
+          </a:p>
+        </p:txBody>
+      </p:sp>
+      <p:sp>
+        <p:nvSpPr>
+          <p:cNvPr id="31" name="TextBox 30"/>
+          <p:cNvSpPr txBox="1"/>
+          <p:nvPr/>
+        </p:nvSpPr>
+        <p:spPr>
+          <a:xfrm>
+            <a:off x="3657600" y="3172968"/>
+            <a:ext cx="2450592" cy="850392"/>
+          </a:xfrm>
+          <a:prstGeom prst="rect">
+            <a:avLst/>
+          </a:prstGeom>
+          <a:noFill/>
+        </p:spPr>
+        <p:txBody>
+          <a:bodyPr wrap="none" anchor="t">
+            <a:spAutoFit/>
+          </a:bodyPr>
+          <a:lstStyle/>
+          <a:p>
+            <a:pPr algn="l"/>
+            <a:r>
+              <a:rPr sz="950" b="0">
+                <a:solidFill>
+                  <a:srgbClr val="AAB6C9"/>
+                </a:solidFill>
+                <a:latin typeface="Aptos"/>
+              </a:rPr>
+              <a:t>ruleEngine/
+• configurable expressions
+• exception creation
+• blocking / severity
+• stale + duplicate checks</a:t>
+            </a:r>
+          </a:p>
+        </p:txBody>
+      </p:sp>
+      <p:sp>
+        <p:nvSpPr>
+          <p:cNvPr id="32" name="Rounded Rectangle 31"/>
+          <p:cNvSpPr/>
+          <p:nvPr/>
+        </p:nvSpPr>
+        <p:spPr>
+          <a:xfrm>
+            <a:off x="6419088" y="2697480"/>
+            <a:ext cx="2423160" cy="1417320"/>
+          </a:xfrm>
+          <a:prstGeom prst="roundRect">
+            <a:avLst/>
+          </a:prstGeom>
+          <a:solidFill>
+            <a:srgbClr val="16223B"/>
+          </a:solidFill>
+          <a:ln>
+            <a:solidFill>
+              <a:srgbClr val="2A3953"/>
+            </a:solidFill>
+          </a:ln>
+        </p:spPr>
+        <p:style>
+          <a:lnRef idx="1">
+            <a:schemeClr val="accent1"/>
+          </a:lnRef>
+          <a:fillRef idx="3">
+            <a:schemeClr val="accent1"/>
+          </a:fillRef>
+          <a:effectRef idx="2">
+            <a:schemeClr val="accent1"/>
+          </a:effectRef>
+          <a:fontRef idx="minor">
+            <a:schemeClr val="lt1"/>
+          </a:fontRef>
+        </p:style>
+        <p:txBody>
+          <a:bodyPr rtlCol="0" anchor="ctr"/>
+          <a:lstStyle/>
+          <a:p>
+            <a:pPr algn="ctr"/>
+          </a:p>
+        </p:txBody>
+      </p:sp>
+      <p:sp>
+        <p:nvSpPr>
+          <p:cNvPr id="33" name="Rectangle 32"/>
+          <p:cNvSpPr/>
+          <p:nvPr/>
+        </p:nvSpPr>
+        <p:spPr>
+          <a:xfrm>
+            <a:off x="6419088" y="2697480"/>
+            <a:ext cx="54864" cy="1417320"/>
+          </a:xfrm>
+          <a:prstGeom prst="rect">
+            <a:avLst/>
+          </a:prstGeom>
+          <a:solidFill>
+            <a:srgbClr val="A78BFA"/>
+          </a:solidFill>
+          <a:ln>
+            <a:noFill/>
+          </a:ln>
+        </p:spPr>
+        <p:style>
+          <a:lnRef idx="1">
+            <a:schemeClr val="accent1"/>
+          </a:lnRef>
+          <a:fillRef idx="3">
+            <a:schemeClr val="accent1"/>
+          </a:fillRef>
+          <a:effectRef idx="2">
+            <a:schemeClr val="accent1"/>
+          </a:effectRef>
+          <a:fontRef idx="minor">
+            <a:schemeClr val="lt1"/>
+          </a:fontRef>
+        </p:style>
+        <p:txBody>
+          <a:bodyPr rtlCol="0" anchor="ctr"/>
+          <a:lstStyle/>
+          <a:p>
+            <a:pPr algn="ctr"/>
+          </a:p>
+        </p:txBody>
+      </p:sp>
+      <p:sp>
+        <p:nvSpPr>
+          <p:cNvPr id="34" name="TextBox 33"/>
+          <p:cNvSpPr txBox="1"/>
+          <p:nvPr/>
+        </p:nvSpPr>
+        <p:spPr>
+          <a:xfrm>
+            <a:off x="6583679" y="2807208"/>
+            <a:ext cx="2148840" cy="320040"/>
+          </a:xfrm>
+          <a:prstGeom prst="rect">
+            <a:avLst/>
+          </a:prstGeom>
+          <a:noFill/>
+        </p:spPr>
+        <p:txBody>
+          <a:bodyPr wrap="none" anchor="ctr">
+            <a:spAutoFit/>
+          </a:bodyPr>
+          <a:lstStyle/>
+          <a:p>
+            <a:pPr algn="l"/>
+            <a:r>
+              <a:rPr sz="1200" b="1">
+                <a:solidFill>
+                  <a:srgbClr val="F5F7FA"/>
+                </a:solidFill>
+                <a:latin typeface="Aptos"/>
+              </a:rPr>
+              <a:t>AI + RECON</a:t>
+            </a:r>
+          </a:p>
+        </p:txBody>
+      </p:sp>
+      <p:sp>
+        <p:nvSpPr>
+          <p:cNvPr id="35" name="TextBox 34"/>
+          <p:cNvSpPr txBox="1"/>
+          <p:nvPr/>
+        </p:nvSpPr>
+        <p:spPr>
+          <a:xfrm>
+            <a:off x="6583679" y="3172968"/>
+            <a:ext cx="2130552" cy="850392"/>
+          </a:xfrm>
+          <a:prstGeom prst="rect">
+            <a:avLst/>
+          </a:prstGeom>
+          <a:noFill/>
+        </p:spPr>
+        <p:txBody>
+          <a:bodyPr wrap="none" anchor="t">
+            <a:spAutoFit/>
+          </a:bodyPr>
+          <a:lstStyle/>
+          <a:p>
+            <a:pPr algn="l"/>
+            <a:r>
+              <a:rPr sz="919" b="0">
+                <a:solidFill>
+                  <a:srgbClr val="AAB6C9"/>
+                </a:solidFill>
+                <a:latin typeface="Aptos"/>
+              </a:rPr>
+              <a:t>aiService.js
+reconciliationService.js
+recommendations stay separate from final decisions</a:t>
+            </a:r>
+          </a:p>
+        </p:txBody>
+      </p:sp>
+      <p:sp>
+        <p:nvSpPr>
+          <p:cNvPr id="36" name="Rounded Rectangle 35"/>
+          <p:cNvSpPr/>
+          <p:nvPr/>
+        </p:nvSpPr>
+        <p:spPr>
+          <a:xfrm>
+            <a:off x="9025128" y="2697480"/>
+            <a:ext cx="2395728" cy="1417320"/>
+          </a:xfrm>
+          <a:prstGeom prst="roundRect">
+            <a:avLst/>
+          </a:prstGeom>
+          <a:solidFill>
+            <a:srgbClr val="16223B"/>
+          </a:solidFill>
+          <a:ln>
+            <a:solidFill>
+              <a:srgbClr val="2A3953"/>
+            </a:solidFill>
+          </a:ln>
+        </p:spPr>
+        <p:style>
+          <a:lnRef idx="1">
+            <a:schemeClr val="accent1"/>
+          </a:lnRef>
+          <a:fillRef idx="3">
+            <a:schemeClr val="accent1"/>
+          </a:fillRef>
+          <a:effectRef idx="2">
+            <a:schemeClr val="accent1"/>
+          </a:effectRef>
+          <a:fontRef idx="minor">
+            <a:schemeClr val="lt1"/>
+          </a:fontRef>
+        </p:style>
+        <p:txBody>
+          <a:bodyPr rtlCol="0" anchor="ctr"/>
+          <a:lstStyle/>
+          <a:p>
+            <a:pPr algn="ctr"/>
+          </a:p>
+        </p:txBody>
+      </p:sp>
+      <p:sp>
+        <p:nvSpPr>
+          <p:cNvPr id="37" name="Rectangle 36"/>
+          <p:cNvSpPr/>
+          <p:nvPr/>
+        </p:nvSpPr>
+        <p:spPr>
+          <a:xfrm>
+            <a:off x="9025128" y="2697480"/>
+            <a:ext cx="54864" cy="1417320"/>
+          </a:xfrm>
+          <a:prstGeom prst="rect">
+            <a:avLst/>
+          </a:prstGeom>
+          <a:solidFill>
+            <a:srgbClr val="34D399"/>
+          </a:solidFill>
+          <a:ln>
+            <a:noFill/>
+          </a:ln>
+        </p:spPr>
+        <p:style>
+          <a:lnRef idx="1">
+            <a:schemeClr val="accent1"/>
+          </a:lnRef>
+          <a:fillRef idx="3">
+            <a:schemeClr val="accent1"/>
+          </a:fillRef>
+          <a:effectRef idx="2">
+            <a:schemeClr val="accent1"/>
+          </a:effectRef>
+          <a:fontRef idx="minor">
+            <a:schemeClr val="lt1"/>
+          </a:fontRef>
+        </p:style>
+        <p:txBody>
+          <a:bodyPr rtlCol="0" anchor="ctr"/>
+          <a:lstStyle/>
+          <a:p>
+            <a:pPr algn="ctr"/>
+          </a:p>
+        </p:txBody>
+      </p:sp>
+      <p:sp>
+        <p:nvSpPr>
+          <p:cNvPr id="38" name="TextBox 37"/>
+          <p:cNvSpPr txBox="1"/>
+          <p:nvPr/>
+        </p:nvSpPr>
+        <p:spPr>
+          <a:xfrm>
+            <a:off x="9189719" y="2807208"/>
+            <a:ext cx="2121408" cy="320040"/>
+          </a:xfrm>
+          <a:prstGeom prst="rect">
+            <a:avLst/>
+          </a:prstGeom>
+          <a:noFill/>
+        </p:spPr>
+        <p:txBody>
+          <a:bodyPr wrap="none" anchor="ctr">
+            <a:spAutoFit/>
+          </a:bodyPr>
+          <a:lstStyle/>
+          <a:p>
+            <a:pPr algn="l"/>
+            <a:r>
+              <a:rPr sz="1200" b="1">
+                <a:solidFill>
+                  <a:srgbClr val="F5F7FA"/>
+                </a:solidFill>
+                <a:latin typeface="Aptos"/>
+              </a:rPr>
+              <a:t>VERIFY + AUDIT</a:t>
+            </a:r>
+          </a:p>
+        </p:txBody>
+      </p:sp>
+      <p:sp>
+        <p:nvSpPr>
+          <p:cNvPr id="39" name="TextBox 38"/>
+          <p:cNvSpPr txBox="1"/>
+          <p:nvPr/>
+        </p:nvSpPr>
+        <p:spPr>
+          <a:xfrm>
+            <a:off x="9189719" y="3172968"/>
+            <a:ext cx="2103120" cy="850392"/>
+          </a:xfrm>
+          <a:prstGeom prst="rect">
+            <a:avLst/>
+          </a:prstGeom>
+          <a:noFill/>
+        </p:spPr>
+        <p:txBody>
+          <a:bodyPr wrap="none" anchor="t">
+            <a:spAutoFit/>
+          </a:bodyPr>
+          <a:lstStyle/>
+          <a:p>
+            <a:pPr algn="l"/>
+            <a:r>
+              <a:rPr sz="950" b="0">
+                <a:solidFill>
+                  <a:srgbClr val="AAB6C9"/>
+                </a:solidFill>
+                <a:latin typeface="Aptos"/>
+              </a:rPr>
+              <a:t>verificationService.js
+trustScoreService.js
+hashChainService.js</a:t>
+            </a:r>
+          </a:p>
+        </p:txBody>
+      </p:sp>
+      <p:sp>
+        <p:nvSpPr>
+          <p:cNvPr id="40" name="TextBox 39"/>
+          <p:cNvSpPr txBox="1"/>
+          <p:nvPr/>
+        </p:nvSpPr>
+        <p:spPr>
+          <a:xfrm>
+            <a:off x="566928" y="4315968"/>
+            <a:ext cx="2743200" cy="320040"/>
+          </a:xfrm>
+          <a:prstGeom prst="rect">
+            <a:avLst/>
+          </a:prstGeom>
+          <a:noFill/>
+        </p:spPr>
+        <p:txBody>
+          <a:bodyPr wrap="none" anchor="ctr">
+            <a:spAutoFit/>
+          </a:bodyPr>
+          <a:lstStyle/>
+          <a:p>
+            <a:pPr algn="l"/>
+            <a:r>
+              <a:rPr sz="1200" b="1">
+                <a:solidFill>
+                  <a:srgbClr val="F5F7FA"/>
+                </a:solidFill>
+                <a:latin typeface="Aptos"/>
+              </a:rPr>
+              <a:t>Core MongoDB collections</a:t>
+            </a:r>
+          </a:p>
+        </p:txBody>
+      </p:sp>
+      <p:sp>
+        <p:nvSpPr>
+          <p:cNvPr id="41" name="Rounded Rectangle 40"/>
+          <p:cNvSpPr/>
+          <p:nvPr/>
+        </p:nvSpPr>
+        <p:spPr>
+          <a:xfrm>
+            <a:off x="566928" y="4681728"/>
+            <a:ext cx="1298448" cy="512064"/>
+          </a:xfrm>
+          <a:prstGeom prst="roundRect">
+            <a:avLst/>
+          </a:prstGeom>
+          <a:solidFill>
+            <a:srgbClr val="16223B"/>
+          </a:solidFill>
+          <a:ln>
+            <a:solidFill>
+              <a:srgbClr val="22D3EE"/>
+            </a:solidFill>
+          </a:ln>
+        </p:spPr>
+        <p:style>
+          <a:lnRef idx="1">
+            <a:schemeClr val="accent1"/>
+          </a:lnRef>
+          <a:fillRef idx="3">
+            <a:schemeClr val="accent1"/>
+          </a:fillRef>
+          <a:effectRef idx="2">
+            <a:schemeClr val="accent1"/>
+          </a:effectRef>
+          <a:fontRef idx="minor">
+            <a:schemeClr val="lt1"/>
+          </a:fontRef>
+        </p:style>
+        <p:txBody>
+          <a:bodyPr rtlCol="0" anchor="ctr"/>
+          <a:lstStyle/>
+          <a:p>
+            <a:pPr algn="ctr"/>
+          </a:p>
+        </p:txBody>
+      </p:sp>
+      <p:sp>
+        <p:nvSpPr>
+          <p:cNvPr id="42" name="TextBox 41"/>
+          <p:cNvSpPr txBox="1"/>
+          <p:nvPr/>
+        </p:nvSpPr>
+        <p:spPr>
+          <a:xfrm>
+            <a:off x="640080" y="4709160"/>
+            <a:ext cx="1152144" cy="457200"/>
+          </a:xfrm>
+          <a:prstGeom prst="rect">
+            <a:avLst/>
+          </a:prstGeom>
+          <a:noFill/>
+        </p:spPr>
+        <p:txBody>
+          <a:bodyPr wrap="none" anchor="ctr">
+            <a:spAutoFit/>
+          </a:bodyPr>
+          <a:lstStyle/>
+          <a:p>
+            <a:pPr algn="ctr"/>
+            <a:r>
+              <a:rPr sz="850" b="1">
+                <a:solidFill>
+                  <a:srgbClr val="F5F7FA"/>
+                </a:solidFill>
+                <a:latin typeface="Aptos"/>
+              </a:rPr>
+              <a:t>RawImport</a:t>
+            </a:r>
+          </a:p>
+        </p:txBody>
+      </p:sp>
+      <p:sp>
+        <p:nvSpPr>
+          <p:cNvPr id="43" name="Rounded Rectangle 42"/>
+          <p:cNvSpPr/>
+          <p:nvPr/>
+        </p:nvSpPr>
+        <p:spPr>
+          <a:xfrm>
+            <a:off x="1984248" y="4681728"/>
+            <a:ext cx="1298448" cy="512064"/>
+          </a:xfrm>
+          <a:prstGeom prst="roundRect">
+            <a:avLst/>
+          </a:prstGeom>
+          <a:solidFill>
+            <a:srgbClr val="16223B"/>
+          </a:solidFill>
+          <a:ln>
+            <a:solidFill>
+              <a:srgbClr val="22D3EE"/>
+            </a:solidFill>
+          </a:ln>
+        </p:spPr>
+        <p:style>
+          <a:lnRef idx="1">
+            <a:schemeClr val="accent1"/>
+          </a:lnRef>
+          <a:fillRef idx="3">
+            <a:schemeClr val="accent1"/>
+          </a:fillRef>
+          <a:effectRef idx="2">
+            <a:schemeClr val="accent1"/>
+          </a:effectRef>
+          <a:fontRef idx="minor">
+            <a:schemeClr val="lt1"/>
+          </a:fontRef>
+        </p:style>
+        <p:txBody>
+          <a:bodyPr rtlCol="0" anchor="ctr"/>
+          <a:lstStyle/>
+          <a:p>
+            <a:pPr algn="ctr"/>
+          </a:p>
+        </p:txBody>
+      </p:sp>
+      <p:sp>
+        <p:nvSpPr>
+          <p:cNvPr id="44" name="TextBox 43"/>
+          <p:cNvSpPr txBox="1"/>
+          <p:nvPr/>
+        </p:nvSpPr>
+        <p:spPr>
+          <a:xfrm>
+            <a:off x="2057400" y="4709160"/>
+            <a:ext cx="1152144" cy="457200"/>
+          </a:xfrm>
+          <a:prstGeom prst="rect">
+            <a:avLst/>
+          </a:prstGeom>
+          <a:noFill/>
+        </p:spPr>
+        <p:txBody>
+          <a:bodyPr wrap="none" anchor="ctr">
+            <a:spAutoFit/>
+          </a:bodyPr>
+          <a:lstStyle/>
+          <a:p>
+            <a:pPr algn="ctr"/>
+            <a:r>
+              <a:rPr sz="850" b="1">
+                <a:solidFill>
+                  <a:srgbClr val="F5F7FA"/>
+                </a:solidFill>
+                <a:latin typeface="Aptos"/>
+              </a:rPr>
+              <a:t>Loan</a:t>
+            </a:r>
+          </a:p>
+        </p:txBody>
+      </p:sp>
+      <p:sp>
+        <p:nvSpPr>
+          <p:cNvPr id="45" name="Rounded Rectangle 44"/>
+          <p:cNvSpPr/>
+          <p:nvPr/>
+        </p:nvSpPr>
+        <p:spPr>
+          <a:xfrm>
+            <a:off x="3401568" y="4681728"/>
+            <a:ext cx="1298448" cy="512064"/>
+          </a:xfrm>
+          <a:prstGeom prst="roundRect">
+            <a:avLst/>
+          </a:prstGeom>
+          <a:solidFill>
+            <a:srgbClr val="16223B"/>
+          </a:solidFill>
+          <a:ln>
+            <a:solidFill>
+              <a:srgbClr val="FBBF24"/>
+            </a:solidFill>
+          </a:ln>
+        </p:spPr>
+        <p:style>
+          <a:lnRef idx="1">
+            <a:schemeClr val="accent1"/>
+          </a:lnRef>
+          <a:fillRef idx="3">
+            <a:schemeClr val="accent1"/>
+          </a:fillRef>
+          <a:effectRef idx="2">
+            <a:schemeClr val="accent1"/>
+          </a:effectRef>
+          <a:fontRef idx="minor">
+            <a:schemeClr val="lt1"/>
+          </a:fontRef>
+        </p:style>
+        <p:txBody>
+          <a:bodyPr rtlCol="0" anchor="ctr"/>
+          <a:lstStyle/>
+          <a:p>
+            <a:pPr algn="ctr"/>
+          </a:p>
+        </p:txBody>
+      </p:sp>
+      <p:sp>
+        <p:nvSpPr>
+          <p:cNvPr id="46" name="TextBox 45"/>
+          <p:cNvSpPr txBox="1"/>
+          <p:nvPr/>
+        </p:nvSpPr>
+        <p:spPr>
+          <a:xfrm>
+            <a:off x="3474720" y="4709160"/>
+            <a:ext cx="1152144" cy="457200"/>
+          </a:xfrm>
+          <a:prstGeom prst="rect">
+            <a:avLst/>
+          </a:prstGeom>
+          <a:noFill/>
+        </p:spPr>
+        <p:txBody>
+          <a:bodyPr wrap="none" anchor="ctr">
+            <a:spAutoFit/>
+          </a:bodyPr>
+          <a:lstStyle/>
+          <a:p>
+            <a:pPr algn="ctr"/>
+            <a:r>
+              <a:rPr sz="850" b="1">
+                <a:solidFill>
+                  <a:srgbClr val="F5F7FA"/>
+                </a:solidFill>
+                <a:latin typeface="Aptos"/>
+              </a:rPr>
+              <a:t>Exception</a:t>
+            </a:r>
+          </a:p>
+        </p:txBody>
+      </p:sp>
+      <p:sp>
+        <p:nvSpPr>
+          <p:cNvPr id="47" name="Rounded Rectangle 46"/>
+          <p:cNvSpPr/>
+          <p:nvPr/>
+        </p:nvSpPr>
+        <p:spPr>
+          <a:xfrm>
+            <a:off x="4818888" y="4681728"/>
+            <a:ext cx="1572768" cy="512064"/>
+          </a:xfrm>
+          <a:prstGeom prst="roundRect">
+            <a:avLst/>
+          </a:prstGeom>
+          <a:solidFill>
+            <a:srgbClr val="16223B"/>
+          </a:solidFill>
+          <a:ln>
+            <a:solidFill>
+              <a:srgbClr val="A78BFA"/>
+            </a:solidFill>
+          </a:ln>
+        </p:spPr>
+        <p:style>
+          <a:lnRef idx="1">
+            <a:schemeClr val="accent1"/>
+          </a:lnRef>
+          <a:fillRef idx="3">
+            <a:schemeClr val="accent1"/>
+          </a:fillRef>
+          <a:effectRef idx="2">
+            <a:schemeClr val="accent1"/>
+          </a:effectRef>
+          <a:fontRef idx="minor">
+            <a:schemeClr val="lt1"/>
+          </a:fontRef>
+        </p:style>
+        <p:txBody>
+          <a:bodyPr rtlCol="0" anchor="ctr"/>
+          <a:lstStyle/>
+          <a:p>
+            <a:pPr algn="ctr"/>
+          </a:p>
+        </p:txBody>
+      </p:sp>
+      <p:sp>
+        <p:nvSpPr>
+          <p:cNvPr id="48" name="TextBox 47"/>
+          <p:cNvSpPr txBox="1"/>
+          <p:nvPr/>
+        </p:nvSpPr>
+        <p:spPr>
+          <a:xfrm>
+            <a:off x="4892040" y="4709160"/>
+            <a:ext cx="1426464" cy="457200"/>
+          </a:xfrm>
+          <a:prstGeom prst="rect">
+            <a:avLst/>
+          </a:prstGeom>
+          <a:noFill/>
+        </p:spPr>
+        <p:txBody>
+          <a:bodyPr wrap="none" anchor="ctr">
+            <a:spAutoFit/>
+          </a:bodyPr>
+          <a:lstStyle/>
+          <a:p>
+            <a:pPr algn="ctr"/>
+            <a:r>
+              <a:rPr sz="850" b="1">
+                <a:solidFill>
+                  <a:srgbClr val="F5F7FA"/>
+                </a:solidFill>
+                <a:latin typeface="Aptos"/>
+              </a:rPr>
+              <a:t>AiRecommendation</a:t>
+            </a:r>
+          </a:p>
+        </p:txBody>
+      </p:sp>
+      <p:sp>
+        <p:nvSpPr>
+          <p:cNvPr id="49" name="Rounded Rectangle 48"/>
+          <p:cNvSpPr/>
+          <p:nvPr/>
+        </p:nvSpPr>
+        <p:spPr>
+          <a:xfrm>
+            <a:off x="6510527" y="4681728"/>
+            <a:ext cx="1298448" cy="512064"/>
+          </a:xfrm>
+          <a:prstGeom prst="roundRect">
+            <a:avLst/>
+          </a:prstGeom>
+          <a:solidFill>
+            <a:srgbClr val="16223B"/>
+          </a:solidFill>
+          <a:ln>
+            <a:solidFill>
+              <a:srgbClr val="A78BFA"/>
+            </a:solidFill>
+          </a:ln>
+        </p:spPr>
+        <p:style>
+          <a:lnRef idx="1">
+            <a:schemeClr val="accent1"/>
+          </a:lnRef>
+          <a:fillRef idx="3">
+            <a:schemeClr val="accent1"/>
+          </a:fillRef>
+          <a:effectRef idx="2">
+            <a:schemeClr val="accent1"/>
+          </a:effectRef>
+          <a:fontRef idx="minor">
+            <a:schemeClr val="lt1"/>
+          </a:fontRef>
+        </p:style>
+        <p:txBody>
+          <a:bodyPr rtlCol="0" anchor="ctr"/>
+          <a:lstStyle/>
+          <a:p>
+            <a:pPr algn="ctr"/>
+          </a:p>
+        </p:txBody>
+      </p:sp>
+      <p:sp>
+        <p:nvSpPr>
+          <p:cNvPr id="50" name="TextBox 49"/>
+          <p:cNvSpPr txBox="1"/>
+          <p:nvPr/>
+        </p:nvSpPr>
+        <p:spPr>
+          <a:xfrm>
+            <a:off x="6583679" y="4709160"/>
+            <a:ext cx="1152144" cy="457200"/>
+          </a:xfrm>
+          <a:prstGeom prst="rect">
+            <a:avLst/>
+          </a:prstGeom>
+          <a:noFill/>
+        </p:spPr>
+        <p:txBody>
+          <a:bodyPr wrap="none" anchor="ctr">
+            <a:spAutoFit/>
+          </a:bodyPr>
+          <a:lstStyle/>
+          <a:p>
+            <a:pPr algn="ctr"/>
+            <a:r>
+              <a:rPr sz="850" b="1">
+                <a:solidFill>
+                  <a:srgbClr val="F5F7FA"/>
+                </a:solidFill>
+                <a:latin typeface="Aptos"/>
+              </a:rPr>
+              <a:t>ReviewDecision</a:t>
+            </a:r>
+          </a:p>
+        </p:txBody>
+      </p:sp>
+      <p:sp>
+        <p:nvSpPr>
+          <p:cNvPr id="51" name="Rounded Rectangle 50"/>
+          <p:cNvSpPr/>
+          <p:nvPr/>
+        </p:nvSpPr>
+        <p:spPr>
+          <a:xfrm>
+            <a:off x="7927848" y="4681728"/>
+            <a:ext cx="1572768" cy="512064"/>
+          </a:xfrm>
+          <a:prstGeom prst="roundRect">
+            <a:avLst/>
+          </a:prstGeom>
+          <a:solidFill>
+            <a:srgbClr val="16223B"/>
+          </a:solidFill>
+          <a:ln>
+            <a:solidFill>
+              <a:srgbClr val="34D399"/>
+            </a:solidFill>
+          </a:ln>
+        </p:spPr>
+        <p:style>
+          <a:lnRef idx="1">
+            <a:schemeClr val="accent1"/>
+          </a:lnRef>
+          <a:fillRef idx="3">
+            <a:schemeClr val="accent1"/>
+          </a:fillRef>
+          <a:effectRef idx="2">
+            <a:schemeClr val="accent1"/>
+          </a:effectRef>
+          <a:fontRef idx="minor">
+            <a:schemeClr val="lt1"/>
+          </a:fontRef>
+        </p:style>
+        <p:txBody>
+          <a:bodyPr rtlCol="0" anchor="ctr"/>
+          <a:lstStyle/>
+          <a:p>
+            <a:pPr algn="ctr"/>
+          </a:p>
+        </p:txBody>
+      </p:sp>
+      <p:sp>
+        <p:nvSpPr>
+          <p:cNvPr id="52" name="TextBox 51"/>
+          <p:cNvSpPr txBox="1"/>
+          <p:nvPr/>
+        </p:nvSpPr>
+        <p:spPr>
+          <a:xfrm>
+            <a:off x="8001000" y="4709160"/>
+            <a:ext cx="1426464" cy="457200"/>
+          </a:xfrm>
+          <a:prstGeom prst="rect">
+            <a:avLst/>
+          </a:prstGeom>
+          <a:noFill/>
+        </p:spPr>
+        <p:txBody>
+          <a:bodyPr wrap="none" anchor="ctr">
+            <a:spAutoFit/>
+          </a:bodyPr>
+          <a:lstStyle/>
+          <a:p>
+            <a:pPr algn="ctr"/>
+            <a:r>
+              <a:rPr sz="850" b="1">
+                <a:solidFill>
+                  <a:srgbClr val="F5F7FA"/>
+                </a:solidFill>
+                <a:latin typeface="Aptos"/>
+              </a:rPr>
+              <a:t>VerifiedLoanRecord</a:t>
+            </a:r>
+          </a:p>
+        </p:txBody>
+      </p:sp>
+      <p:sp>
+        <p:nvSpPr>
+          <p:cNvPr id="53" name="Rounded Rectangle 52"/>
+          <p:cNvSpPr/>
+          <p:nvPr/>
+        </p:nvSpPr>
+        <p:spPr>
+          <a:xfrm>
+            <a:off x="9619488" y="4681728"/>
+            <a:ext cx="1298448" cy="512064"/>
+          </a:xfrm>
+          <a:prstGeom prst="roundRect">
+            <a:avLst/>
+          </a:prstGeom>
+          <a:solidFill>
+            <a:srgbClr val="16223B"/>
+          </a:solidFill>
+          <a:ln>
+            <a:solidFill>
+              <a:srgbClr val="34D399"/>
+            </a:solidFill>
+          </a:ln>
+        </p:spPr>
+        <p:style>
+          <a:lnRef idx="1">
+            <a:schemeClr val="accent1"/>
+          </a:lnRef>
+          <a:fillRef idx="3">
+            <a:schemeClr val="accent1"/>
+          </a:fillRef>
+          <a:effectRef idx="2">
+            <a:schemeClr val="accent1"/>
+          </a:effectRef>
+          <a:fontRef idx="minor">
+            <a:schemeClr val="lt1"/>
+          </a:fontRef>
+        </p:style>
+        <p:txBody>
+          <a:bodyPr rtlCol="0" anchor="ctr"/>
+          <a:lstStyle/>
+          <a:p>
+            <a:pPr algn="ctr"/>
+          </a:p>
+        </p:txBody>
+      </p:sp>
+      <p:sp>
+        <p:nvSpPr>
+          <p:cNvPr id="54" name="TextBox 53"/>
+          <p:cNvSpPr txBox="1"/>
+          <p:nvPr/>
+        </p:nvSpPr>
+        <p:spPr>
+          <a:xfrm>
+            <a:off x="9692640" y="4709160"/>
+            <a:ext cx="1152144" cy="457200"/>
+          </a:xfrm>
+          <a:prstGeom prst="rect">
+            <a:avLst/>
+          </a:prstGeom>
+          <a:noFill/>
+        </p:spPr>
+        <p:txBody>
+          <a:bodyPr wrap="none" anchor="ctr">
+            <a:spAutoFit/>
+          </a:bodyPr>
+          <a:lstStyle/>
+          <a:p>
+            <a:pPr algn="ctr"/>
+            <a:r>
+              <a:rPr sz="850" b="1">
+                <a:solidFill>
+                  <a:srgbClr val="F5F7FA"/>
+                </a:solidFill>
+                <a:latin typeface="Aptos"/>
+              </a:rPr>
+              <a:t>AuditEvent</a:t>
+            </a:r>
+          </a:p>
+        </p:txBody>
+      </p:sp>
+      <p:sp>
+        <p:nvSpPr>
+          <p:cNvPr id="55" name="Rounded Rectangle 54"/>
+          <p:cNvSpPr/>
+          <p:nvPr/>
+        </p:nvSpPr>
+        <p:spPr>
+          <a:xfrm>
+            <a:off x="11036808" y="4681728"/>
+            <a:ext cx="1298448" cy="512064"/>
+          </a:xfrm>
+          <a:prstGeom prst="roundRect">
+            <a:avLst/>
+          </a:prstGeom>
+          <a:solidFill>
+            <a:srgbClr val="16223B"/>
+          </a:solidFill>
+          <a:ln>
+            <a:solidFill>
+              <a:srgbClr val="FBBF24"/>
+            </a:solidFill>
+          </a:ln>
+        </p:spPr>
+        <p:style>
+          <a:lnRef idx="1">
+            <a:schemeClr val="accent1"/>
+          </a:lnRef>
+          <a:fillRef idx="3">
+            <a:schemeClr val="accent1"/>
+          </a:fillRef>
+          <a:effectRef idx="2">
+            <a:schemeClr val="accent1"/>
+          </a:effectRef>
+          <a:fontRef idx="minor">
+            <a:schemeClr val="lt1"/>
+          </a:fontRef>
+        </p:style>
+        <p:txBody>
+          <a:bodyPr rtlCol="0" anchor="ctr"/>
+          <a:lstStyle/>
+          <a:p>
+            <a:pPr algn="ctr"/>
+          </a:p>
+        </p:txBody>
+      </p:sp>
+      <p:sp>
+        <p:nvSpPr>
+          <p:cNvPr id="56" name="TextBox 55"/>
+          <p:cNvSpPr txBox="1"/>
+          <p:nvPr/>
+        </p:nvSpPr>
+        <p:spPr>
+          <a:xfrm>
+            <a:off x="11109960" y="4709160"/>
+            <a:ext cx="1152144" cy="457200"/>
+          </a:xfrm>
+          <a:prstGeom prst="rect">
+            <a:avLst/>
+          </a:prstGeom>
+          <a:noFill/>
+        </p:spPr>
+        <p:txBody>
+          <a:bodyPr wrap="none" anchor="ctr">
+            <a:spAutoFit/>
+          </a:bodyPr>
+          <a:lstStyle/>
+          <a:p>
+            <a:pPr algn="ctr"/>
+            <a:r>
+              <a:rPr sz="850" b="1">
+                <a:solidFill>
+                  <a:srgbClr val="F5F7FA"/>
+                </a:solidFill>
+                <a:latin typeface="Aptos"/>
+              </a:rPr>
+              <a:t>ValidationRule</a:t>
+            </a:r>
+          </a:p>
+        </p:txBody>
+      </p:sp>
+      <p:sp>
+        <p:nvSpPr>
+          <p:cNvPr id="57" name="TextBox 56"/>
+          <p:cNvSpPr txBox="1"/>
+          <p:nvPr/>
+        </p:nvSpPr>
+        <p:spPr>
+          <a:xfrm>
+            <a:off x="566928" y="5440680"/>
+            <a:ext cx="1645920" cy="320040"/>
+          </a:xfrm>
+          <a:prstGeom prst="rect">
+            <a:avLst/>
+          </a:prstGeom>
+          <a:noFill/>
+        </p:spPr>
+        <p:txBody>
+          <a:bodyPr wrap="none" anchor="ctr">
+            <a:spAutoFit/>
+          </a:bodyPr>
+          <a:lstStyle/>
+          <a:p>
+            <a:pPr algn="l"/>
+            <a:r>
+              <a:rPr sz="1200" b="1">
+                <a:solidFill>
+                  <a:srgbClr val="22D3EE"/>
+                </a:solidFill>
+                <a:latin typeface="Aptos"/>
+              </a:rPr>
+              <a:t>Critical control</a:t>
+            </a:r>
+          </a:p>
+        </p:txBody>
+      </p:sp>
+      <p:sp>
+        <p:nvSpPr>
+          <p:cNvPr id="58" name="TextBox 57"/>
+          <p:cNvSpPr txBox="1"/>
+          <p:nvPr/>
+        </p:nvSpPr>
+        <p:spPr>
+          <a:xfrm>
+            <a:off x="1920240" y="5404104"/>
+            <a:ext cx="9372600" cy="502920"/>
+          </a:xfrm>
+          <a:prstGeom prst="rect">
+            <a:avLst/>
+          </a:prstGeom>
+          <a:noFill/>
+        </p:spPr>
+        <p:txBody>
+          <a:bodyPr wrap="none" anchor="ctr">
+            <a:spAutoFit/>
+          </a:bodyPr>
+          <a:lstStyle/>
+          <a:p>
+            <a:pPr algn="l"/>
+            <a:r>
+              <a:rPr sz="1100" b="0">
+                <a:solidFill>
+                  <a:srgbClr val="F5F7FA"/>
+                </a:solidFill>
+                <a:latin typeface="Aptos"/>
+              </a:rPr>
+              <a:t>AI write paths are whitelist-protected; AI cannot set verification status. Verification is a separate backend operation.</a:t>
+            </a:r>
+          </a:p>
+        </p:txBody>
+      </p:sp>
+    </p:spTree>
+  </p:cSld>
+  <p:clrMapOvr>
+    <a:masterClrMapping/>
+  </p:clrMapOvr>
+</p:sld>
+</file>
+
+<file path=ppt/slides/slide16.xml><?xml version="1.0" encoding="utf-8"?>
+<p:sld xmlns:a="http://schemas.openxmlformats.org/drawingml/2006/main" xmlns:p="http://schemas.openxmlformats.org/presentationml/2006/main" xmlns:r="http://schemas.openxmlformats.org/officeDocument/2006/relationships">
+  <p:cSld>
+    <p:bg>
+      <p:bgPr>
+        <a:solidFill>
+          <a:srgbClr val="0A1222"/>
+        </a:solidFill>
+        <a:effectLst/>
+      </p:bgPr>
+    </p:bg>
+    <p:spTree>
+      <p:nvGrpSpPr>
+        <p:cNvPr id="1" name=""/>
+        <p:cNvGrpSpPr/>
+        <p:nvPr/>
+      </p:nvGrpSpPr>
+      <p:grpSpPr/>
+      <p:sp>
+        <p:nvSpPr>
+          <p:cNvPr id="2" name="Rectangle 1"/>
+          <p:cNvSpPr/>
+          <p:nvPr/>
+        </p:nvSpPr>
+        <p:spPr>
+          <a:xfrm>
+            <a:off x="0" y="0"/>
+            <a:ext cx="164592" cy="6858000"/>
+          </a:xfrm>
+          <a:prstGeom prst="rect">
+            <a:avLst/>
+          </a:prstGeom>
+          <a:solidFill>
+            <a:srgbClr val="22D3EE"/>
+          </a:solidFill>
+          <a:ln>
+            <a:noFill/>
+          </a:ln>
+        </p:spPr>
+        <p:style>
+          <a:lnRef idx="1">
+            <a:schemeClr val="accent1"/>
+          </a:lnRef>
+          <a:fillRef idx="3">
+            <a:schemeClr val="accent1"/>
+          </a:fillRef>
+          <a:effectRef idx="2">
+            <a:schemeClr val="accent1"/>
+          </a:effectRef>
+          <a:fontRef idx="minor">
+            <a:schemeClr val="lt1"/>
+          </a:fontRef>
+        </p:style>
+        <p:txBody>
+          <a:bodyPr rtlCol="0" anchor="ctr"/>
+          <a:lstStyle/>
+          <a:p>
+            <a:pPr algn="ctr"/>
+          </a:p>
+        </p:txBody>
+      </p:sp>
+      <p:sp>
+        <p:nvSpPr>
+          <p:cNvPr id="3" name="TextBox 2"/>
+          <p:cNvSpPr txBox="1"/>
+          <p:nvPr/>
+        </p:nvSpPr>
+        <p:spPr>
+          <a:xfrm>
+            <a:off x="320040" y="6537960"/>
+            <a:ext cx="6400800" cy="274320"/>
+          </a:xfrm>
+          <a:prstGeom prst="rect">
+            <a:avLst/>
+          </a:prstGeom>
+          <a:noFill/>
+        </p:spPr>
+        <p:txBody>
+          <a:bodyPr wrap="none" anchor="ctr">
+            <a:spAutoFit/>
+          </a:bodyPr>
+          <a:lstStyle/>
+          <a:p>
+            <a:pPr algn="l"/>
+            <a:r>
+              <a:rPr sz="800" b="0">
+                <a:solidFill>
+                  <a:srgbClr val="AAB6C9"/>
+                </a:solidFill>
+                <a:latin typeface="Aptos"/>
+              </a:rPr>
+              <a:t>Intain Verify   ·   Loan Data Verification Copilot</a:t>
+            </a:r>
+          </a:p>
+        </p:txBody>
+      </p:sp>
+      <p:sp>
+        <p:nvSpPr>
+          <p:cNvPr id="4" name="TextBox 3"/>
+          <p:cNvSpPr txBox="1"/>
+          <p:nvPr/>
+        </p:nvSpPr>
+        <p:spPr>
+          <a:xfrm>
+            <a:off x="457200" y="320040"/>
+            <a:ext cx="11247120" cy="640080"/>
+          </a:xfrm>
+          <a:prstGeom prst="rect">
+            <a:avLst/>
+          </a:prstGeom>
+          <a:noFill/>
+        </p:spPr>
+        <p:txBody>
+          <a:bodyPr wrap="none" anchor="ctr">
+            <a:spAutoFit/>
+          </a:bodyPr>
+          <a:lstStyle/>
+          <a:p>
+            <a:pPr algn="l"/>
+            <a:r>
+              <a:rPr sz="2700" b="1">
+                <a:solidFill>
+                  <a:srgbClr val="F5F7FA"/>
+                </a:solidFill>
+                <a:latin typeface="Aptos"/>
+              </a:rPr>
+              <a:t>Frontend architecture &amp; workflow</a:t>
+            </a:r>
+          </a:p>
+        </p:txBody>
+      </p:sp>
+      <p:sp>
+        <p:nvSpPr>
+          <p:cNvPr id="5" name="TextBox 4"/>
+          <p:cNvSpPr txBox="1"/>
+          <p:nvPr/>
+        </p:nvSpPr>
+        <p:spPr>
+          <a:xfrm>
+            <a:off x="457200" y="1051560"/>
+            <a:ext cx="11247120" cy="320040"/>
+          </a:xfrm>
+          <a:prstGeom prst="rect">
+            <a:avLst/>
+          </a:prstGeom>
+          <a:noFill/>
+        </p:spPr>
+        <p:txBody>
+          <a:bodyPr wrap="none" anchor="ctr">
+            <a:spAutoFit/>
+          </a:bodyPr>
+          <a:lstStyle/>
+          <a:p>
+            <a:pPr algn="l"/>
+            <a:r>
+              <a:rPr sz="1200" b="0">
+                <a:solidFill>
+                  <a:srgbClr val="AAB6C9"/>
+                </a:solidFill>
+                <a:latin typeface="Aptos"/>
+              </a:rPr>
+              <a:t>React + Vite · role-based routes · reusable components · API client</a:t>
+            </a:r>
+          </a:p>
+        </p:txBody>
+      </p:sp>
+      <p:sp>
+        <p:nvSpPr>
+          <p:cNvPr id="6" name="Rectangle 5"/>
+          <p:cNvSpPr/>
+          <p:nvPr/>
+        </p:nvSpPr>
+        <p:spPr>
+          <a:xfrm>
+            <a:off x="457200" y="1389888"/>
+            <a:ext cx="1005840" cy="54864"/>
+          </a:xfrm>
+          <a:prstGeom prst="rect">
+            <a:avLst/>
+          </a:prstGeom>
+          <a:solidFill>
+            <a:srgbClr val="22D3EE"/>
+          </a:solidFill>
+          <a:ln>
+            <a:noFill/>
+          </a:ln>
+        </p:spPr>
+        <p:style>
+          <a:lnRef idx="1">
+            <a:schemeClr val="accent1"/>
+          </a:lnRef>
+          <a:fillRef idx="3">
+            <a:schemeClr val="accent1"/>
+          </a:fillRef>
+          <a:effectRef idx="2">
+            <a:schemeClr val="accent1"/>
+          </a:effectRef>
+          <a:fontRef idx="minor">
+            <a:schemeClr val="lt1"/>
+          </a:fontRef>
+        </p:style>
+        <p:txBody>
+          <a:bodyPr rtlCol="0" anchor="ctr"/>
+          <a:lstStyle/>
+          <a:p>
+            <a:pPr algn="ctr"/>
+          </a:p>
+        </p:txBody>
+      </p:sp>
+      <p:sp>
+        <p:nvSpPr>
+          <p:cNvPr id="7" name="Rounded Rectangle 6"/>
+          <p:cNvSpPr/>
+          <p:nvPr/>
+        </p:nvSpPr>
+        <p:spPr>
+          <a:xfrm>
+            <a:off x="566928" y="1600200"/>
+            <a:ext cx="1508760" cy="640080"/>
+          </a:xfrm>
+          <a:prstGeom prst="roundRect">
+            <a:avLst/>
+          </a:prstGeom>
+          <a:solidFill>
+            <a:srgbClr val="16223B"/>
+          </a:solidFill>
+          <a:ln>
+            <a:solidFill>
+              <a:srgbClr val="22D3EE"/>
+            </a:solidFill>
+          </a:ln>
+        </p:spPr>
+        <p:style>
+          <a:lnRef idx="1">
+            <a:schemeClr val="accent1"/>
+          </a:lnRef>
+          <a:fillRef idx="3">
+            <a:schemeClr val="accent1"/>
+          </a:fillRef>
+          <a:effectRef idx="2">
+            <a:schemeClr val="accent1"/>
+          </a:effectRef>
+          <a:fontRef idx="minor">
+            <a:schemeClr val="lt1"/>
+          </a:fontRef>
+        </p:style>
+        <p:txBody>
+          <a:bodyPr rtlCol="0" anchor="ctr"/>
+          <a:lstStyle/>
+          <a:p>
+            <a:pPr algn="ctr"/>
+          </a:p>
+        </p:txBody>
+      </p:sp>
+      <p:sp>
+        <p:nvSpPr>
+          <p:cNvPr id="8" name="TextBox 7"/>
+          <p:cNvSpPr txBox="1"/>
+          <p:nvPr/>
+        </p:nvSpPr>
+        <p:spPr>
+          <a:xfrm>
+            <a:off x="640080" y="1627632"/>
+            <a:ext cx="1362456" cy="585215"/>
+          </a:xfrm>
+          <a:prstGeom prst="rect">
+            <a:avLst/>
+          </a:prstGeom>
+          <a:noFill/>
+        </p:spPr>
+        <p:txBody>
+          <a:bodyPr wrap="none" anchor="ctr">
+            <a:spAutoFit/>
+          </a:bodyPr>
+          <a:lstStyle/>
+          <a:p>
+            <a:pPr algn="ctr"/>
+            <a:r>
+              <a:rPr sz="1050" b="1">
+                <a:solidFill>
+                  <a:srgbClr val="F5F7FA"/>
+                </a:solidFill>
+                <a:latin typeface="Aptos"/>
+              </a:rPr>
+              <a:t>main.jsx
+React mount</a:t>
+            </a:r>
+          </a:p>
+        </p:txBody>
+      </p:sp>
+      <p:cxnSp>
+        <p:nvCxnSpPr>
+          <p:cNvPr id="9" name="Connector 8"/>
+          <p:cNvCxnSpPr/>
+          <p:nvPr/>
+        </p:nvCxnSpPr>
+        <p:spPr>
+          <a:xfrm>
+            <a:off x="2075688" y="1920240"/>
+            <a:ext cx="256032" cy="0"/>
+          </a:xfrm>
+          <a:prstGeom prst="line">
+            <a:avLst/>
+          </a:prstGeom>
+          <a:ln w="20320">
+            <a:solidFill>
+              <a:srgbClr val="AAB6C9"/>
+            </a:solidFill>
+          </a:ln>
+        </p:spPr>
+        <p:style>
+          <a:lnRef idx="2">
+            <a:schemeClr val="accent1"/>
+          </a:lnRef>
+          <a:fillRef idx="0">
+            <a:schemeClr val="accent1"/>
+          </a:fillRef>
+          <a:effectRef idx="1">
+            <a:schemeClr val="accent1"/>
+          </a:effectRef>
+          <a:fontRef idx="minor">
+            <a:schemeClr val="tx1"/>
+          </a:fontRef>
+        </p:style>
+      </p:cxnSp>
+      <p:sp>
+        <p:nvSpPr>
+          <p:cNvPr id="10" name="Rounded Rectangle 9"/>
+          <p:cNvSpPr/>
+          <p:nvPr/>
+        </p:nvSpPr>
+        <p:spPr>
+          <a:xfrm>
+            <a:off x="2331720" y="1600200"/>
+            <a:ext cx="1508760" cy="640080"/>
+          </a:xfrm>
+          <a:prstGeom prst="roundRect">
+            <a:avLst/>
+          </a:prstGeom>
+          <a:solidFill>
+            <a:srgbClr val="16223B"/>
+          </a:solidFill>
+          <a:ln>
+            <a:solidFill>
+              <a:srgbClr val="22D3EE"/>
+            </a:solidFill>
+          </a:ln>
+        </p:spPr>
+        <p:style>
+          <a:lnRef idx="1">
+            <a:schemeClr val="accent1"/>
+          </a:lnRef>
+          <a:fillRef idx="3">
+            <a:schemeClr val="accent1"/>
+          </a:fillRef>
+          <a:effectRef idx="2">
+            <a:schemeClr val="accent1"/>
+          </a:effectRef>
+          <a:fontRef idx="minor">
+            <a:schemeClr val="lt1"/>
+          </a:fontRef>
+        </p:style>
+        <p:txBody>
+          <a:bodyPr rtlCol="0" anchor="ctr"/>
+          <a:lstStyle/>
+          <a:p>
+            <a:pPr algn="ctr"/>
+          </a:p>
+        </p:txBody>
+      </p:sp>
+      <p:sp>
+        <p:nvSpPr>
+          <p:cNvPr id="11" name="TextBox 10"/>
+          <p:cNvSpPr txBox="1"/>
+          <p:nvPr/>
+        </p:nvSpPr>
+        <p:spPr>
+          <a:xfrm>
+            <a:off x="2404872" y="1627632"/>
+            <a:ext cx="1362456" cy="585215"/>
+          </a:xfrm>
+          <a:prstGeom prst="rect">
+            <a:avLst/>
+          </a:prstGeom>
+          <a:noFill/>
+        </p:spPr>
+        <p:txBody>
+          <a:bodyPr wrap="none" anchor="ctr">
+            <a:spAutoFit/>
+          </a:bodyPr>
+          <a:lstStyle/>
+          <a:p>
+            <a:pPr algn="ctr"/>
+            <a:r>
+              <a:rPr sz="1050" b="1">
+                <a:solidFill>
+                  <a:srgbClr val="F5F7FA"/>
+                </a:solidFill>
+                <a:latin typeface="Aptos"/>
+              </a:rPr>
+              <a:t>App.jsx
+Route tree</a:t>
+            </a:r>
+          </a:p>
+        </p:txBody>
+      </p:sp>
+      <p:cxnSp>
+        <p:nvCxnSpPr>
+          <p:cNvPr id="12" name="Connector 11"/>
+          <p:cNvCxnSpPr/>
+          <p:nvPr/>
+        </p:nvCxnSpPr>
+        <p:spPr>
+          <a:xfrm>
+            <a:off x="3840480" y="1920240"/>
+            <a:ext cx="256032" cy="0"/>
+          </a:xfrm>
+          <a:prstGeom prst="line">
+            <a:avLst/>
+          </a:prstGeom>
+          <a:ln w="20320">
+            <a:solidFill>
+              <a:srgbClr val="AAB6C9"/>
+            </a:solidFill>
+          </a:ln>
+        </p:spPr>
+        <p:style>
+          <a:lnRef idx="2">
+            <a:schemeClr val="accent1"/>
+          </a:lnRef>
+          <a:fillRef idx="0">
+            <a:schemeClr val="accent1"/>
+          </a:fillRef>
+          <a:effectRef idx="1">
+            <a:schemeClr val="accent1"/>
+          </a:effectRef>
+          <a:fontRef idx="minor">
+            <a:schemeClr val="tx1"/>
+          </a:fontRef>
+        </p:style>
+      </p:cxnSp>
+      <p:sp>
+        <p:nvSpPr>
+          <p:cNvPr id="13" name="Rounded Rectangle 12"/>
+          <p:cNvSpPr/>
+          <p:nvPr/>
+        </p:nvSpPr>
+        <p:spPr>
+          <a:xfrm>
+            <a:off x="4096512" y="1600200"/>
+            <a:ext cx="1783080" cy="640080"/>
+          </a:xfrm>
+          <a:prstGeom prst="roundRect">
+            <a:avLst/>
+          </a:prstGeom>
+          <a:solidFill>
+            <a:srgbClr val="16223B"/>
+          </a:solidFill>
+          <a:ln>
+            <a:solidFill>
+              <a:srgbClr val="A78BFA"/>
+            </a:solidFill>
+          </a:ln>
+        </p:spPr>
+        <p:style>
+          <a:lnRef idx="1">
+            <a:schemeClr val="accent1"/>
+          </a:lnRef>
+          <a:fillRef idx="3">
+            <a:schemeClr val="accent1"/>
+          </a:fillRef>
+          <a:effectRef idx="2">
+            <a:schemeClr val="accent1"/>
+          </a:effectRef>
+          <a:fontRef idx="minor">
+            <a:schemeClr val="lt1"/>
+          </a:fontRef>
+        </p:style>
+        <p:txBody>
+          <a:bodyPr rtlCol="0" anchor="ctr"/>
+          <a:lstStyle/>
+          <a:p>
+            <a:pPr algn="ctr"/>
+          </a:p>
+        </p:txBody>
+      </p:sp>
+      <p:sp>
+        <p:nvSpPr>
+          <p:cNvPr id="14" name="TextBox 13"/>
+          <p:cNvSpPr txBox="1"/>
+          <p:nvPr/>
+        </p:nvSpPr>
+        <p:spPr>
+          <a:xfrm>
+            <a:off x="4169664" y="1627632"/>
+            <a:ext cx="1636776" cy="585215"/>
+          </a:xfrm>
+          <a:prstGeom prst="rect">
+            <a:avLst/>
+          </a:prstGeom>
+          <a:noFill/>
+        </p:spPr>
+        <p:txBody>
+          <a:bodyPr wrap="none" anchor="ctr">
+            <a:spAutoFit/>
+          </a:bodyPr>
+          <a:lstStyle/>
+          <a:p>
+            <a:pPr algn="ctr"/>
+            <a:r>
+              <a:rPr sz="1000" b="1">
+                <a:solidFill>
+                  <a:srgbClr val="F5F7FA"/>
+                </a:solidFill>
+                <a:latin typeface="Aptos"/>
+              </a:rPr>
+              <a:t>ProtectedRoute
+AuthContext</a:t>
+            </a:r>
+          </a:p>
+        </p:txBody>
+      </p:sp>
+      <p:cxnSp>
+        <p:nvCxnSpPr>
+          <p:cNvPr id="15" name="Connector 14"/>
+          <p:cNvCxnSpPr/>
+          <p:nvPr/>
+        </p:nvCxnSpPr>
+        <p:spPr>
+          <a:xfrm>
+            <a:off x="5879592" y="1920240"/>
+            <a:ext cx="265176" cy="0"/>
+          </a:xfrm>
+          <a:prstGeom prst="line">
+            <a:avLst/>
+          </a:prstGeom>
+          <a:ln w="20320">
+            <a:solidFill>
+              <a:srgbClr val="AAB6C9"/>
+            </a:solidFill>
+          </a:ln>
+        </p:spPr>
+        <p:style>
+          <a:lnRef idx="2">
+            <a:schemeClr val="accent1"/>
+          </a:lnRef>
+          <a:fillRef idx="0">
+            <a:schemeClr val="accent1"/>
+          </a:fillRef>
+          <a:effectRef idx="1">
+            <a:schemeClr val="accent1"/>
+          </a:effectRef>
+          <a:fontRef idx="minor">
+            <a:schemeClr val="tx1"/>
+          </a:fontRef>
+        </p:style>
+      </p:cxnSp>
+      <p:sp>
+        <p:nvSpPr>
+          <p:cNvPr id="16" name="Rounded Rectangle 15"/>
+          <p:cNvSpPr/>
+          <p:nvPr/>
+        </p:nvSpPr>
+        <p:spPr>
+          <a:xfrm>
+            <a:off x="6144768" y="1600200"/>
+            <a:ext cx="1783080" cy="640080"/>
+          </a:xfrm>
+          <a:prstGeom prst="roundRect">
+            <a:avLst/>
+          </a:prstGeom>
+          <a:solidFill>
+            <a:srgbClr val="16223B"/>
+          </a:solidFill>
+          <a:ln>
+            <a:solidFill>
+              <a:srgbClr val="A78BFA"/>
+            </a:solidFill>
+          </a:ln>
+        </p:spPr>
+        <p:style>
+          <a:lnRef idx="1">
+            <a:schemeClr val="accent1"/>
+          </a:lnRef>
+          <a:fillRef idx="3">
+            <a:schemeClr val="accent1"/>
+          </a:fillRef>
+          <a:effectRef idx="2">
+            <a:schemeClr val="accent1"/>
+          </a:effectRef>
+          <a:fontRef idx="minor">
+            <a:schemeClr val="lt1"/>
+          </a:fontRef>
+        </p:style>
+        <p:txBody>
+          <a:bodyPr rtlCol="0" anchor="ctr"/>
+          <a:lstStyle/>
+          <a:p>
+            <a:pPr algn="ctr"/>
+          </a:p>
+        </p:txBody>
+      </p:sp>
+      <p:sp>
+        <p:nvSpPr>
+          <p:cNvPr id="17" name="TextBox 16"/>
+          <p:cNvSpPr txBox="1"/>
+          <p:nvPr/>
+        </p:nvSpPr>
+        <p:spPr>
+          <a:xfrm>
+            <a:off x="6217920" y="1627632"/>
+            <a:ext cx="1636776" cy="585215"/>
+          </a:xfrm>
+          <a:prstGeom prst="rect">
+            <a:avLst/>
+          </a:prstGeom>
+          <a:noFill/>
+        </p:spPr>
+        <p:txBody>
+          <a:bodyPr wrap="none" anchor="ctr">
+            <a:spAutoFit/>
+          </a:bodyPr>
+          <a:lstStyle/>
+          <a:p>
+            <a:pPr algn="ctr"/>
+            <a:r>
+              <a:rPr sz="1000" b="1">
+                <a:solidFill>
+                  <a:srgbClr val="F5F7FA"/>
+                </a:solidFill>
+                <a:latin typeface="Aptos"/>
+              </a:rPr>
+              <a:t>PortalLayout
+role-scoped shell</a:t>
+            </a:r>
+          </a:p>
+        </p:txBody>
+      </p:sp>
+      <p:cxnSp>
+        <p:nvCxnSpPr>
+          <p:cNvPr id="18" name="Connector 17"/>
+          <p:cNvCxnSpPr/>
+          <p:nvPr/>
+        </p:nvCxnSpPr>
+        <p:spPr>
+          <a:xfrm>
+            <a:off x="7927848" y="1920240"/>
+            <a:ext cx="265176" cy="0"/>
+          </a:xfrm>
+          <a:prstGeom prst="line">
+            <a:avLst/>
+          </a:prstGeom>
+          <a:ln w="20320">
+            <a:solidFill>
+              <a:srgbClr val="AAB6C9"/>
+            </a:solidFill>
+          </a:ln>
+        </p:spPr>
+        <p:style>
+          <a:lnRef idx="2">
+            <a:schemeClr val="accent1"/>
+          </a:lnRef>
+          <a:fillRef idx="0">
+            <a:schemeClr val="accent1"/>
+          </a:fillRef>
+          <a:effectRef idx="1">
+            <a:schemeClr val="accent1"/>
+          </a:effectRef>
+          <a:fontRef idx="minor">
+            <a:schemeClr val="tx1"/>
+          </a:fontRef>
+        </p:style>
+      </p:cxnSp>
+      <p:sp>
+        <p:nvSpPr>
+          <p:cNvPr id="19" name="Rounded Rectangle 18"/>
+          <p:cNvSpPr/>
+          <p:nvPr/>
+        </p:nvSpPr>
+        <p:spPr>
+          <a:xfrm>
+            <a:off x="8193024" y="1600200"/>
+            <a:ext cx="1097280" cy="640080"/>
+          </a:xfrm>
+          <a:prstGeom prst="roundRect">
+            <a:avLst/>
+          </a:prstGeom>
+          <a:solidFill>
+            <a:srgbClr val="16223B"/>
+          </a:solidFill>
+          <a:ln>
+            <a:solidFill>
+              <a:srgbClr val="34D399"/>
+            </a:solidFill>
+          </a:ln>
+        </p:spPr>
+        <p:style>
+          <a:lnRef idx="1">
+            <a:schemeClr val="accent1"/>
+          </a:lnRef>
+          <a:fillRef idx="3">
+            <a:schemeClr val="accent1"/>
+          </a:fillRef>
+          <a:effectRef idx="2">
+            <a:schemeClr val="accent1"/>
+          </a:effectRef>
+          <a:fontRef idx="minor">
+            <a:schemeClr val="lt1"/>
+          </a:fontRef>
+        </p:style>
+        <p:txBody>
+          <a:bodyPr rtlCol="0" anchor="ctr"/>
+          <a:lstStyle/>
+          <a:p>
+            <a:pPr algn="ctr"/>
+          </a:p>
+        </p:txBody>
+      </p:sp>
+      <p:sp>
+        <p:nvSpPr>
+          <p:cNvPr id="20" name="TextBox 19"/>
+          <p:cNvSpPr txBox="1"/>
+          <p:nvPr/>
+        </p:nvSpPr>
+        <p:spPr>
+          <a:xfrm>
+            <a:off x="8266176" y="1627632"/>
+            <a:ext cx="950976" cy="585215"/>
+          </a:xfrm>
+          <a:prstGeom prst="rect">
+            <a:avLst/>
+          </a:prstGeom>
+          <a:noFill/>
+        </p:spPr>
+        <p:txBody>
+          <a:bodyPr wrap="none" anchor="ctr">
+            <a:spAutoFit/>
+          </a:bodyPr>
+          <a:lstStyle/>
+          <a:p>
+            <a:pPr algn="ctr"/>
+            <a:r>
+              <a:rPr sz="1100" b="1">
+                <a:solidFill>
+                  <a:srgbClr val="F5F7FA"/>
+                </a:solidFill>
+                <a:latin typeface="Aptos"/>
+              </a:rPr>
+              <a:t>Pages</a:t>
+            </a:r>
+          </a:p>
+        </p:txBody>
+      </p:sp>
+      <p:cxnSp>
+        <p:nvCxnSpPr>
+          <p:cNvPr id="21" name="Connector 20"/>
+          <p:cNvCxnSpPr/>
+          <p:nvPr/>
+        </p:nvCxnSpPr>
+        <p:spPr>
+          <a:xfrm>
+            <a:off x="9290304" y="1920240"/>
+            <a:ext cx="265176" cy="0"/>
+          </a:xfrm>
+          <a:prstGeom prst="line">
+            <a:avLst/>
+          </a:prstGeom>
+          <a:ln w="20320">
+            <a:solidFill>
+              <a:srgbClr val="AAB6C9"/>
+            </a:solidFill>
+          </a:ln>
+        </p:spPr>
+        <p:style>
+          <a:lnRef idx="2">
+            <a:schemeClr val="accent1"/>
+          </a:lnRef>
+          <a:fillRef idx="0">
+            <a:schemeClr val="accent1"/>
+          </a:fillRef>
+          <a:effectRef idx="1">
+            <a:schemeClr val="accent1"/>
+          </a:effectRef>
+          <a:fontRef idx="minor">
+            <a:schemeClr val="tx1"/>
+          </a:fontRef>
+        </p:style>
+      </p:cxnSp>
+      <p:sp>
+        <p:nvSpPr>
+          <p:cNvPr id="22" name="Rounded Rectangle 21"/>
+          <p:cNvSpPr/>
+          <p:nvPr/>
+        </p:nvSpPr>
+        <p:spPr>
+          <a:xfrm>
+            <a:off x="9555480" y="1600200"/>
+            <a:ext cx="1783080" cy="640080"/>
+          </a:xfrm>
+          <a:prstGeom prst="roundRect">
+            <a:avLst/>
+          </a:prstGeom>
+          <a:solidFill>
+            <a:srgbClr val="16223B"/>
+          </a:solidFill>
+          <a:ln>
+            <a:solidFill>
+              <a:srgbClr val="34D399"/>
+            </a:solidFill>
+          </a:ln>
+        </p:spPr>
+        <p:style>
+          <a:lnRef idx="1">
+            <a:schemeClr val="accent1"/>
+          </a:lnRef>
+          <a:fillRef idx="3">
+            <a:schemeClr val="accent1"/>
+          </a:fillRef>
+          <a:effectRef idx="2">
+            <a:schemeClr val="accent1"/>
+          </a:effectRef>
+          <a:fontRef idx="minor">
+            <a:schemeClr val="lt1"/>
+          </a:fontRef>
+        </p:style>
+        <p:txBody>
+          <a:bodyPr rtlCol="0" anchor="ctr"/>
+          <a:lstStyle/>
+          <a:p>
+            <a:pPr algn="ctr"/>
+          </a:p>
+        </p:txBody>
+      </p:sp>
+      <p:sp>
+        <p:nvSpPr>
+          <p:cNvPr id="23" name="TextBox 22"/>
+          <p:cNvSpPr txBox="1"/>
+          <p:nvPr/>
+        </p:nvSpPr>
+        <p:spPr>
+          <a:xfrm>
+            <a:off x="9628632" y="1627632"/>
+            <a:ext cx="1636776" cy="585215"/>
+          </a:xfrm>
+          <a:prstGeom prst="rect">
+            <a:avLst/>
+          </a:prstGeom>
+          <a:noFill/>
+        </p:spPr>
+        <p:txBody>
+          <a:bodyPr wrap="none" anchor="ctr">
+            <a:spAutoFit/>
+          </a:bodyPr>
+          <a:lstStyle/>
+          <a:p>
+            <a:pPr algn="ctr"/>
+            <a:r>
+              <a:rPr sz="1000" b="1">
+                <a:solidFill>
+                  <a:srgbClr val="F5F7FA"/>
+                </a:solidFill>
+                <a:latin typeface="Aptos"/>
+              </a:rPr>
+              <a:t>Components
++ lib/api.js</a:t>
+            </a:r>
+          </a:p>
+        </p:txBody>
+      </p:sp>
+      <p:sp>
+        <p:nvSpPr>
+          <p:cNvPr id="24" name="Rounded Rectangle 23"/>
+          <p:cNvSpPr/>
+          <p:nvPr/>
+        </p:nvSpPr>
+        <p:spPr>
+          <a:xfrm>
+            <a:off x="566928" y="2670048"/>
+            <a:ext cx="3520440" cy="2057400"/>
+          </a:xfrm>
+          <a:prstGeom prst="roundRect">
+            <a:avLst/>
+          </a:prstGeom>
+          <a:solidFill>
+            <a:srgbClr val="16223B"/>
+          </a:solidFill>
+          <a:ln>
+            <a:solidFill>
+              <a:srgbClr val="2A3953"/>
+            </a:solidFill>
+          </a:ln>
+        </p:spPr>
+        <p:style>
+          <a:lnRef idx="1">
+            <a:schemeClr val="accent1"/>
+          </a:lnRef>
+          <a:fillRef idx="3">
+            <a:schemeClr val="accent1"/>
+          </a:fillRef>
+          <a:effectRef idx="2">
+            <a:schemeClr val="accent1"/>
+          </a:effectRef>
+          <a:fontRef idx="minor">
+            <a:schemeClr val="lt1"/>
+          </a:fontRef>
+        </p:style>
+        <p:txBody>
+          <a:bodyPr rtlCol="0" anchor="ctr"/>
+          <a:lstStyle/>
+          <a:p>
+            <a:pPr algn="ctr"/>
+          </a:p>
+        </p:txBody>
+      </p:sp>
+      <p:sp>
+        <p:nvSpPr>
+          <p:cNvPr id="25" name="Rectangle 24"/>
+          <p:cNvSpPr/>
+          <p:nvPr/>
+        </p:nvSpPr>
+        <p:spPr>
+          <a:xfrm>
+            <a:off x="566928" y="2670048"/>
+            <a:ext cx="54864" cy="2057400"/>
+          </a:xfrm>
+          <a:prstGeom prst="rect">
+            <a:avLst/>
+          </a:prstGeom>
+          <a:solidFill>
+            <a:srgbClr val="22D3EE"/>
+          </a:solidFill>
+          <a:ln>
+            <a:noFill/>
+          </a:ln>
+        </p:spPr>
+        <p:style>
+          <a:lnRef idx="1">
+            <a:schemeClr val="accent1"/>
+          </a:lnRef>
+          <a:fillRef idx="3">
+            <a:schemeClr val="accent1"/>
+          </a:fillRef>
+          <a:effectRef idx="2">
+            <a:schemeClr val="accent1"/>
+          </a:effectRef>
+          <a:fontRef idx="minor">
+            <a:schemeClr val="lt1"/>
+          </a:fontRef>
+        </p:style>
+        <p:txBody>
+          <a:bodyPr rtlCol="0" anchor="ctr"/>
+          <a:lstStyle/>
+          <a:p>
+            <a:pPr algn="ctr"/>
+          </a:p>
+        </p:txBody>
+      </p:sp>
+      <p:sp>
+        <p:nvSpPr>
+          <p:cNvPr id="26" name="TextBox 25"/>
+          <p:cNvSpPr txBox="1"/>
+          <p:nvPr/>
+        </p:nvSpPr>
+        <p:spPr>
+          <a:xfrm>
+            <a:off x="731520" y="2779776"/>
+            <a:ext cx="3246120" cy="320040"/>
+          </a:xfrm>
+          <a:prstGeom prst="rect">
+            <a:avLst/>
+          </a:prstGeom>
+          <a:noFill/>
+        </p:spPr>
+        <p:txBody>
+          <a:bodyPr wrap="none" anchor="ctr">
+            <a:spAutoFit/>
+          </a:bodyPr>
+          <a:lstStyle/>
+          <a:p>
+            <a:pPr algn="l"/>
+            <a:r>
+              <a:rPr sz="1300" b="1">
+                <a:solidFill>
+                  <a:srgbClr val="F5F7FA"/>
+                </a:solidFill>
+                <a:latin typeface="Aptos"/>
+              </a:rPr>
+              <a:t>DATA OPERATOR</a:t>
+            </a:r>
+          </a:p>
+        </p:txBody>
+      </p:sp>
+      <p:sp>
+        <p:nvSpPr>
+          <p:cNvPr id="27" name="TextBox 26"/>
+          <p:cNvSpPr txBox="1"/>
+          <p:nvPr/>
+        </p:nvSpPr>
+        <p:spPr>
+          <a:xfrm>
+            <a:off x="731520" y="3145536"/>
+            <a:ext cx="3227832" cy="1490472"/>
+          </a:xfrm>
+          <a:prstGeom prst="rect">
+            <a:avLst/>
+          </a:prstGeom>
+          <a:noFill/>
+        </p:spPr>
+        <p:txBody>
+          <a:bodyPr wrap="none" anchor="t">
+            <a:spAutoFit/>
+          </a:bodyPr>
+          <a:lstStyle/>
+          <a:p>
+            <a:pPr algn="l"/>
+            <a:r>
+              <a:rPr sz="1000" b="0">
+                <a:solidFill>
+                  <a:srgbClr val="AAB6C9"/>
+                </a:solidFill>
+                <a:latin typeface="Aptos"/>
+              </a:rPr>
+              <a:t>pages/operator/
+• UploadPage
+• ImportHistoryPage
+• OperatorDashboard
+Flow: upload → import summary → validation health → source lineage</a:t>
+            </a:r>
+          </a:p>
+        </p:txBody>
+      </p:sp>
+      <p:sp>
+        <p:nvSpPr>
+          <p:cNvPr id="28" name="Rounded Rectangle 27"/>
+          <p:cNvSpPr/>
+          <p:nvPr/>
+        </p:nvSpPr>
+        <p:spPr>
+          <a:xfrm>
+            <a:off x="4315968" y="2670048"/>
+            <a:ext cx="3520440" cy="2057400"/>
+          </a:xfrm>
+          <a:prstGeom prst="roundRect">
+            <a:avLst/>
+          </a:prstGeom>
+          <a:solidFill>
+            <a:srgbClr val="16223B"/>
+          </a:solidFill>
+          <a:ln>
+            <a:solidFill>
+              <a:srgbClr val="2A3953"/>
+            </a:solidFill>
+          </a:ln>
+        </p:spPr>
+        <p:style>
+          <a:lnRef idx="1">
+            <a:schemeClr val="accent1"/>
+          </a:lnRef>
+          <a:fillRef idx="3">
+            <a:schemeClr val="accent1"/>
+          </a:fillRef>
+          <a:effectRef idx="2">
+            <a:schemeClr val="accent1"/>
+          </a:effectRef>
+          <a:fontRef idx="minor">
+            <a:schemeClr val="lt1"/>
+          </a:fontRef>
+        </p:style>
+        <p:txBody>
+          <a:bodyPr rtlCol="0" anchor="ctr"/>
+          <a:lstStyle/>
+          <a:p>
+            <a:pPr algn="ctr"/>
+          </a:p>
+        </p:txBody>
+      </p:sp>
+      <p:sp>
+        <p:nvSpPr>
+          <p:cNvPr id="29" name="Rectangle 28"/>
+          <p:cNvSpPr/>
+          <p:nvPr/>
+        </p:nvSpPr>
+        <p:spPr>
+          <a:xfrm>
+            <a:off x="4315968" y="2670048"/>
+            <a:ext cx="54864" cy="2057400"/>
+          </a:xfrm>
+          <a:prstGeom prst="rect">
+            <a:avLst/>
+          </a:prstGeom>
+          <a:solidFill>
+            <a:srgbClr val="A78BFA"/>
+          </a:solidFill>
+          <a:ln>
+            <a:noFill/>
+          </a:ln>
+        </p:spPr>
+        <p:style>
+          <a:lnRef idx="1">
+            <a:schemeClr val="accent1"/>
+          </a:lnRef>
+          <a:fillRef idx="3">
+            <a:schemeClr val="accent1"/>
+          </a:fillRef>
+          <a:effectRef idx="2">
+            <a:schemeClr val="accent1"/>
+          </a:effectRef>
+          <a:fontRef idx="minor">
+            <a:schemeClr val="lt1"/>
+          </a:fontRef>
+        </p:style>
+        <p:txBody>
+          <a:bodyPr rtlCol="0" anchor="ctr"/>
+          <a:lstStyle/>
+          <a:p>
+            <a:pPr algn="ctr"/>
+          </a:p>
+        </p:txBody>
+      </p:sp>
+      <p:sp>
+        <p:nvSpPr>
+          <p:cNvPr id="30" name="TextBox 29"/>
+          <p:cNvSpPr txBox="1"/>
+          <p:nvPr/>
+        </p:nvSpPr>
+        <p:spPr>
+          <a:xfrm>
+            <a:off x="4480559" y="2779776"/>
+            <a:ext cx="3246120" cy="320040"/>
+          </a:xfrm>
+          <a:prstGeom prst="rect">
+            <a:avLst/>
+          </a:prstGeom>
+          <a:noFill/>
+        </p:spPr>
+        <p:txBody>
+          <a:bodyPr wrap="none" anchor="ctr">
+            <a:spAutoFit/>
+          </a:bodyPr>
+          <a:lstStyle/>
+          <a:p>
+            <a:pPr algn="l"/>
+            <a:r>
+              <a:rPr sz="1300" b="1">
+                <a:solidFill>
+                  <a:srgbClr val="F5F7FA"/>
+                </a:solidFill>
+                <a:latin typeface="Aptos"/>
+              </a:rPr>
+              <a:t>REVIEWER</a:t>
+            </a:r>
+          </a:p>
+        </p:txBody>
+      </p:sp>
+      <p:sp>
+        <p:nvSpPr>
+          <p:cNvPr id="31" name="TextBox 30"/>
+          <p:cNvSpPr txBox="1"/>
+          <p:nvPr/>
+        </p:nvSpPr>
+        <p:spPr>
+          <a:xfrm>
+            <a:off x="4480559" y="3145536"/>
+            <a:ext cx="3227832" cy="1490472"/>
+          </a:xfrm>
+          <a:prstGeom prst="rect">
+            <a:avLst/>
+          </a:prstGeom>
+          <a:noFill/>
+        </p:spPr>
+        <p:txBody>
+          <a:bodyPr wrap="none" anchor="t">
+            <a:spAutoFit/>
+          </a:bodyPr>
+          <a:lstStyle/>
+          <a:p>
+            <a:pPr algn="l"/>
+            <a:r>
+              <a:rPr sz="1000" b="0">
+                <a:solidFill>
+                  <a:srgbClr val="AAB6C9"/>
+                </a:solidFill>
+                <a:latin typeface="Aptos"/>
+              </a:rPr>
+              <a:t>pages/reviewer/
+• ExceptionQueuePage
+• LoanDetailPage
+• ReconciliationPage
+• ReviewerDashboard
+Flow: exception → AI panel → decision → reconciliation</a:t>
+            </a:r>
+          </a:p>
+        </p:txBody>
+      </p:sp>
+      <p:sp>
+        <p:nvSpPr>
+          <p:cNvPr id="32" name="Rounded Rectangle 31"/>
+          <p:cNvSpPr/>
+          <p:nvPr/>
+        </p:nvSpPr>
+        <p:spPr>
+          <a:xfrm>
+            <a:off x="8065008" y="2670048"/>
+            <a:ext cx="3520440" cy="2057400"/>
+          </a:xfrm>
+          <a:prstGeom prst="roundRect">
+            <a:avLst/>
+          </a:prstGeom>
+          <a:solidFill>
+            <a:srgbClr val="16223B"/>
+          </a:solidFill>
+          <a:ln>
+            <a:solidFill>
+              <a:srgbClr val="2A3953"/>
+            </a:solidFill>
+          </a:ln>
+        </p:spPr>
+        <p:style>
+          <a:lnRef idx="1">
+            <a:schemeClr val="accent1"/>
+          </a:lnRef>
+          <a:fillRef idx="3">
+            <a:schemeClr val="accent1"/>
+          </a:fillRef>
+          <a:effectRef idx="2">
+            <a:schemeClr val="accent1"/>
+          </a:effectRef>
+          <a:fontRef idx="minor">
+            <a:schemeClr val="lt1"/>
+          </a:fontRef>
+        </p:style>
+        <p:txBody>
+          <a:bodyPr rtlCol="0" anchor="ctr"/>
+          <a:lstStyle/>
+          <a:p>
+            <a:pPr algn="ctr"/>
+          </a:p>
+        </p:txBody>
+      </p:sp>
+      <p:sp>
+        <p:nvSpPr>
+          <p:cNvPr id="33" name="Rectangle 32"/>
+          <p:cNvSpPr/>
+          <p:nvPr/>
+        </p:nvSpPr>
+        <p:spPr>
+          <a:xfrm>
+            <a:off x="8065008" y="2670048"/>
+            <a:ext cx="54864" cy="2057400"/>
+          </a:xfrm>
+          <a:prstGeom prst="rect">
+            <a:avLst/>
+          </a:prstGeom>
+          <a:solidFill>
+            <a:srgbClr val="34D399"/>
+          </a:solidFill>
+          <a:ln>
+            <a:noFill/>
+          </a:ln>
+        </p:spPr>
+        <p:style>
+          <a:lnRef idx="1">
+            <a:schemeClr val="accent1"/>
+          </a:lnRef>
+          <a:fillRef idx="3">
+            <a:schemeClr val="accent1"/>
+          </a:fillRef>
+          <a:effectRef idx="2">
+            <a:schemeClr val="accent1"/>
+          </a:effectRef>
+          <a:fontRef idx="minor">
+            <a:schemeClr val="lt1"/>
+          </a:fontRef>
+        </p:style>
+        <p:txBody>
+          <a:bodyPr rtlCol="0" anchor="ctr"/>
+          <a:lstStyle/>
+          <a:p>
+            <a:pPr algn="ctr"/>
+          </a:p>
+        </p:txBody>
+      </p:sp>
+      <p:sp>
+        <p:nvSpPr>
+          <p:cNvPr id="34" name="TextBox 33"/>
+          <p:cNvSpPr txBox="1"/>
+          <p:nvPr/>
+        </p:nvSpPr>
+        <p:spPr>
+          <a:xfrm>
+            <a:off x="8229600" y="2779776"/>
+            <a:ext cx="3246120" cy="320040"/>
+          </a:xfrm>
+          <a:prstGeom prst="rect">
+            <a:avLst/>
+          </a:prstGeom>
+          <a:noFill/>
+        </p:spPr>
+        <p:txBody>
+          <a:bodyPr wrap="none" anchor="ctr">
+            <a:spAutoFit/>
+          </a:bodyPr>
+          <a:lstStyle/>
+          <a:p>
+            <a:pPr algn="l"/>
+            <a:r>
+              <a:rPr sz="1300" b="1">
+                <a:solidFill>
+                  <a:srgbClr val="F5F7FA"/>
+                </a:solidFill>
+                <a:latin typeface="Aptos"/>
+              </a:rPr>
+              <a:t>DATA CONSUMER</a:t>
+            </a:r>
+          </a:p>
+        </p:txBody>
+      </p:sp>
+      <p:sp>
+        <p:nvSpPr>
+          <p:cNvPr id="35" name="TextBox 34"/>
+          <p:cNvSpPr txBox="1"/>
+          <p:nvPr/>
+        </p:nvSpPr>
+        <p:spPr>
+          <a:xfrm>
+            <a:off x="8229600" y="3145536"/>
+            <a:ext cx="3227832" cy="1490472"/>
+          </a:xfrm>
+          <a:prstGeom prst="rect">
+            <a:avLst/>
+          </a:prstGeom>
+          <a:noFill/>
+        </p:spPr>
+        <p:txBody>
+          <a:bodyPr wrap="none" anchor="t">
+            <a:spAutoFit/>
+          </a:bodyPr>
+          <a:lstStyle/>
+          <a:p>
+            <a:pPr algn="l"/>
+            <a:r>
+              <a:rPr sz="1000" b="0">
+                <a:solidFill>
+                  <a:srgbClr val="AAB6C9"/>
+                </a:solidFill>
+                <a:latin typeface="Aptos"/>
+              </a:rPr>
+              <a:t>pages/consumer/
+• VerifiedRecordsPage
+• VerifiedRecordDetailPage
+• TrustScorePage
+• AuditViewerPage
+• ExportPage
+Flow: verified record → trust → proof → export</a:t>
+            </a:r>
+          </a:p>
+        </p:txBody>
+      </p:sp>
+      <p:sp>
+        <p:nvSpPr>
+          <p:cNvPr id="36" name="TextBox 35"/>
+          <p:cNvSpPr txBox="1"/>
+          <p:nvPr/>
+        </p:nvSpPr>
+        <p:spPr>
+          <a:xfrm>
+            <a:off x="566928" y="5010912"/>
+            <a:ext cx="1828800" cy="320040"/>
+          </a:xfrm>
+          <a:prstGeom prst="rect">
+            <a:avLst/>
+          </a:prstGeom>
+          <a:noFill/>
+        </p:spPr>
+        <p:txBody>
+          <a:bodyPr wrap="none" anchor="ctr">
+            <a:spAutoFit/>
+          </a:bodyPr>
+          <a:lstStyle/>
+          <a:p>
+            <a:pPr algn="l"/>
+            <a:r>
+              <a:rPr sz="1200" b="1">
+                <a:solidFill>
+                  <a:srgbClr val="F5F7FA"/>
+                </a:solidFill>
+                <a:latin typeface="Aptos"/>
+              </a:rPr>
+              <a:t>Shared frontend layer</a:t>
+            </a:r>
+          </a:p>
+        </p:txBody>
+      </p:sp>
+      <p:sp>
+        <p:nvSpPr>
+          <p:cNvPr id="37" name="Rounded Rectangle 36"/>
+          <p:cNvSpPr/>
+          <p:nvPr/>
+        </p:nvSpPr>
+        <p:spPr>
+          <a:xfrm>
+            <a:off x="566928" y="5394960"/>
+            <a:ext cx="1463040" cy="530352"/>
+          </a:xfrm>
+          <a:prstGeom prst="roundRect">
+            <a:avLst/>
+          </a:prstGeom>
+          <a:solidFill>
+            <a:srgbClr val="16223B"/>
+          </a:solidFill>
+          <a:ln>
+            <a:solidFill>
+              <a:srgbClr val="22D3EE"/>
+            </a:solidFill>
+          </a:ln>
+        </p:spPr>
+        <p:style>
+          <a:lnRef idx="1">
+            <a:schemeClr val="accent1"/>
+          </a:lnRef>
+          <a:fillRef idx="3">
+            <a:schemeClr val="accent1"/>
+          </a:fillRef>
+          <a:effectRef idx="2">
+            <a:schemeClr val="accent1"/>
+          </a:effectRef>
+          <a:fontRef idx="minor">
+            <a:schemeClr val="lt1"/>
+          </a:fontRef>
+        </p:style>
+        <p:txBody>
+          <a:bodyPr rtlCol="0" anchor="ctr"/>
+          <a:lstStyle/>
+          <a:p>
+            <a:pPr algn="ctr"/>
+          </a:p>
+        </p:txBody>
+      </p:sp>
+      <p:sp>
+        <p:nvSpPr>
+          <p:cNvPr id="38" name="TextBox 37"/>
+          <p:cNvSpPr txBox="1"/>
+          <p:nvPr/>
+        </p:nvSpPr>
+        <p:spPr>
+          <a:xfrm>
+            <a:off x="640080" y="5422392"/>
+            <a:ext cx="1316736" cy="475488"/>
+          </a:xfrm>
+          <a:prstGeom prst="rect">
+            <a:avLst/>
+          </a:prstGeom>
+          <a:noFill/>
+        </p:spPr>
+        <p:txBody>
+          <a:bodyPr wrap="none" anchor="ctr">
+            <a:spAutoFit/>
+          </a:bodyPr>
+          <a:lstStyle/>
+          <a:p>
+            <a:pPr algn="ctr"/>
+            <a:r>
+              <a:rPr sz="869" b="1">
+                <a:solidFill>
+                  <a:srgbClr val="F5F7FA"/>
+                </a:solidFill>
+                <a:latin typeface="Aptos"/>
+              </a:rPr>
+              <a:t>components/</a:t>
+            </a:r>
+          </a:p>
+        </p:txBody>
+      </p:sp>
+      <p:sp>
+        <p:nvSpPr>
+          <p:cNvPr id="39" name="Rounded Rectangle 38"/>
+          <p:cNvSpPr/>
+          <p:nvPr/>
+        </p:nvSpPr>
+        <p:spPr>
+          <a:xfrm>
+            <a:off x="2176272" y="5394960"/>
+            <a:ext cx="1737360" cy="530352"/>
+          </a:xfrm>
+          <a:prstGeom prst="roundRect">
+            <a:avLst/>
+          </a:prstGeom>
+          <a:solidFill>
+            <a:srgbClr val="16223B"/>
+          </a:solidFill>
+          <a:ln>
+            <a:solidFill>
+              <a:srgbClr val="A78BFA"/>
+            </a:solidFill>
+          </a:ln>
+        </p:spPr>
+        <p:style>
+          <a:lnRef idx="1">
+            <a:schemeClr val="accent1"/>
+          </a:lnRef>
+          <a:fillRef idx="3">
+            <a:schemeClr val="accent1"/>
+          </a:fillRef>
+          <a:effectRef idx="2">
+            <a:schemeClr val="accent1"/>
+          </a:effectRef>
+          <a:fontRef idx="minor">
+            <a:schemeClr val="lt1"/>
+          </a:fontRef>
+        </p:style>
+        <p:txBody>
+          <a:bodyPr rtlCol="0" anchor="ctr"/>
+          <a:lstStyle/>
+          <a:p>
+            <a:pPr algn="ctr"/>
+          </a:p>
+        </p:txBody>
+      </p:sp>
+      <p:sp>
+        <p:nvSpPr>
+          <p:cNvPr id="40" name="TextBox 39"/>
+          <p:cNvSpPr txBox="1"/>
+          <p:nvPr/>
+        </p:nvSpPr>
+        <p:spPr>
+          <a:xfrm>
+            <a:off x="2249424" y="5422392"/>
+            <a:ext cx="1591056" cy="475488"/>
+          </a:xfrm>
+          <a:prstGeom prst="rect">
+            <a:avLst/>
+          </a:prstGeom>
+          <a:noFill/>
+        </p:spPr>
+        <p:txBody>
+          <a:bodyPr wrap="none" anchor="ctr">
+            <a:spAutoFit/>
+          </a:bodyPr>
+          <a:lstStyle/>
+          <a:p>
+            <a:pPr algn="ctr"/>
+            <a:r>
+              <a:rPr sz="869" b="1">
+                <a:solidFill>
+                  <a:srgbClr val="F5F7FA"/>
+                </a:solidFill>
+                <a:latin typeface="Aptos"/>
+              </a:rPr>
+              <a:t>context/AuthContext</a:t>
+            </a:r>
+          </a:p>
+        </p:txBody>
+      </p:sp>
+      <p:sp>
+        <p:nvSpPr>
+          <p:cNvPr id="41" name="Rounded Rectangle 40"/>
+          <p:cNvSpPr/>
+          <p:nvPr/>
+        </p:nvSpPr>
+        <p:spPr>
+          <a:xfrm>
+            <a:off x="4059935" y="5394960"/>
+            <a:ext cx="1463040" cy="530352"/>
+          </a:xfrm>
+          <a:prstGeom prst="roundRect">
+            <a:avLst/>
+          </a:prstGeom>
+          <a:solidFill>
+            <a:srgbClr val="16223B"/>
+          </a:solidFill>
+          <a:ln>
+            <a:solidFill>
+              <a:srgbClr val="22D3EE"/>
+            </a:solidFill>
+          </a:ln>
+        </p:spPr>
+        <p:style>
+          <a:lnRef idx="1">
+            <a:schemeClr val="accent1"/>
+          </a:lnRef>
+          <a:fillRef idx="3">
+            <a:schemeClr val="accent1"/>
+          </a:fillRef>
+          <a:effectRef idx="2">
+            <a:schemeClr val="accent1"/>
+          </a:effectRef>
+          <a:fontRef idx="minor">
+            <a:schemeClr val="lt1"/>
+          </a:fontRef>
+        </p:style>
+        <p:txBody>
+          <a:bodyPr rtlCol="0" anchor="ctr"/>
+          <a:lstStyle/>
+          <a:p>
+            <a:pPr algn="ctr"/>
+          </a:p>
+        </p:txBody>
+      </p:sp>
+      <p:sp>
+        <p:nvSpPr>
+          <p:cNvPr id="42" name="TextBox 41"/>
+          <p:cNvSpPr txBox="1"/>
+          <p:nvPr/>
+        </p:nvSpPr>
+        <p:spPr>
+          <a:xfrm>
+            <a:off x="4133087" y="5422392"/>
+            <a:ext cx="1316736" cy="475488"/>
+          </a:xfrm>
+          <a:prstGeom prst="rect">
+            <a:avLst/>
+          </a:prstGeom>
+          <a:noFill/>
+        </p:spPr>
+        <p:txBody>
+          <a:bodyPr wrap="none" anchor="ctr">
+            <a:spAutoFit/>
+          </a:bodyPr>
+          <a:lstStyle/>
+          <a:p>
+            <a:pPr algn="ctr"/>
+            <a:r>
+              <a:rPr sz="869" b="1">
+                <a:solidFill>
+                  <a:srgbClr val="F5F7FA"/>
+                </a:solidFill>
+                <a:latin typeface="Aptos"/>
+              </a:rPr>
+              <a:t>lib/api.js</a:t>
+            </a:r>
+          </a:p>
+        </p:txBody>
+      </p:sp>
+      <p:sp>
+        <p:nvSpPr>
+          <p:cNvPr id="43" name="Rounded Rectangle 42"/>
+          <p:cNvSpPr/>
+          <p:nvPr/>
+        </p:nvSpPr>
+        <p:spPr>
+          <a:xfrm>
+            <a:off x="5669279" y="5394960"/>
+            <a:ext cx="1463040" cy="530352"/>
+          </a:xfrm>
+          <a:prstGeom prst="roundRect">
+            <a:avLst/>
+          </a:prstGeom>
+          <a:solidFill>
+            <a:srgbClr val="16223B"/>
+          </a:solidFill>
+          <a:ln>
+            <a:solidFill>
+              <a:srgbClr val="34D399"/>
+            </a:solidFill>
+          </a:ln>
+        </p:spPr>
+        <p:style>
+          <a:lnRef idx="1">
+            <a:schemeClr val="accent1"/>
+          </a:lnRef>
+          <a:fillRef idx="3">
+            <a:schemeClr val="accent1"/>
+          </a:fillRef>
+          <a:effectRef idx="2">
+            <a:schemeClr val="accent1"/>
+          </a:effectRef>
+          <a:fontRef idx="minor">
+            <a:schemeClr val="lt1"/>
+          </a:fontRef>
+        </p:style>
+        <p:txBody>
+          <a:bodyPr rtlCol="0" anchor="ctr"/>
+          <a:lstStyle/>
+          <a:p>
+            <a:pPr algn="ctr"/>
+          </a:p>
+        </p:txBody>
+      </p:sp>
+      <p:sp>
+        <p:nvSpPr>
+          <p:cNvPr id="44" name="TextBox 43"/>
+          <p:cNvSpPr txBox="1"/>
+          <p:nvPr/>
+        </p:nvSpPr>
+        <p:spPr>
+          <a:xfrm>
+            <a:off x="5742431" y="5422392"/>
+            <a:ext cx="1316736" cy="475488"/>
+          </a:xfrm>
+          <a:prstGeom prst="rect">
+            <a:avLst/>
+          </a:prstGeom>
+          <a:noFill/>
+        </p:spPr>
+        <p:txBody>
+          <a:bodyPr wrap="none" anchor="ctr">
+            <a:spAutoFit/>
+          </a:bodyPr>
+          <a:lstStyle/>
+          <a:p>
+            <a:pPr algn="ctr"/>
+            <a:r>
+              <a:rPr sz="869" b="1">
+                <a:solidFill>
+                  <a:srgbClr val="F5F7FA"/>
+                </a:solidFill>
+                <a:latin typeface="Aptos"/>
+              </a:rPr>
+              <a:t>lib/hash.js</a:t>
+            </a:r>
+          </a:p>
+        </p:txBody>
+      </p:sp>
+      <p:sp>
+        <p:nvSpPr>
+          <p:cNvPr id="45" name="Rounded Rectangle 44"/>
+          <p:cNvSpPr/>
+          <p:nvPr/>
+        </p:nvSpPr>
+        <p:spPr>
+          <a:xfrm>
+            <a:off x="7278623" y="5394960"/>
+            <a:ext cx="1463040" cy="530352"/>
+          </a:xfrm>
+          <a:prstGeom prst="roundRect">
+            <a:avLst/>
+          </a:prstGeom>
+          <a:solidFill>
+            <a:srgbClr val="16223B"/>
+          </a:solidFill>
+          <a:ln>
+            <a:solidFill>
+              <a:srgbClr val="A78BFA"/>
+            </a:solidFill>
+          </a:ln>
+        </p:spPr>
+        <p:style>
+          <a:lnRef idx="1">
+            <a:schemeClr val="accent1"/>
+          </a:lnRef>
+          <a:fillRef idx="3">
+            <a:schemeClr val="accent1"/>
+          </a:fillRef>
+          <a:effectRef idx="2">
+            <a:schemeClr val="accent1"/>
+          </a:effectRef>
+          <a:fontRef idx="minor">
+            <a:schemeClr val="lt1"/>
+          </a:fontRef>
+        </p:style>
+        <p:txBody>
+          <a:bodyPr rtlCol="0" anchor="ctr"/>
+          <a:lstStyle/>
+          <a:p>
+            <a:pPr algn="ctr"/>
+          </a:p>
+        </p:txBody>
+      </p:sp>
+      <p:sp>
+        <p:nvSpPr>
+          <p:cNvPr id="46" name="TextBox 45"/>
+          <p:cNvSpPr txBox="1"/>
+          <p:nvPr/>
+        </p:nvSpPr>
+        <p:spPr>
+          <a:xfrm>
+            <a:off x="7351775" y="5422392"/>
+            <a:ext cx="1316736" cy="475488"/>
+          </a:xfrm>
+          <a:prstGeom prst="rect">
+            <a:avLst/>
+          </a:prstGeom>
+          <a:noFill/>
+        </p:spPr>
+        <p:txBody>
+          <a:bodyPr wrap="none" anchor="ctr">
+            <a:spAutoFit/>
+          </a:bodyPr>
+          <a:lstStyle/>
+          <a:p>
+            <a:pPr algn="ctr"/>
+            <a:r>
+              <a:rPr sz="869" b="1">
+                <a:solidFill>
+                  <a:srgbClr val="F5F7FA"/>
+                </a:solidFill>
+                <a:latin typeface="Aptos"/>
+              </a:rPr>
+              <a:t>ProtectedRoute</a:t>
+            </a:r>
+          </a:p>
+        </p:txBody>
+      </p:sp>
+      <p:sp>
+        <p:nvSpPr>
+          <p:cNvPr id="47" name="TextBox 46"/>
+          <p:cNvSpPr txBox="1"/>
+          <p:nvPr/>
+        </p:nvSpPr>
+        <p:spPr>
+          <a:xfrm>
+            <a:off x="566928" y="6099048"/>
+            <a:ext cx="1508760" cy="274320"/>
+          </a:xfrm>
+          <a:prstGeom prst="rect">
+            <a:avLst/>
+          </a:prstGeom>
+          <a:noFill/>
+        </p:spPr>
+        <p:txBody>
+          <a:bodyPr wrap="none" anchor="ctr">
+            <a:spAutoFit/>
+          </a:bodyPr>
+          <a:lstStyle/>
+          <a:p>
+            <a:pPr algn="l"/>
+            <a:r>
+              <a:rPr sz="1100" b="1">
+                <a:solidFill>
+                  <a:srgbClr val="22D3EE"/>
+                </a:solidFill>
+                <a:latin typeface="Aptos"/>
+              </a:rPr>
+              <a:t>Key UX principle</a:t>
+            </a:r>
+          </a:p>
+        </p:txBody>
+      </p:sp>
+      <p:sp>
+        <p:nvSpPr>
+          <p:cNvPr id="48" name="TextBox 47"/>
+          <p:cNvSpPr txBox="1"/>
+          <p:nvPr/>
+        </p:nvSpPr>
+        <p:spPr>
+          <a:xfrm>
+            <a:off x="1828800" y="6053328"/>
+            <a:ext cx="9601200" cy="411480"/>
+          </a:xfrm>
+          <a:prstGeom prst="rect">
+            <a:avLst/>
+          </a:prstGeom>
+          <a:noFill/>
+        </p:spPr>
+        <p:txBody>
+          <a:bodyPr wrap="none" anchor="ctr">
+            <a:spAutoFit/>
+          </a:bodyPr>
+          <a:lstStyle/>
+          <a:p>
+            <a:pPr algn="l"/>
+            <a:r>
+              <a:rPr sz="1050" b="0">
+                <a:solidFill>
+                  <a:srgbClr val="F5F7FA"/>
+                </a:solidFill>
+                <a:latin typeface="Aptos"/>
+              </a:rPr>
+              <a:t>Each role sees only the workflow it needs — while all roles ultimately connect to the same verified-data lifecycle.</a:t>
+            </a:r>
           </a:p>
         </p:txBody>
       </p:sp>
